--- a/IoT/Apresentação Protocolos IoT BT.pptx
+++ b/IoT/Apresentação Protocolos IoT BT.pptx
@@ -5,17 +5,25 @@
     <p:sldMasterId id="2147483648" r:id="rId1"/>
   </p:sldMasterIdLst>
   <p:sldIdLst>
-    <p:sldId id="256" r:id="rId2"/>
-    <p:sldId id="257" r:id="rId3"/>
+    <p:sldId id="257" r:id="rId2"/>
+    <p:sldId id="256" r:id="rId3"/>
     <p:sldId id="259" r:id="rId4"/>
     <p:sldId id="266" r:id="rId5"/>
     <p:sldId id="260" r:id="rId6"/>
     <p:sldId id="267" r:id="rId7"/>
-    <p:sldId id="268" r:id="rId8"/>
-    <p:sldId id="261" r:id="rId9"/>
-    <p:sldId id="262" r:id="rId10"/>
-    <p:sldId id="264" r:id="rId11"/>
-    <p:sldId id="265" r:id="rId12"/>
+    <p:sldId id="264" r:id="rId8"/>
+    <p:sldId id="270" r:id="rId9"/>
+    <p:sldId id="271" r:id="rId10"/>
+    <p:sldId id="273" r:id="rId11"/>
+    <p:sldId id="274" r:id="rId12"/>
+    <p:sldId id="272" r:id="rId13"/>
+    <p:sldId id="275" r:id="rId14"/>
+    <p:sldId id="261" r:id="rId15"/>
+    <p:sldId id="277" r:id="rId16"/>
+    <p:sldId id="276" r:id="rId17"/>
+    <p:sldId id="280" r:id="rId18"/>
+    <p:sldId id="281" r:id="rId19"/>
+    <p:sldId id="278" r:id="rId20"/>
   </p:sldIdLst>
   <p:sldSz cx="12192000" cy="6858000"/>
   <p:notesSz cx="6858000" cy="9144000"/>
@@ -114,6 +122,11 @@
       </a:defRPr>
     </a:lvl9pPr>
   </p:defaultTextStyle>
+  <p:extLst>
+    <p:ext uri="{EFAFB233-063F-42B5-8137-9DF3F51BA10A}">
+      <p15:sldGuideLst xmlns:p15="http://schemas.microsoft.com/office/powerpoint/2012/main"/>
+    </p:ext>
+  </p:extLst>
 </p:presentation>
 </file>
 
@@ -264,7 +277,7 @@
           <a:p>
             <a:fld id="{AA855988-0721-4BA0-80EF-3E99D62DE5AA}" type="datetimeFigureOut">
               <a:rPr lang="pt-BR" smtClean="0"/>
-              <a:t>21/04/2025</a:t>
+              <a:t>23/04/2025</a:t>
             </a:fld>
             <a:endParaRPr lang="pt-BR"/>
           </a:p>
@@ -462,7 +475,7 @@
           <a:p>
             <a:fld id="{AA855988-0721-4BA0-80EF-3E99D62DE5AA}" type="datetimeFigureOut">
               <a:rPr lang="pt-BR" smtClean="0"/>
-              <a:t>21/04/2025</a:t>
+              <a:t>23/04/2025</a:t>
             </a:fld>
             <a:endParaRPr lang="pt-BR"/>
           </a:p>
@@ -670,7 +683,7 @@
           <a:p>
             <a:fld id="{AA855988-0721-4BA0-80EF-3E99D62DE5AA}" type="datetimeFigureOut">
               <a:rPr lang="pt-BR" smtClean="0"/>
-              <a:t>21/04/2025</a:t>
+              <a:t>23/04/2025</a:t>
             </a:fld>
             <a:endParaRPr lang="pt-BR"/>
           </a:p>
@@ -868,7 +881,7 @@
           <a:p>
             <a:fld id="{AA855988-0721-4BA0-80EF-3E99D62DE5AA}" type="datetimeFigureOut">
               <a:rPr lang="pt-BR" smtClean="0"/>
-              <a:t>21/04/2025</a:t>
+              <a:t>23/04/2025</a:t>
             </a:fld>
             <a:endParaRPr lang="pt-BR"/>
           </a:p>
@@ -1143,7 +1156,7 @@
           <a:p>
             <a:fld id="{AA855988-0721-4BA0-80EF-3E99D62DE5AA}" type="datetimeFigureOut">
               <a:rPr lang="pt-BR" smtClean="0"/>
-              <a:t>21/04/2025</a:t>
+              <a:t>23/04/2025</a:t>
             </a:fld>
             <a:endParaRPr lang="pt-BR"/>
           </a:p>
@@ -1408,7 +1421,7 @@
           <a:p>
             <a:fld id="{AA855988-0721-4BA0-80EF-3E99D62DE5AA}" type="datetimeFigureOut">
               <a:rPr lang="pt-BR" smtClean="0"/>
-              <a:t>21/04/2025</a:t>
+              <a:t>23/04/2025</a:t>
             </a:fld>
             <a:endParaRPr lang="pt-BR"/>
           </a:p>
@@ -1820,7 +1833,7 @@
           <a:p>
             <a:fld id="{AA855988-0721-4BA0-80EF-3E99D62DE5AA}" type="datetimeFigureOut">
               <a:rPr lang="pt-BR" smtClean="0"/>
-              <a:t>21/04/2025</a:t>
+              <a:t>23/04/2025</a:t>
             </a:fld>
             <a:endParaRPr lang="pt-BR"/>
           </a:p>
@@ -1961,7 +1974,7 @@
           <a:p>
             <a:fld id="{AA855988-0721-4BA0-80EF-3E99D62DE5AA}" type="datetimeFigureOut">
               <a:rPr lang="pt-BR" smtClean="0"/>
-              <a:t>21/04/2025</a:t>
+              <a:t>23/04/2025</a:t>
             </a:fld>
             <a:endParaRPr lang="pt-BR"/>
           </a:p>
@@ -2074,7 +2087,7 @@
           <a:p>
             <a:fld id="{AA855988-0721-4BA0-80EF-3E99D62DE5AA}" type="datetimeFigureOut">
               <a:rPr lang="pt-BR" smtClean="0"/>
-              <a:t>21/04/2025</a:t>
+              <a:t>23/04/2025</a:t>
             </a:fld>
             <a:endParaRPr lang="pt-BR"/>
           </a:p>
@@ -2385,7 +2398,7 @@
           <a:p>
             <a:fld id="{AA855988-0721-4BA0-80EF-3E99D62DE5AA}" type="datetimeFigureOut">
               <a:rPr lang="pt-BR" smtClean="0"/>
-              <a:t>21/04/2025</a:t>
+              <a:t>23/04/2025</a:t>
             </a:fld>
             <a:endParaRPr lang="pt-BR"/>
           </a:p>
@@ -2673,7 +2686,7 @@
           <a:p>
             <a:fld id="{AA855988-0721-4BA0-80EF-3E99D62DE5AA}" type="datetimeFigureOut">
               <a:rPr lang="pt-BR" smtClean="0"/>
-              <a:t>21/04/2025</a:t>
+              <a:t>23/04/2025</a:t>
             </a:fld>
             <a:endParaRPr lang="pt-BR"/>
           </a:p>
@@ -2914,7 +2927,7 @@
           <a:p>
             <a:fld id="{AA855988-0721-4BA0-80EF-3E99D62DE5AA}" type="datetimeFigureOut">
               <a:rPr lang="pt-BR" smtClean="0"/>
-              <a:t>21/04/2025</a:t>
+              <a:t>23/04/2025</a:t>
             </a:fld>
             <a:endParaRPr lang="pt-BR"/>
           </a:p>
@@ -3325,298 +3338,6 @@
           </a:blip>
           <a:srcRect/>
           <a:stretch>
-            <a:fillRect t="-9000" b="-9000"/>
-          </a:stretch>
-        </a:blipFill>
-        <a:effectLst/>
-      </p:bgPr>
-    </p:bg>
-    <p:spTree>
-      <p:nvGrpSpPr>
-        <p:cNvPr id="1" name=""/>
-        <p:cNvGrpSpPr/>
-        <p:nvPr/>
-      </p:nvGrpSpPr>
-      <p:grpSpPr>
-        <a:xfrm>
-          <a:off x="0" y="0"/>
-          <a:ext cx="0" cy="0"/>
-          <a:chOff x="0" y="0"/>
-          <a:chExt cx="0" cy="0"/>
-        </a:xfrm>
-      </p:grpSpPr>
-    </p:spTree>
-    <p:extLst>
-      <p:ext uri="{BB962C8B-B14F-4D97-AF65-F5344CB8AC3E}">
-        <p14:creationId xmlns:p14="http://schemas.microsoft.com/office/powerpoint/2010/main" val="2111624773"/>
-      </p:ext>
-    </p:extLst>
-  </p:cSld>
-  <p:clrMapOvr>
-    <a:masterClrMapping/>
-  </p:clrMapOvr>
-</p:sld>
-</file>
-
-<file path=ppt/slides/slide10.xml><?xml version="1.0" encoding="utf-8"?>
-<p:sld xmlns:a="http://schemas.openxmlformats.org/drawingml/2006/main" xmlns:r="http://schemas.openxmlformats.org/officeDocument/2006/relationships" xmlns:p="http://schemas.openxmlformats.org/presentationml/2006/main">
-  <p:cSld>
-    <p:bg>
-      <p:bgPr>
-        <a:blipFill dpi="0" rotWithShape="1">
-          <a:blip r:embed="rId2">
-            <a:lum/>
-          </a:blip>
-          <a:srcRect/>
-          <a:stretch>
-            <a:fillRect l="-20000" r="-262000" b="-231000"/>
-          </a:stretch>
-        </a:blipFill>
-        <a:effectLst/>
-      </p:bgPr>
-    </p:bg>
-    <p:spTree>
-      <p:nvGrpSpPr>
-        <p:cNvPr id="1" name="">
-          <a:extLst>
-            <a:ext uri="{FF2B5EF4-FFF2-40B4-BE49-F238E27FC236}">
-              <a16:creationId xmlns:a16="http://schemas.microsoft.com/office/drawing/2014/main" id="{16CD51F8-266E-1692-55E1-511BD52D65F1}"/>
-            </a:ext>
-          </a:extLst>
-        </p:cNvPr>
-        <p:cNvGrpSpPr/>
-        <p:nvPr/>
-      </p:nvGrpSpPr>
-      <p:grpSpPr>
-        <a:xfrm>
-          <a:off x="0" y="0"/>
-          <a:ext cx="0" cy="0"/>
-          <a:chOff x="0" y="0"/>
-          <a:chExt cx="0" cy="0"/>
-        </a:xfrm>
-      </p:grpSpPr>
-      <p:sp>
-        <p:nvSpPr>
-          <p:cNvPr id="3" name="Subtítulo 2">
-            <a:extLst>
-              <a:ext uri="{FF2B5EF4-FFF2-40B4-BE49-F238E27FC236}">
-                <a16:creationId xmlns:a16="http://schemas.microsoft.com/office/drawing/2014/main" id="{459075D4-282A-CDD3-EFD1-C21F01D74E5B}"/>
-              </a:ext>
-            </a:extLst>
-          </p:cNvPr>
-          <p:cNvSpPr>
-            <a:spLocks noGrp="1"/>
-          </p:cNvSpPr>
-          <p:nvPr>
-            <p:ph type="subTitle" idx="1"/>
-          </p:nvPr>
-        </p:nvSpPr>
-        <p:spPr>
-          <a:xfrm>
-            <a:off x="1225124" y="1712437"/>
-            <a:ext cx="9741751" cy="365748"/>
-          </a:xfrm>
-        </p:spPr>
-        <p:txBody>
-          <a:bodyPr>
-            <a:normAutofit fontScale="92500" lnSpcReduction="20000"/>
-          </a:bodyPr>
-          <a:lstStyle/>
-          <a:p>
-            <a:pPr algn="l"/>
-            <a:r>
-              <a:rPr lang="pt-BR" b="1" dirty="0">
-                <a:solidFill>
-                  <a:schemeClr val="bg1"/>
-                </a:solidFill>
-              </a:rPr>
-              <a:t>APLICAÇÕES</a:t>
-            </a:r>
-          </a:p>
-        </p:txBody>
-      </p:sp>
-      <p:cxnSp>
-        <p:nvCxnSpPr>
-          <p:cNvPr id="4" name="Google Shape;140;p3">
-            <a:extLst>
-              <a:ext uri="{FF2B5EF4-FFF2-40B4-BE49-F238E27FC236}">
-                <a16:creationId xmlns:a16="http://schemas.microsoft.com/office/drawing/2014/main" id="{57578539-0BF2-AE84-8A14-851FC4712780}"/>
-              </a:ext>
-            </a:extLst>
-          </p:cNvPr>
-          <p:cNvCxnSpPr>
-            <a:cxnSpLocks/>
-          </p:cNvCxnSpPr>
-          <p:nvPr/>
-        </p:nvCxnSpPr>
-        <p:spPr>
-          <a:xfrm>
-            <a:off x="1225124" y="2065867"/>
-            <a:ext cx="9741751" cy="0"/>
-          </a:xfrm>
-          <a:prstGeom prst="straightConnector1">
-            <a:avLst/>
-          </a:prstGeom>
-          <a:noFill/>
-          <a:ln w="57150" cap="flat" cmpd="sng">
-            <a:solidFill>
-              <a:schemeClr val="accent1"/>
-            </a:solidFill>
-            <a:prstDash val="solid"/>
-            <a:miter lim="800000"/>
-            <a:headEnd type="none" w="sm" len="sm"/>
-            <a:tailEnd type="none" w="sm" len="sm"/>
-          </a:ln>
-        </p:spPr>
-      </p:cxnSp>
-    </p:spTree>
-    <p:extLst>
-      <p:ext uri="{BB962C8B-B14F-4D97-AF65-F5344CB8AC3E}">
-        <p14:creationId xmlns:p14="http://schemas.microsoft.com/office/powerpoint/2010/main" val="378959159"/>
-      </p:ext>
-    </p:extLst>
-  </p:cSld>
-  <p:clrMapOvr>
-    <a:masterClrMapping/>
-  </p:clrMapOvr>
-</p:sld>
-</file>
-
-<file path=ppt/slides/slide11.xml><?xml version="1.0" encoding="utf-8"?>
-<p:sld xmlns:a="http://schemas.openxmlformats.org/drawingml/2006/main" xmlns:r="http://schemas.openxmlformats.org/officeDocument/2006/relationships" xmlns:p="http://schemas.openxmlformats.org/presentationml/2006/main">
-  <p:cSld>
-    <p:bg>
-      <p:bgPr>
-        <a:blipFill dpi="0" rotWithShape="1">
-          <a:blip r:embed="rId2">
-            <a:lum/>
-          </a:blip>
-          <a:srcRect/>
-          <a:stretch>
-            <a:fillRect l="-3000" t="-16000" r="-404000" b="-374000"/>
-          </a:stretch>
-        </a:blipFill>
-        <a:effectLst/>
-      </p:bgPr>
-    </p:bg>
-    <p:spTree>
-      <p:nvGrpSpPr>
-        <p:cNvPr id="1" name="">
-          <a:extLst>
-            <a:ext uri="{FF2B5EF4-FFF2-40B4-BE49-F238E27FC236}">
-              <a16:creationId xmlns:a16="http://schemas.microsoft.com/office/drawing/2014/main" id="{F680C335-2962-E123-47F8-A76469708EFD}"/>
-            </a:ext>
-          </a:extLst>
-        </p:cNvPr>
-        <p:cNvGrpSpPr/>
-        <p:nvPr/>
-      </p:nvGrpSpPr>
-      <p:grpSpPr>
-        <a:xfrm>
-          <a:off x="0" y="0"/>
-          <a:ext cx="0" cy="0"/>
-          <a:chOff x="0" y="0"/>
-          <a:chExt cx="0" cy="0"/>
-        </a:xfrm>
-      </p:grpSpPr>
-      <p:sp>
-        <p:nvSpPr>
-          <p:cNvPr id="3" name="Subtítulo 2">
-            <a:extLst>
-              <a:ext uri="{FF2B5EF4-FFF2-40B4-BE49-F238E27FC236}">
-                <a16:creationId xmlns:a16="http://schemas.microsoft.com/office/drawing/2014/main" id="{0FFCDAFA-983E-E523-E3A5-DDC6740D9B1A}"/>
-              </a:ext>
-            </a:extLst>
-          </p:cNvPr>
-          <p:cNvSpPr>
-            <a:spLocks noGrp="1"/>
-          </p:cNvSpPr>
-          <p:nvPr>
-            <p:ph type="subTitle" idx="1"/>
-          </p:nvPr>
-        </p:nvSpPr>
-        <p:spPr>
-          <a:xfrm>
-            <a:off x="1225124" y="1712437"/>
-            <a:ext cx="9741751" cy="365748"/>
-          </a:xfrm>
-        </p:spPr>
-        <p:txBody>
-          <a:bodyPr>
-            <a:normAutofit fontScale="92500" lnSpcReduction="20000"/>
-          </a:bodyPr>
-          <a:lstStyle/>
-          <a:p>
-            <a:pPr algn="l"/>
-            <a:r>
-              <a:rPr lang="pt-BR" b="1" dirty="0">
-                <a:solidFill>
-                  <a:schemeClr val="bg1"/>
-                </a:solidFill>
-              </a:rPr>
-              <a:t>BLUETOOTH LOW ENERGY (BLE)</a:t>
-            </a:r>
-          </a:p>
-        </p:txBody>
-      </p:sp>
-      <p:cxnSp>
-        <p:nvCxnSpPr>
-          <p:cNvPr id="4" name="Google Shape;140;p3">
-            <a:extLst>
-              <a:ext uri="{FF2B5EF4-FFF2-40B4-BE49-F238E27FC236}">
-                <a16:creationId xmlns:a16="http://schemas.microsoft.com/office/drawing/2014/main" id="{39A03BC5-F524-E2A1-861E-73404BF61050}"/>
-              </a:ext>
-            </a:extLst>
-          </p:cNvPr>
-          <p:cNvCxnSpPr>
-            <a:cxnSpLocks/>
-          </p:cNvCxnSpPr>
-          <p:nvPr/>
-        </p:nvCxnSpPr>
-        <p:spPr>
-          <a:xfrm>
-            <a:off x="1225124" y="2065867"/>
-            <a:ext cx="9741751" cy="0"/>
-          </a:xfrm>
-          <a:prstGeom prst="straightConnector1">
-            <a:avLst/>
-          </a:prstGeom>
-          <a:noFill/>
-          <a:ln w="57150" cap="flat" cmpd="sng">
-            <a:solidFill>
-              <a:schemeClr val="accent1"/>
-            </a:solidFill>
-            <a:prstDash val="solid"/>
-            <a:miter lim="800000"/>
-            <a:headEnd type="none" w="sm" len="sm"/>
-            <a:tailEnd type="none" w="sm" len="sm"/>
-          </a:ln>
-        </p:spPr>
-      </p:cxnSp>
-    </p:spTree>
-    <p:extLst>
-      <p:ext uri="{BB962C8B-B14F-4D97-AF65-F5344CB8AC3E}">
-        <p14:creationId xmlns:p14="http://schemas.microsoft.com/office/powerpoint/2010/main" val="3642222236"/>
-      </p:ext>
-    </p:extLst>
-  </p:cSld>
-  <p:clrMapOvr>
-    <a:masterClrMapping/>
-  </p:clrMapOvr>
-</p:sld>
-</file>
-
-<file path=ppt/slides/slide2.xml><?xml version="1.0" encoding="utf-8"?>
-<p:sld xmlns:a="http://schemas.openxmlformats.org/drawingml/2006/main" xmlns:r="http://schemas.openxmlformats.org/officeDocument/2006/relationships" xmlns:p="http://schemas.openxmlformats.org/presentationml/2006/main">
-  <p:cSld>
-    <p:bg>
-      <p:bgPr>
-        <a:blipFill dpi="0" rotWithShape="1">
-          <a:blip r:embed="rId2">
-            <a:lum/>
-          </a:blip>
-          <a:srcRect/>
-          <a:stretch>
             <a:fillRect/>
           </a:stretch>
         </a:blipFill>
@@ -3843,10 +3564,10 @@
       </p:sp>
       <p:grpSp>
         <p:nvGrpSpPr>
-          <p:cNvPr id="6" name="Google Shape;147;p3">
-            <a:extLst>
-              <a:ext uri="{FF2B5EF4-FFF2-40B4-BE49-F238E27FC236}">
-                <a16:creationId xmlns:a16="http://schemas.microsoft.com/office/drawing/2014/main" id="{981297ED-2E58-FBFC-5A62-D4D5321C7F70}"/>
+          <p:cNvPr id="2" name="Agrupar 1">
+            <a:extLst>
+              <a:ext uri="{FF2B5EF4-FFF2-40B4-BE49-F238E27FC236}">
+                <a16:creationId xmlns:a16="http://schemas.microsoft.com/office/drawing/2014/main" id="{B086A2BE-AC84-1C07-0A46-EC011163C0FA}"/>
               </a:ext>
             </a:extLst>
           </p:cNvPr>
@@ -3855,10 +3576,10 @@
         </p:nvGrpSpPr>
         <p:grpSpPr>
           <a:xfrm>
-            <a:off x="8476017" y="2642096"/>
+            <a:off x="8476017" y="2480354"/>
             <a:ext cx="2089200" cy="2605065"/>
-            <a:chOff x="9372270" y="3693658"/>
-            <a:chExt cx="1474871" cy="1839046"/>
+            <a:chOff x="8476017" y="2480354"/>
+            <a:chExt cx="2089200" cy="2605065"/>
           </a:xfrm>
         </p:grpSpPr>
         <p:sp>
@@ -3875,8 +3596,8 @@
           </p:nvSpPr>
           <p:spPr>
             <a:xfrm>
-              <a:off x="9372272" y="5270081"/>
-              <a:ext cx="1474869" cy="262623"/>
+              <a:off x="8476020" y="4713405"/>
+              <a:ext cx="2089197" cy="372014"/>
             </a:xfrm>
             <a:prstGeom prst="rect">
               <a:avLst/>
@@ -3961,8 +3682,8 @@
           </p:blipFill>
           <p:spPr>
             <a:xfrm>
-              <a:off x="9372270" y="3693658"/>
-              <a:ext cx="1474868" cy="1474868"/>
+              <a:off x="8476017" y="2480354"/>
+              <a:ext cx="2089196" cy="2089196"/>
             </a:xfrm>
             <a:prstGeom prst="ellipse">
               <a:avLst/>
@@ -3991,10 +3712,10 @@
       </p:grpSp>
       <p:grpSp>
         <p:nvGrpSpPr>
-          <p:cNvPr id="9" name="Google Shape;147;p3">
-            <a:extLst>
-              <a:ext uri="{FF2B5EF4-FFF2-40B4-BE49-F238E27FC236}">
-                <a16:creationId xmlns:a16="http://schemas.microsoft.com/office/drawing/2014/main" id="{0F977BDC-1B65-8F78-E259-23A1885B406E}"/>
+          <p:cNvPr id="3" name="Agrupar 2">
+            <a:extLst>
+              <a:ext uri="{FF2B5EF4-FFF2-40B4-BE49-F238E27FC236}">
+                <a16:creationId xmlns:a16="http://schemas.microsoft.com/office/drawing/2014/main" id="{E5439B00-4488-D2E6-5201-0698FD9CCFC7}"/>
               </a:ext>
             </a:extLst>
           </p:cNvPr>
@@ -4003,12 +3724,62 @@
         </p:nvGrpSpPr>
         <p:grpSpPr>
           <a:xfrm>
-            <a:off x="5044258" y="2480354"/>
-            <a:ext cx="2103484" cy="2766807"/>
-            <a:chOff x="9372272" y="3579477"/>
-            <a:chExt cx="1484955" cy="1953227"/>
+            <a:off x="5037114" y="2480354"/>
+            <a:ext cx="2103484" cy="2605065"/>
+            <a:chOff x="5037114" y="2480354"/>
+            <a:chExt cx="2103484" cy="2605065"/>
           </a:xfrm>
         </p:grpSpPr>
+        <p:pic>
+          <p:nvPicPr>
+            <p:cNvPr id="11" name="Google Shape;149;p3">
+              <a:extLst>
+                <a:ext uri="{FF2B5EF4-FFF2-40B4-BE49-F238E27FC236}">
+                  <a16:creationId xmlns:a16="http://schemas.microsoft.com/office/drawing/2014/main" id="{24770465-EE84-0840-E928-1C968BA8C40E}"/>
+                </a:ext>
+              </a:extLst>
+            </p:cNvPr>
+            <p:cNvPicPr preferRelativeResize="0"/>
+            <p:nvPr/>
+          </p:nvPicPr>
+          <p:blipFill>
+            <a:blip r:embed="rId4">
+              <a:extLst>
+                <a:ext uri="{28A0092B-C50C-407E-A947-70E740481C1C}">
+                  <a14:useLocalDpi xmlns:a14="http://schemas.microsoft.com/office/drawing/2010/main" val="0"/>
+                </a:ext>
+              </a:extLst>
+            </a:blip>
+            <a:srcRect l="15884" t="6039" r="15884" b="31457"/>
+            <a:stretch/>
+          </p:blipFill>
+          <p:spPr>
+            <a:xfrm>
+              <a:off x="5051403" y="2480354"/>
+              <a:ext cx="2089195" cy="2089197"/>
+            </a:xfrm>
+            <a:prstGeom prst="ellipse">
+              <a:avLst/>
+            </a:prstGeom>
+            <a:noFill/>
+            <a:ln w="63500" cap="rnd" cmpd="sng">
+              <a:solidFill>
+                <a:srgbClr val="008B96"/>
+              </a:solidFill>
+              <a:prstDash val="solid"/>
+              <a:round/>
+              <a:headEnd type="none" w="sm" len="sm"/>
+              <a:tailEnd type="none" w="sm" len="sm"/>
+            </a:ln>
+            <a:effectLst>
+              <a:outerShdw blurRad="381000" dist="292100" dir="5400000" sx="-80000" sy="-18000" rotWithShape="0">
+                <a:srgbClr val="000000">
+                  <a:alpha val="21176"/>
+                </a:srgbClr>
+              </a:outerShdw>
+            </a:effectLst>
+          </p:spPr>
+        </p:pic>
         <p:sp>
           <p:nvSpPr>
             <p:cNvPr id="10" name="Google Shape;148;p3">
@@ -4023,8 +3794,8 @@
           </p:nvSpPr>
           <p:spPr>
             <a:xfrm>
-              <a:off x="9372272" y="5270081"/>
-              <a:ext cx="1474869" cy="262623"/>
+              <a:off x="5037114" y="4713405"/>
+              <a:ext cx="2089197" cy="372014"/>
             </a:xfrm>
             <a:prstGeom prst="rect">
               <a:avLst/>
@@ -4088,63 +3859,13 @@
             </a:p>
           </p:txBody>
         </p:sp>
-        <p:pic>
-          <p:nvPicPr>
-            <p:cNvPr id="11" name="Google Shape;149;p3">
-              <a:extLst>
-                <a:ext uri="{FF2B5EF4-FFF2-40B4-BE49-F238E27FC236}">
-                  <a16:creationId xmlns:a16="http://schemas.microsoft.com/office/drawing/2014/main" id="{24770465-EE84-0840-E928-1C968BA8C40E}"/>
-                </a:ext>
-              </a:extLst>
-            </p:cNvPr>
-            <p:cNvPicPr preferRelativeResize="0"/>
-            <p:nvPr/>
-          </p:nvPicPr>
-          <p:blipFill>
-            <a:blip r:embed="rId4">
-              <a:extLst>
-                <a:ext uri="{28A0092B-C50C-407E-A947-70E740481C1C}">
-                  <a14:useLocalDpi xmlns:a14="http://schemas.microsoft.com/office/drawing/2010/main" val="0"/>
-                </a:ext>
-              </a:extLst>
-            </a:blip>
-            <a:srcRect l="15884" t="6039" r="15884" b="31457"/>
-            <a:stretch/>
-          </p:blipFill>
-          <p:spPr>
-            <a:xfrm>
-              <a:off x="9382359" y="3579477"/>
-              <a:ext cx="1474868" cy="1474868"/>
-            </a:xfrm>
-            <a:prstGeom prst="ellipse">
-              <a:avLst/>
-            </a:prstGeom>
-            <a:noFill/>
-            <a:ln w="63500" cap="rnd" cmpd="sng">
-              <a:solidFill>
-                <a:srgbClr val="008B96"/>
-              </a:solidFill>
-              <a:prstDash val="solid"/>
-              <a:round/>
-              <a:headEnd type="none" w="sm" len="sm"/>
-              <a:tailEnd type="none" w="sm" len="sm"/>
-            </a:ln>
-            <a:effectLst>
-              <a:outerShdw blurRad="381000" dist="292100" dir="5400000" sx="-80000" sy="-18000" rotWithShape="0">
-                <a:srgbClr val="000000">
-                  <a:alpha val="21176"/>
-                </a:srgbClr>
-              </a:outerShdw>
-            </a:effectLst>
-          </p:spPr>
-        </p:pic>
       </p:grpSp>
       <p:grpSp>
         <p:nvGrpSpPr>
-          <p:cNvPr id="19" name="Google Shape;147;p3">
-            <a:extLst>
-              <a:ext uri="{FF2B5EF4-FFF2-40B4-BE49-F238E27FC236}">
-                <a16:creationId xmlns:a16="http://schemas.microsoft.com/office/drawing/2014/main" id="{F49EB336-BCEE-9B12-48E9-41275A0963BA}"/>
+          <p:cNvPr id="12" name="Agrupar 11">
+            <a:extLst>
+              <a:ext uri="{FF2B5EF4-FFF2-40B4-BE49-F238E27FC236}">
+                <a16:creationId xmlns:a16="http://schemas.microsoft.com/office/drawing/2014/main" id="{925FD879-998B-F0D2-595E-A7B899E18E55}"/>
               </a:ext>
             </a:extLst>
           </p:cNvPr>
@@ -4153,10 +3874,10 @@
         </p:nvGrpSpPr>
         <p:grpSpPr>
           <a:xfrm>
-            <a:off x="1612493" y="2581326"/>
-            <a:ext cx="2089203" cy="2605067"/>
-            <a:chOff x="9372268" y="3693657"/>
-            <a:chExt cx="1474873" cy="1839047"/>
+            <a:off x="1612493" y="2480354"/>
+            <a:ext cx="2089203" cy="2605065"/>
+            <a:chOff x="1612493" y="2480354"/>
+            <a:chExt cx="2089203" cy="2605065"/>
           </a:xfrm>
         </p:grpSpPr>
         <p:sp>
@@ -4173,8 +3894,8 @@
           </p:nvSpPr>
           <p:spPr>
             <a:xfrm>
-              <a:off x="9372272" y="5270081"/>
-              <a:ext cx="1474869" cy="262623"/>
+              <a:off x="1612499" y="4713405"/>
+              <a:ext cx="2089197" cy="372014"/>
             </a:xfrm>
             <a:prstGeom prst="rect">
               <a:avLst/>
@@ -4250,24 +3971,26 @@
             <p:cNvPicPr preferRelativeResize="0"/>
             <p:nvPr/>
           </p:nvPicPr>
-          <p:blipFill rotWithShape="1">
-            <a:blip r:embed="rId3">
-              <a:alphaModFix/>
+          <p:blipFill>
+            <a:blip r:embed="rId5">
+              <a:extLst>
+                <a:ext uri="{28A0092B-C50C-407E-A947-70E740481C1C}">
+                  <a14:useLocalDpi xmlns:a14="http://schemas.microsoft.com/office/drawing/2010/main" val="0"/>
+                </a:ext>
+              </a:extLst>
             </a:blip>
-            <a:srcRect l="47342" t="28779" r="15709" b="21982"/>
+            <a:srcRect l="14488" t="-976" r="1154" b="37707"/>
             <a:stretch/>
           </p:blipFill>
           <p:spPr>
             <a:xfrm>
-              <a:off x="9372268" y="3693657"/>
-              <a:ext cx="1474868" cy="1474868"/>
+              <a:off x="1612493" y="2480354"/>
+              <a:ext cx="2089196" cy="2089196"/>
             </a:xfrm>
             <a:prstGeom prst="ellipse">
               <a:avLst/>
             </a:prstGeom>
-            <a:solidFill>
-              <a:srgbClr val="008B96"/>
-            </a:solidFill>
+            <a:noFill/>
             <a:ln w="63500" cap="rnd" cmpd="sng">
               <a:solidFill>
                 <a:srgbClr val="008B96"/>
@@ -4321,12 +4044,62 @@
           </a:ln>
         </p:spPr>
       </p:cxnSp>
+    </p:spTree>
+    <p:extLst>
+      <p:ext uri="{BB962C8B-B14F-4D97-AF65-F5344CB8AC3E}">
+        <p14:creationId xmlns:p14="http://schemas.microsoft.com/office/powerpoint/2010/main" val="192867996"/>
+      </p:ext>
+    </p:extLst>
+  </p:cSld>
+  <p:clrMapOvr>
+    <a:masterClrMapping/>
+  </p:clrMapOvr>
+</p:sld>
+</file>
+
+<file path=ppt/slides/slide10.xml><?xml version="1.0" encoding="utf-8"?>
+<p:sld xmlns:a="http://schemas.openxmlformats.org/drawingml/2006/main" xmlns:r="http://schemas.openxmlformats.org/officeDocument/2006/relationships" xmlns:p="http://schemas.openxmlformats.org/presentationml/2006/main">
+  <p:cSld>
+    <p:bg>
+      <p:bgPr>
+        <a:blipFill dpi="0" rotWithShape="1">
+          <a:blip r:embed="rId2">
+            <a:lum/>
+          </a:blip>
+          <a:srcRect/>
+          <a:stretch>
+            <a:fillRect t="-27000" r="-10000" b="-450000"/>
+          </a:stretch>
+        </a:blipFill>
+        <a:effectLst/>
+      </p:bgPr>
+    </p:bg>
+    <p:spTree>
+      <p:nvGrpSpPr>
+        <p:cNvPr id="1" name="">
+          <a:extLst>
+            <a:ext uri="{FF2B5EF4-FFF2-40B4-BE49-F238E27FC236}">
+              <a16:creationId xmlns:a16="http://schemas.microsoft.com/office/drawing/2014/main" id="{5FC74D40-C60F-1711-83C0-31216BB3C99A}"/>
+            </a:ext>
+          </a:extLst>
+        </p:cNvPr>
+        <p:cNvGrpSpPr/>
+        <p:nvPr/>
+      </p:nvGrpSpPr>
+      <p:grpSpPr>
+        <a:xfrm>
+          <a:off x="0" y="0"/>
+          <a:ext cx="0" cy="0"/>
+          <a:chOff x="0" y="0"/>
+          <a:chExt cx="0" cy="0"/>
+        </a:xfrm>
+      </p:grpSpPr>
       <p:sp>
         <p:nvSpPr>
-          <p:cNvPr id="13" name="Subtítulo 12">
-            <a:extLst>
-              <a:ext uri="{FF2B5EF4-FFF2-40B4-BE49-F238E27FC236}">
-                <a16:creationId xmlns:a16="http://schemas.microsoft.com/office/drawing/2014/main" id="{A99F26EE-C7F7-C4A6-697A-E0D914C3A306}"/>
+          <p:cNvPr id="3" name="Subtítulo 2">
+            <a:extLst>
+              <a:ext uri="{FF2B5EF4-FFF2-40B4-BE49-F238E27FC236}">
+                <a16:creationId xmlns:a16="http://schemas.microsoft.com/office/drawing/2014/main" id="{E18114D5-2321-16CC-0CD1-1F8516232CC9}"/>
               </a:ext>
             </a:extLst>
           </p:cNvPr>
@@ -4337,19 +4110,4344 @@
             <p:ph type="subTitle" idx="1"/>
           </p:nvPr>
         </p:nvSpPr>
-        <p:spPr/>
+        <p:spPr>
+          <a:xfrm>
+            <a:off x="1132368" y="710889"/>
+            <a:ext cx="9741751" cy="365748"/>
+          </a:xfrm>
+        </p:spPr>
         <p:txBody>
-          <a:bodyPr/>
+          <a:bodyPr>
+            <a:noAutofit/>
+          </a:bodyPr>
           <a:lstStyle/>
           <a:p>
-            <a:endParaRPr lang="pt-BR"/>
+            <a:pPr algn="l"/>
+            <a:r>
+              <a:rPr lang="pt-BR" sz="3200" b="1" dirty="0">
+                <a:solidFill>
+                  <a:schemeClr val="bg1"/>
+                </a:solidFill>
+              </a:rPr>
+              <a:t>COMPONENTES PRINCIPAIS DO PROTOCOLO</a:t>
+            </a:r>
+          </a:p>
+        </p:txBody>
+      </p:sp>
+      <p:cxnSp>
+        <p:nvCxnSpPr>
+          <p:cNvPr id="4" name="Google Shape;140;p3">
+            <a:extLst>
+              <a:ext uri="{FF2B5EF4-FFF2-40B4-BE49-F238E27FC236}">
+                <a16:creationId xmlns:a16="http://schemas.microsoft.com/office/drawing/2014/main" id="{96C7E227-3FEE-D1E5-42A4-FA077FDC6D51}"/>
+              </a:ext>
+            </a:extLst>
+          </p:cNvPr>
+          <p:cNvCxnSpPr>
+            <a:cxnSpLocks/>
+          </p:cNvCxnSpPr>
+          <p:nvPr/>
+        </p:nvCxnSpPr>
+        <p:spPr>
+          <a:xfrm>
+            <a:off x="1132368" y="1196356"/>
+            <a:ext cx="9741751" cy="0"/>
+          </a:xfrm>
+          <a:prstGeom prst="straightConnector1">
+            <a:avLst/>
+          </a:prstGeom>
+          <a:noFill/>
+          <a:ln w="57150" cap="flat" cmpd="sng">
+            <a:solidFill>
+              <a:schemeClr val="accent1"/>
+            </a:solidFill>
+            <a:prstDash val="solid"/>
+            <a:miter lim="800000"/>
+            <a:headEnd type="none" w="sm" len="sm"/>
+            <a:tailEnd type="none" w="sm" len="sm"/>
+          </a:ln>
+        </p:spPr>
+      </p:cxnSp>
+      <p:grpSp>
+        <p:nvGrpSpPr>
+          <p:cNvPr id="7" name="Agrupar 6">
+            <a:extLst>
+              <a:ext uri="{FF2B5EF4-FFF2-40B4-BE49-F238E27FC236}">
+                <a16:creationId xmlns:a16="http://schemas.microsoft.com/office/drawing/2014/main" id="{9C274977-31CD-7FE1-0719-17514E72D62E}"/>
+              </a:ext>
+            </a:extLst>
+          </p:cNvPr>
+          <p:cNvGrpSpPr/>
+          <p:nvPr/>
+        </p:nvGrpSpPr>
+        <p:grpSpPr>
+          <a:xfrm>
+            <a:off x="1132368" y="1556981"/>
+            <a:ext cx="9741751" cy="830997"/>
+            <a:chOff x="1132368" y="1604606"/>
+            <a:chExt cx="9741751" cy="830997"/>
+          </a:xfrm>
+        </p:grpSpPr>
+        <p:sp>
+          <p:nvSpPr>
+            <p:cNvPr id="2" name="CaixaDeTexto 1">
+              <a:extLst>
+                <a:ext uri="{FF2B5EF4-FFF2-40B4-BE49-F238E27FC236}">
+                  <a16:creationId xmlns:a16="http://schemas.microsoft.com/office/drawing/2014/main" id="{C19660A3-362F-5D0F-47C8-84120D8AA7F8}"/>
+                </a:ext>
+              </a:extLst>
+            </p:cNvPr>
+            <p:cNvSpPr txBox="1"/>
+            <p:nvPr/>
+          </p:nvSpPr>
+          <p:spPr>
+            <a:xfrm>
+              <a:off x="1737168" y="1604606"/>
+              <a:ext cx="9136951" cy="830997"/>
+            </a:xfrm>
+            <a:prstGeom prst="rect">
+              <a:avLst/>
+            </a:prstGeom>
+            <a:noFill/>
+          </p:spPr>
+          <p:txBody>
+            <a:bodyPr wrap="square">
+              <a:spAutoFit/>
+            </a:bodyPr>
+            <a:lstStyle/>
+            <a:p>
+              <a:r>
+                <a:rPr lang="pt-BR" sz="2400" b="1" dirty="0">
+                  <a:solidFill>
+                    <a:schemeClr val="bg1"/>
+                  </a:solidFill>
+                </a:rPr>
+                <a:t>Radio: Opera na faixa de 2,4 GHz, utilizando espalhamento espectral por salto de frequência para minimizar interferências.</a:t>
+              </a:r>
+            </a:p>
+          </p:txBody>
+        </p:sp>
+        <p:pic>
+          <p:nvPicPr>
+            <p:cNvPr id="15" name="Gráfico 14">
+              <a:extLst>
+                <a:ext uri="{FF2B5EF4-FFF2-40B4-BE49-F238E27FC236}">
+                  <a16:creationId xmlns:a16="http://schemas.microsoft.com/office/drawing/2014/main" id="{1B59DDDF-74E5-6CEF-B12D-0FF5F3CA024F}"/>
+                </a:ext>
+              </a:extLst>
+            </p:cNvPr>
+            <p:cNvPicPr>
+              <a:picLocks noChangeAspect="1"/>
+            </p:cNvPicPr>
+            <p:nvPr/>
+          </p:nvPicPr>
+          <p:blipFill>
+            <a:blip r:embed="rId3">
+              <a:extLst>
+                <a:ext uri="{96DAC541-7B7A-43D3-8B79-37D633B846F1}">
+                  <asvg:svgBlip xmlns:asvg="http://schemas.microsoft.com/office/drawing/2016/SVG/main" r:embed="rId4"/>
+                </a:ext>
+              </a:extLst>
+            </a:blip>
+            <a:stretch>
+              <a:fillRect/>
+            </a:stretch>
+          </p:blipFill>
+          <p:spPr>
+            <a:xfrm>
+              <a:off x="1132368" y="1610118"/>
+              <a:ext cx="604800" cy="604800"/>
+            </a:xfrm>
+            <a:prstGeom prst="rect">
+              <a:avLst/>
+            </a:prstGeom>
+          </p:spPr>
+        </p:pic>
+      </p:grpSp>
+      <p:grpSp>
+        <p:nvGrpSpPr>
+          <p:cNvPr id="8" name="Agrupar 7">
+            <a:extLst>
+              <a:ext uri="{FF2B5EF4-FFF2-40B4-BE49-F238E27FC236}">
+                <a16:creationId xmlns:a16="http://schemas.microsoft.com/office/drawing/2014/main" id="{73695669-E004-B20A-E56A-09192416A36E}"/>
+              </a:ext>
+            </a:extLst>
+          </p:cNvPr>
+          <p:cNvGrpSpPr/>
+          <p:nvPr/>
+        </p:nvGrpSpPr>
+        <p:grpSpPr>
+          <a:xfrm>
+            <a:off x="1132368" y="2490223"/>
+            <a:ext cx="9741751" cy="1203501"/>
+            <a:chOff x="1132368" y="2605528"/>
+            <a:chExt cx="9741751" cy="1203501"/>
+          </a:xfrm>
+        </p:grpSpPr>
+        <p:sp>
+          <p:nvSpPr>
+            <p:cNvPr id="13" name="CaixaDeTexto 12">
+              <a:extLst>
+                <a:ext uri="{FF2B5EF4-FFF2-40B4-BE49-F238E27FC236}">
+                  <a16:creationId xmlns:a16="http://schemas.microsoft.com/office/drawing/2014/main" id="{71195FD6-6029-8B49-BD8C-F521E9333308}"/>
+                </a:ext>
+              </a:extLst>
+            </p:cNvPr>
+            <p:cNvSpPr txBox="1"/>
+            <p:nvPr/>
+          </p:nvSpPr>
+          <p:spPr>
+            <a:xfrm>
+              <a:off x="1737168" y="2608700"/>
+              <a:ext cx="9136951" cy="1200329"/>
+            </a:xfrm>
+            <a:prstGeom prst="rect">
+              <a:avLst/>
+            </a:prstGeom>
+            <a:noFill/>
+          </p:spPr>
+          <p:txBody>
+            <a:bodyPr wrap="square">
+              <a:spAutoFit/>
+            </a:bodyPr>
+            <a:lstStyle/>
+            <a:p>
+              <a:r>
+                <a:rPr lang="pt-BR" sz="2400" b="1" dirty="0" err="1">
+                  <a:solidFill>
+                    <a:schemeClr val="bg1"/>
+                  </a:solidFill>
+                </a:rPr>
+                <a:t>Baseband</a:t>
+              </a:r>
+              <a:r>
+                <a:rPr lang="pt-BR" sz="2400" b="1" dirty="0">
+                  <a:solidFill>
+                    <a:schemeClr val="bg1"/>
+                  </a:solidFill>
+                </a:rPr>
+                <a:t> e LMP: Gerencia a comunicação, detecção e correção de erros. O LMP controla o estabelecimento, manutenção, finalização de conexões, gerenciar aspectos de segurança e criptografia.</a:t>
+              </a:r>
+            </a:p>
+          </p:txBody>
+        </p:sp>
+        <p:pic>
+          <p:nvPicPr>
+            <p:cNvPr id="16" name="Gráfico 15">
+              <a:extLst>
+                <a:ext uri="{FF2B5EF4-FFF2-40B4-BE49-F238E27FC236}">
+                  <a16:creationId xmlns:a16="http://schemas.microsoft.com/office/drawing/2014/main" id="{A1FE03D8-2792-C4D8-4F37-4811D64BEBC0}"/>
+                </a:ext>
+              </a:extLst>
+            </p:cNvPr>
+            <p:cNvPicPr>
+              <a:picLocks noChangeAspect="1"/>
+            </p:cNvPicPr>
+            <p:nvPr/>
+          </p:nvPicPr>
+          <p:blipFill>
+            <a:blip r:embed="rId3">
+              <a:extLst>
+                <a:ext uri="{96DAC541-7B7A-43D3-8B79-37D633B846F1}">
+                  <asvg:svgBlip xmlns:asvg="http://schemas.microsoft.com/office/drawing/2016/SVG/main" r:embed="rId4"/>
+                </a:ext>
+              </a:extLst>
+            </a:blip>
+            <a:stretch>
+              <a:fillRect/>
+            </a:stretch>
+          </p:blipFill>
+          <p:spPr>
+            <a:xfrm>
+              <a:off x="1132368" y="2605528"/>
+              <a:ext cx="604800" cy="604800"/>
+            </a:xfrm>
+            <a:prstGeom prst="rect">
+              <a:avLst/>
+            </a:prstGeom>
+          </p:spPr>
+        </p:pic>
+      </p:grpSp>
+      <p:grpSp>
+        <p:nvGrpSpPr>
+          <p:cNvPr id="9" name="Agrupar 8">
+            <a:extLst>
+              <a:ext uri="{FF2B5EF4-FFF2-40B4-BE49-F238E27FC236}">
+                <a16:creationId xmlns:a16="http://schemas.microsoft.com/office/drawing/2014/main" id="{F797E1B5-EE2D-D206-B8C9-CD58528CF434}"/>
+              </a:ext>
+            </a:extLst>
+          </p:cNvPr>
+          <p:cNvGrpSpPr/>
+          <p:nvPr/>
+        </p:nvGrpSpPr>
+        <p:grpSpPr>
+          <a:xfrm>
+            <a:off x="1132368" y="3795969"/>
+            <a:ext cx="9927264" cy="1200329"/>
+            <a:chOff x="1132368" y="3880484"/>
+            <a:chExt cx="9927264" cy="1200329"/>
+          </a:xfrm>
+        </p:grpSpPr>
+        <p:sp>
+          <p:nvSpPr>
+            <p:cNvPr id="10" name="CaixaDeTexto 9">
+              <a:extLst>
+                <a:ext uri="{FF2B5EF4-FFF2-40B4-BE49-F238E27FC236}">
+                  <a16:creationId xmlns:a16="http://schemas.microsoft.com/office/drawing/2014/main" id="{2AC70CB1-3805-8776-1CD6-A593456D5606}"/>
+                </a:ext>
+              </a:extLst>
+            </p:cNvPr>
+            <p:cNvSpPr txBox="1"/>
+            <p:nvPr/>
+          </p:nvSpPr>
+          <p:spPr>
+            <a:xfrm>
+              <a:off x="1737169" y="3880484"/>
+              <a:ext cx="9322463" cy="1200329"/>
+            </a:xfrm>
+            <a:prstGeom prst="rect">
+              <a:avLst/>
+            </a:prstGeom>
+            <a:noFill/>
+          </p:spPr>
+          <p:txBody>
+            <a:bodyPr wrap="square">
+              <a:spAutoFit/>
+            </a:bodyPr>
+            <a:lstStyle/>
+            <a:p>
+              <a:r>
+                <a:rPr lang="en-US" sz="2400" b="1" dirty="0">
+                  <a:solidFill>
+                    <a:schemeClr val="bg1"/>
+                  </a:solidFill>
+                </a:rPr>
+                <a:t>Logical Link Control and </a:t>
+              </a:r>
+              <a:r>
+                <a:rPr lang="en-US" sz="2400" b="1" dirty="0" err="1">
+                  <a:solidFill>
+                    <a:schemeClr val="bg1"/>
+                  </a:solidFill>
+                </a:rPr>
+                <a:t>Adp</a:t>
+              </a:r>
+              <a:r>
+                <a:rPr lang="en-US" sz="2400" b="1" dirty="0">
+                  <a:solidFill>
+                    <a:schemeClr val="bg1"/>
+                  </a:solidFill>
+                </a:rPr>
+                <a:t>. Protocol (L2CAP)</a:t>
+              </a:r>
+            </a:p>
+            <a:p>
+              <a:r>
+                <a:rPr lang="pt-BR" sz="2400" b="1" dirty="0">
+                  <a:solidFill>
+                    <a:schemeClr val="bg1"/>
+                  </a:solidFill>
+                </a:rPr>
+                <a:t>Fornece multiplexação de múltiplas conexões lógicas entre dispositivos, segmentando e remontando pacotes de dados.</a:t>
+              </a:r>
+            </a:p>
+          </p:txBody>
+        </p:sp>
+        <p:pic>
+          <p:nvPicPr>
+            <p:cNvPr id="17" name="Gráfico 16">
+              <a:extLst>
+                <a:ext uri="{FF2B5EF4-FFF2-40B4-BE49-F238E27FC236}">
+                  <a16:creationId xmlns:a16="http://schemas.microsoft.com/office/drawing/2014/main" id="{2D88158B-955A-1AB8-7D62-9196FB9EBE0F}"/>
+                </a:ext>
+              </a:extLst>
+            </p:cNvPr>
+            <p:cNvPicPr>
+              <a:picLocks noChangeAspect="1"/>
+            </p:cNvPicPr>
+            <p:nvPr/>
+          </p:nvPicPr>
+          <p:blipFill>
+            <a:blip r:embed="rId3">
+              <a:extLst>
+                <a:ext uri="{96DAC541-7B7A-43D3-8B79-37D633B846F1}">
+                  <asvg:svgBlip xmlns:asvg="http://schemas.microsoft.com/office/drawing/2016/SVG/main" r:embed="rId4"/>
+                </a:ext>
+              </a:extLst>
+            </a:blip>
+            <a:stretch>
+              <a:fillRect/>
+            </a:stretch>
+          </p:blipFill>
+          <p:spPr>
+            <a:xfrm>
+              <a:off x="1132368" y="3880484"/>
+              <a:ext cx="604800" cy="604800"/>
+            </a:xfrm>
+            <a:prstGeom prst="rect">
+              <a:avLst/>
+            </a:prstGeom>
+          </p:spPr>
+        </p:pic>
+      </p:grpSp>
+      <p:grpSp>
+        <p:nvGrpSpPr>
+          <p:cNvPr id="11" name="Agrupar 10">
+            <a:extLst>
+              <a:ext uri="{FF2B5EF4-FFF2-40B4-BE49-F238E27FC236}">
+                <a16:creationId xmlns:a16="http://schemas.microsoft.com/office/drawing/2014/main" id="{F65EFA1D-511B-9DB1-3F73-02B8E9B8AD3E}"/>
+              </a:ext>
+            </a:extLst>
+          </p:cNvPr>
+          <p:cNvGrpSpPr/>
+          <p:nvPr/>
+        </p:nvGrpSpPr>
+        <p:grpSpPr>
+          <a:xfrm>
+            <a:off x="1132368" y="5098544"/>
+            <a:ext cx="9927264" cy="1200329"/>
+            <a:chOff x="1132368" y="5146169"/>
+            <a:chExt cx="9927264" cy="1200329"/>
+          </a:xfrm>
+        </p:grpSpPr>
+        <p:sp>
+          <p:nvSpPr>
+            <p:cNvPr id="5" name="CaixaDeTexto 4">
+              <a:extLst>
+                <a:ext uri="{FF2B5EF4-FFF2-40B4-BE49-F238E27FC236}">
+                  <a16:creationId xmlns:a16="http://schemas.microsoft.com/office/drawing/2014/main" id="{4FCF3069-80A5-2FE8-729F-9B9DD15464B1}"/>
+                </a:ext>
+              </a:extLst>
+            </p:cNvPr>
+            <p:cNvSpPr txBox="1"/>
+            <p:nvPr/>
+          </p:nvSpPr>
+          <p:spPr>
+            <a:xfrm>
+              <a:off x="1737169" y="5146169"/>
+              <a:ext cx="9322463" cy="1200329"/>
+            </a:xfrm>
+            <a:prstGeom prst="rect">
+              <a:avLst/>
+            </a:prstGeom>
+            <a:noFill/>
+          </p:spPr>
+          <p:txBody>
+            <a:bodyPr wrap="square">
+              <a:spAutoFit/>
+            </a:bodyPr>
+            <a:lstStyle/>
+            <a:p>
+              <a:r>
+                <a:rPr lang="pt-BR" sz="2400" b="1" dirty="0">
+                  <a:solidFill>
+                    <a:schemeClr val="bg1"/>
+                  </a:solidFill>
+                </a:rPr>
+                <a:t>Service Disc. </a:t>
+              </a:r>
+              <a:r>
+                <a:rPr lang="pt-BR" sz="2400" b="1" dirty="0" err="1">
+                  <a:solidFill>
+                    <a:schemeClr val="bg1"/>
+                  </a:solidFill>
+                </a:rPr>
+                <a:t>Protocol</a:t>
+              </a:r>
+              <a:r>
+                <a:rPr lang="pt-BR" sz="2400" b="1" dirty="0">
+                  <a:solidFill>
+                    <a:schemeClr val="bg1"/>
+                  </a:solidFill>
+                </a:rPr>
+                <a:t> (SDP)</a:t>
+              </a:r>
+            </a:p>
+            <a:p>
+              <a:r>
+                <a:rPr lang="pt-BR" sz="2400" b="1" dirty="0">
+                  <a:solidFill>
+                    <a:schemeClr val="bg1"/>
+                  </a:solidFill>
+                </a:rPr>
+                <a:t>Permite que dispositivos descubram serviços oferecidos por outros dispositivos Bluetooth e obtenham informações sobre como utilizá-los.</a:t>
+              </a:r>
+            </a:p>
+          </p:txBody>
+        </p:sp>
+        <p:pic>
+          <p:nvPicPr>
+            <p:cNvPr id="6" name="Gráfico 5">
+              <a:extLst>
+                <a:ext uri="{FF2B5EF4-FFF2-40B4-BE49-F238E27FC236}">
+                  <a16:creationId xmlns:a16="http://schemas.microsoft.com/office/drawing/2014/main" id="{70A6B02E-61B9-E0B1-4375-53CEB838F91A}"/>
+                </a:ext>
+              </a:extLst>
+            </p:cNvPr>
+            <p:cNvPicPr>
+              <a:picLocks noChangeAspect="1"/>
+            </p:cNvPicPr>
+            <p:nvPr/>
+          </p:nvPicPr>
+          <p:blipFill>
+            <a:blip r:embed="rId3">
+              <a:extLst>
+                <a:ext uri="{96DAC541-7B7A-43D3-8B79-37D633B846F1}">
+                  <asvg:svgBlip xmlns:asvg="http://schemas.microsoft.com/office/drawing/2016/SVG/main" r:embed="rId4"/>
+                </a:ext>
+              </a:extLst>
+            </a:blip>
+            <a:stretch>
+              <a:fillRect/>
+            </a:stretch>
+          </p:blipFill>
+          <p:spPr>
+            <a:xfrm>
+              <a:off x="1132368" y="5146169"/>
+              <a:ext cx="604800" cy="604800"/>
+            </a:xfrm>
+            <a:prstGeom prst="rect">
+              <a:avLst/>
+            </a:prstGeom>
+          </p:spPr>
+        </p:pic>
+      </p:grpSp>
+    </p:spTree>
+    <p:extLst>
+      <p:ext uri="{BB962C8B-B14F-4D97-AF65-F5344CB8AC3E}">
+        <p14:creationId xmlns:p14="http://schemas.microsoft.com/office/powerpoint/2010/main" val="3454195169"/>
+      </p:ext>
+    </p:extLst>
+  </p:cSld>
+  <p:clrMapOvr>
+    <a:masterClrMapping/>
+  </p:clrMapOvr>
+</p:sld>
+</file>
+
+<file path=ppt/slides/slide11.xml><?xml version="1.0" encoding="utf-8"?>
+<p:sld xmlns:a="http://schemas.openxmlformats.org/drawingml/2006/main" xmlns:r="http://schemas.openxmlformats.org/officeDocument/2006/relationships" xmlns:p="http://schemas.openxmlformats.org/presentationml/2006/main">
+  <p:cSld>
+    <p:bg>
+      <p:bgPr>
+        <a:blipFill dpi="0" rotWithShape="1">
+          <a:blip r:embed="rId2">
+            <a:lum/>
+          </a:blip>
+          <a:srcRect/>
+          <a:stretch>
+            <a:fillRect t="-27000" r="-10000" b="-450000"/>
+          </a:stretch>
+        </a:blipFill>
+        <a:effectLst/>
+      </p:bgPr>
+    </p:bg>
+    <p:spTree>
+      <p:nvGrpSpPr>
+        <p:cNvPr id="1" name="">
+          <a:extLst>
+            <a:ext uri="{FF2B5EF4-FFF2-40B4-BE49-F238E27FC236}">
+              <a16:creationId xmlns:a16="http://schemas.microsoft.com/office/drawing/2014/main" id="{5306211F-A56F-116B-7B0A-54766F00F534}"/>
+            </a:ext>
+          </a:extLst>
+        </p:cNvPr>
+        <p:cNvGrpSpPr/>
+        <p:nvPr/>
+      </p:nvGrpSpPr>
+      <p:grpSpPr>
+        <a:xfrm>
+          <a:off x="0" y="0"/>
+          <a:ext cx="0" cy="0"/>
+          <a:chOff x="0" y="0"/>
+          <a:chExt cx="0" cy="0"/>
+        </a:xfrm>
+      </p:grpSpPr>
+      <p:sp>
+        <p:nvSpPr>
+          <p:cNvPr id="3" name="Subtítulo 2">
+            <a:extLst>
+              <a:ext uri="{FF2B5EF4-FFF2-40B4-BE49-F238E27FC236}">
+                <a16:creationId xmlns:a16="http://schemas.microsoft.com/office/drawing/2014/main" id="{792AD022-0536-98B8-F95A-82A9130D6802}"/>
+              </a:ext>
+            </a:extLst>
+          </p:cNvPr>
+          <p:cNvSpPr>
+            <a:spLocks noGrp="1"/>
+          </p:cNvSpPr>
+          <p:nvPr>
+            <p:ph type="subTitle" idx="1"/>
+          </p:nvPr>
+        </p:nvSpPr>
+        <p:spPr>
+          <a:xfrm>
+            <a:off x="1134000" y="758514"/>
+            <a:ext cx="9741751" cy="365748"/>
+          </a:xfrm>
+        </p:spPr>
+        <p:txBody>
+          <a:bodyPr>
+            <a:noAutofit/>
+          </a:bodyPr>
+          <a:lstStyle/>
+          <a:p>
+            <a:pPr algn="l"/>
+            <a:r>
+              <a:rPr lang="pt-BR" sz="3200" b="1" dirty="0">
+                <a:solidFill>
+                  <a:schemeClr val="bg1"/>
+                </a:solidFill>
+              </a:rPr>
+              <a:t>COMPONENTES PRINCIPAIS DO PROTOCOLO</a:t>
+            </a:r>
+          </a:p>
+        </p:txBody>
+      </p:sp>
+      <p:cxnSp>
+        <p:nvCxnSpPr>
+          <p:cNvPr id="4" name="Google Shape;140;p3">
+            <a:extLst>
+              <a:ext uri="{FF2B5EF4-FFF2-40B4-BE49-F238E27FC236}">
+                <a16:creationId xmlns:a16="http://schemas.microsoft.com/office/drawing/2014/main" id="{955A2C43-2C7D-3FF7-B86E-B851E1D7DEC0}"/>
+              </a:ext>
+            </a:extLst>
+          </p:cNvPr>
+          <p:cNvCxnSpPr>
+            <a:cxnSpLocks/>
+          </p:cNvCxnSpPr>
+          <p:nvPr/>
+        </p:nvCxnSpPr>
+        <p:spPr>
+          <a:xfrm>
+            <a:off x="1134000" y="1243981"/>
+            <a:ext cx="9741751" cy="0"/>
+          </a:xfrm>
+          <a:prstGeom prst="straightConnector1">
+            <a:avLst/>
+          </a:prstGeom>
+          <a:noFill/>
+          <a:ln w="57150" cap="flat" cmpd="sng">
+            <a:solidFill>
+              <a:schemeClr val="accent1"/>
+            </a:solidFill>
+            <a:prstDash val="solid"/>
+            <a:miter lim="800000"/>
+            <a:headEnd type="none" w="sm" len="sm"/>
+            <a:tailEnd type="none" w="sm" len="sm"/>
+          </a:ln>
+        </p:spPr>
+      </p:cxnSp>
+      <p:grpSp>
+        <p:nvGrpSpPr>
+          <p:cNvPr id="7" name="Agrupar 6">
+            <a:extLst>
+              <a:ext uri="{FF2B5EF4-FFF2-40B4-BE49-F238E27FC236}">
+                <a16:creationId xmlns:a16="http://schemas.microsoft.com/office/drawing/2014/main" id="{FDF6CC89-3CD9-CC43-822F-CCA10661C224}"/>
+              </a:ext>
+            </a:extLst>
+          </p:cNvPr>
+          <p:cNvGrpSpPr/>
+          <p:nvPr/>
+        </p:nvGrpSpPr>
+        <p:grpSpPr>
+          <a:xfrm>
+            <a:off x="1134000" y="1605600"/>
+            <a:ext cx="9816319" cy="1569660"/>
+            <a:chOff x="1132368" y="1604606"/>
+            <a:chExt cx="9741751" cy="1569660"/>
+          </a:xfrm>
+        </p:grpSpPr>
+        <p:sp>
+          <p:nvSpPr>
+            <p:cNvPr id="2" name="CaixaDeTexto 1">
+              <a:extLst>
+                <a:ext uri="{FF2B5EF4-FFF2-40B4-BE49-F238E27FC236}">
+                  <a16:creationId xmlns:a16="http://schemas.microsoft.com/office/drawing/2014/main" id="{F7822EF8-B8C4-2105-BB04-FF5678944C84}"/>
+                </a:ext>
+              </a:extLst>
+            </p:cNvPr>
+            <p:cNvSpPr txBox="1"/>
+            <p:nvPr/>
+          </p:nvSpPr>
+          <p:spPr>
+            <a:xfrm>
+              <a:off x="1737168" y="1604606"/>
+              <a:ext cx="9136951" cy="1569660"/>
+            </a:xfrm>
+            <a:prstGeom prst="rect">
+              <a:avLst/>
+            </a:prstGeom>
+            <a:noFill/>
+          </p:spPr>
+          <p:txBody>
+            <a:bodyPr wrap="square">
+              <a:spAutoFit/>
+            </a:bodyPr>
+            <a:lstStyle/>
+            <a:p>
+              <a:r>
+                <a:rPr lang="pt-BR" sz="2400" b="1" dirty="0">
+                  <a:solidFill>
+                    <a:schemeClr val="bg1"/>
+                  </a:solidFill>
+                </a:rPr>
+                <a:t>Host </a:t>
+              </a:r>
+              <a:r>
+                <a:rPr lang="pt-BR" sz="2400" b="1" dirty="0" err="1">
+                  <a:solidFill>
+                    <a:schemeClr val="bg1"/>
+                  </a:solidFill>
+                </a:rPr>
+                <a:t>Controller</a:t>
+              </a:r>
+              <a:r>
+                <a:rPr lang="pt-BR" sz="2400" b="1" dirty="0">
+                  <a:solidFill>
+                    <a:schemeClr val="bg1"/>
+                  </a:solidFill>
+                </a:rPr>
+                <a:t> Interface (HCI): Fornece uma interface de comando entre o controlador Bluetooth e o host, permitindo a comunicação entre o software do host e o hardware Bluetooth. Facilita a troca de comandos e dados, abstraindo detalhes específicos do hardware.</a:t>
+              </a:r>
+            </a:p>
+          </p:txBody>
+        </p:sp>
+        <p:pic>
+          <p:nvPicPr>
+            <p:cNvPr id="15" name="Gráfico 14">
+              <a:extLst>
+                <a:ext uri="{FF2B5EF4-FFF2-40B4-BE49-F238E27FC236}">
+                  <a16:creationId xmlns:a16="http://schemas.microsoft.com/office/drawing/2014/main" id="{B6972133-5D94-6D14-8737-CEB828BE7503}"/>
+                </a:ext>
+              </a:extLst>
+            </p:cNvPr>
+            <p:cNvPicPr>
+              <a:picLocks noChangeAspect="1"/>
+            </p:cNvPicPr>
+            <p:nvPr/>
+          </p:nvPicPr>
+          <p:blipFill>
+            <a:blip r:embed="rId3">
+              <a:extLst>
+                <a:ext uri="{96DAC541-7B7A-43D3-8B79-37D633B846F1}">
+                  <asvg:svgBlip xmlns:asvg="http://schemas.microsoft.com/office/drawing/2016/SVG/main" r:embed="rId4"/>
+                </a:ext>
+              </a:extLst>
+            </a:blip>
+            <a:stretch>
+              <a:fillRect/>
+            </a:stretch>
+          </p:blipFill>
+          <p:spPr>
+            <a:xfrm>
+              <a:off x="1132368" y="1610118"/>
+              <a:ext cx="604800" cy="604800"/>
+            </a:xfrm>
+            <a:prstGeom prst="rect">
+              <a:avLst/>
+            </a:prstGeom>
+          </p:spPr>
+        </p:pic>
+      </p:grpSp>
+      <p:grpSp>
+        <p:nvGrpSpPr>
+          <p:cNvPr id="8" name="Agrupar 7">
+            <a:extLst>
+              <a:ext uri="{FF2B5EF4-FFF2-40B4-BE49-F238E27FC236}">
+                <a16:creationId xmlns:a16="http://schemas.microsoft.com/office/drawing/2014/main" id="{8F530D5E-3447-AB00-9132-A55F24F5B2B0}"/>
+              </a:ext>
+            </a:extLst>
+          </p:cNvPr>
+          <p:cNvGrpSpPr/>
+          <p:nvPr/>
+        </p:nvGrpSpPr>
+        <p:grpSpPr>
+          <a:xfrm>
+            <a:off x="1134000" y="3528448"/>
+            <a:ext cx="9816319" cy="2680828"/>
+            <a:chOff x="1132368" y="2605528"/>
+            <a:chExt cx="9741751" cy="2680828"/>
+          </a:xfrm>
+        </p:grpSpPr>
+        <p:sp>
+          <p:nvSpPr>
+            <p:cNvPr id="13" name="CaixaDeTexto 12">
+              <a:extLst>
+                <a:ext uri="{FF2B5EF4-FFF2-40B4-BE49-F238E27FC236}">
+                  <a16:creationId xmlns:a16="http://schemas.microsoft.com/office/drawing/2014/main" id="{EF91C8A3-0769-EFE7-BF4A-8AA93FB6AC19}"/>
+                </a:ext>
+              </a:extLst>
+            </p:cNvPr>
+            <p:cNvSpPr txBox="1"/>
+            <p:nvPr/>
+          </p:nvSpPr>
+          <p:spPr>
+            <a:xfrm>
+              <a:off x="1737168" y="2608700"/>
+              <a:ext cx="9136951" cy="2677656"/>
+            </a:xfrm>
+            <a:prstGeom prst="rect">
+              <a:avLst/>
+            </a:prstGeom>
+            <a:noFill/>
+          </p:spPr>
+          <p:txBody>
+            <a:bodyPr wrap="square">
+              <a:spAutoFit/>
+            </a:bodyPr>
+            <a:lstStyle/>
+            <a:p>
+              <a:r>
+                <a:rPr lang="pt-BR" sz="2400" b="1" dirty="0">
+                  <a:solidFill>
+                    <a:schemeClr val="bg1"/>
+                  </a:solidFill>
+                </a:rPr>
+                <a:t>RFCOMM (Radio Frequency Communications): Emula uma porta serial, permitindo que aplicativos utilizem comunicações seriais sobre o Bluetooth.</a:t>
+              </a:r>
+            </a:p>
+            <a:p>
+              <a:r>
+                <a:rPr lang="pt-BR" sz="2400" b="1" dirty="0">
+                  <a:solidFill>
+                    <a:schemeClr val="bg1"/>
+                  </a:solidFill>
+                </a:rPr>
+                <a:t>Esses componentes trabalham em conjunto para garantir que os dispositivos Bluetooth possam se comunicar de forma eficiente, segura e interoperável, atendendo a uma variedade de aplicações e serviços.</a:t>
+              </a:r>
+            </a:p>
+          </p:txBody>
+        </p:sp>
+        <p:pic>
+          <p:nvPicPr>
+            <p:cNvPr id="16" name="Gráfico 15">
+              <a:extLst>
+                <a:ext uri="{FF2B5EF4-FFF2-40B4-BE49-F238E27FC236}">
+                  <a16:creationId xmlns:a16="http://schemas.microsoft.com/office/drawing/2014/main" id="{A56788FE-BA7C-9966-4D90-2E5DCC233274}"/>
+                </a:ext>
+              </a:extLst>
+            </p:cNvPr>
+            <p:cNvPicPr>
+              <a:picLocks noChangeAspect="1"/>
+            </p:cNvPicPr>
+            <p:nvPr/>
+          </p:nvPicPr>
+          <p:blipFill>
+            <a:blip r:embed="rId3">
+              <a:extLst>
+                <a:ext uri="{96DAC541-7B7A-43D3-8B79-37D633B846F1}">
+                  <asvg:svgBlip xmlns:asvg="http://schemas.microsoft.com/office/drawing/2016/SVG/main" r:embed="rId4"/>
+                </a:ext>
+              </a:extLst>
+            </a:blip>
+            <a:stretch>
+              <a:fillRect/>
+            </a:stretch>
+          </p:blipFill>
+          <p:spPr>
+            <a:xfrm>
+              <a:off x="1132368" y="2605528"/>
+              <a:ext cx="604800" cy="604800"/>
+            </a:xfrm>
+            <a:prstGeom prst="rect">
+              <a:avLst/>
+            </a:prstGeom>
+          </p:spPr>
+        </p:pic>
+      </p:grpSp>
+    </p:spTree>
+    <p:extLst>
+      <p:ext uri="{BB962C8B-B14F-4D97-AF65-F5344CB8AC3E}">
+        <p14:creationId xmlns:p14="http://schemas.microsoft.com/office/powerpoint/2010/main" val="913550980"/>
+      </p:ext>
+    </p:extLst>
+  </p:cSld>
+  <p:clrMapOvr>
+    <a:masterClrMapping/>
+  </p:clrMapOvr>
+</p:sld>
+</file>
+
+<file path=ppt/slides/slide12.xml><?xml version="1.0" encoding="utf-8"?>
+<p:sld xmlns:a="http://schemas.openxmlformats.org/drawingml/2006/main" xmlns:r="http://schemas.openxmlformats.org/officeDocument/2006/relationships" xmlns:p="http://schemas.openxmlformats.org/presentationml/2006/main">
+  <p:cSld>
+    <p:bg>
+      <p:bgPr>
+        <a:blipFill dpi="0" rotWithShape="1">
+          <a:blip r:embed="rId2">
+            <a:lum/>
+          </a:blip>
+          <a:srcRect/>
+          <a:stretch>
+            <a:fillRect t="-27000" r="-10000" b="-231000"/>
+          </a:stretch>
+        </a:blipFill>
+        <a:effectLst/>
+      </p:bgPr>
+    </p:bg>
+    <p:spTree>
+      <p:nvGrpSpPr>
+        <p:cNvPr id="1" name="">
+          <a:extLst>
+            <a:ext uri="{FF2B5EF4-FFF2-40B4-BE49-F238E27FC236}">
+              <a16:creationId xmlns:a16="http://schemas.microsoft.com/office/drawing/2014/main" id="{6430FDC1-878F-AB59-0600-3B8A4152762D}"/>
+            </a:ext>
+          </a:extLst>
+        </p:cNvPr>
+        <p:cNvGrpSpPr/>
+        <p:nvPr/>
+      </p:nvGrpSpPr>
+      <p:grpSpPr>
+        <a:xfrm>
+          <a:off x="0" y="0"/>
+          <a:ext cx="0" cy="0"/>
+          <a:chOff x="0" y="0"/>
+          <a:chExt cx="0" cy="0"/>
+        </a:xfrm>
+      </p:grpSpPr>
+      <p:pic>
+        <p:nvPicPr>
+          <p:cNvPr id="21" name="Gráfico 20">
+            <a:extLst>
+              <a:ext uri="{FF2B5EF4-FFF2-40B4-BE49-F238E27FC236}">
+                <a16:creationId xmlns:a16="http://schemas.microsoft.com/office/drawing/2014/main" id="{0A34D5F1-00FC-EB4D-59AA-824676299A46}"/>
+              </a:ext>
+            </a:extLst>
+          </p:cNvPr>
+          <p:cNvPicPr>
+            <a:picLocks noChangeAspect="1"/>
+          </p:cNvPicPr>
+          <p:nvPr/>
+        </p:nvPicPr>
+        <p:blipFill>
+          <a:blip r:embed="rId3">
+            <a:extLst>
+              <a:ext uri="{96DAC541-7B7A-43D3-8B79-37D633B846F1}">
+                <asvg:svgBlip xmlns:asvg="http://schemas.microsoft.com/office/drawing/2016/SVG/main" r:embed="rId4"/>
+              </a:ext>
+            </a:extLst>
+          </a:blip>
+          <a:stretch>
+            <a:fillRect/>
+          </a:stretch>
+        </p:blipFill>
+        <p:spPr>
+          <a:xfrm>
+            <a:off x="1225124" y="2407093"/>
+            <a:ext cx="604800" cy="604800"/>
+          </a:xfrm>
+          <a:prstGeom prst="rect">
+            <a:avLst/>
+          </a:prstGeom>
+        </p:spPr>
+      </p:pic>
+      <p:sp>
+        <p:nvSpPr>
+          <p:cNvPr id="3" name="Subtítulo 2">
+            <a:extLst>
+              <a:ext uri="{FF2B5EF4-FFF2-40B4-BE49-F238E27FC236}">
+                <a16:creationId xmlns:a16="http://schemas.microsoft.com/office/drawing/2014/main" id="{FAA39ED6-8B60-2B2C-3D1E-BE1542BB35CB}"/>
+              </a:ext>
+            </a:extLst>
+          </p:cNvPr>
+          <p:cNvSpPr>
+            <a:spLocks noGrp="1"/>
+          </p:cNvSpPr>
+          <p:nvPr>
+            <p:ph type="subTitle" idx="1"/>
+          </p:nvPr>
+        </p:nvSpPr>
+        <p:spPr>
+          <a:xfrm>
+            <a:off x="1225124" y="1409439"/>
+            <a:ext cx="9741751" cy="365748"/>
+          </a:xfrm>
+        </p:spPr>
+        <p:txBody>
+          <a:bodyPr>
+            <a:noAutofit/>
+          </a:bodyPr>
+          <a:lstStyle/>
+          <a:p>
+            <a:pPr algn="l"/>
+            <a:r>
+              <a:rPr lang="pt-BR" sz="3200" b="1" dirty="0">
+                <a:solidFill>
+                  <a:schemeClr val="bg1"/>
+                </a:solidFill>
+              </a:rPr>
+              <a:t>COMUNICAÇÃO ENTRE DISPOSITIVOS</a:t>
+            </a:r>
+          </a:p>
+        </p:txBody>
+      </p:sp>
+      <p:cxnSp>
+        <p:nvCxnSpPr>
+          <p:cNvPr id="4" name="Google Shape;140;p3">
+            <a:extLst>
+              <a:ext uri="{FF2B5EF4-FFF2-40B4-BE49-F238E27FC236}">
+                <a16:creationId xmlns:a16="http://schemas.microsoft.com/office/drawing/2014/main" id="{598B87D4-1E99-3810-273A-DACF6D3D6D36}"/>
+              </a:ext>
+            </a:extLst>
+          </p:cNvPr>
+          <p:cNvCxnSpPr>
+            <a:cxnSpLocks/>
+          </p:cNvCxnSpPr>
+          <p:nvPr/>
+        </p:nvCxnSpPr>
+        <p:spPr>
+          <a:xfrm>
+            <a:off x="1225124" y="1894906"/>
+            <a:ext cx="9741751" cy="0"/>
+          </a:xfrm>
+          <a:prstGeom prst="straightConnector1">
+            <a:avLst/>
+          </a:prstGeom>
+          <a:noFill/>
+          <a:ln w="57150" cap="flat" cmpd="sng">
+            <a:solidFill>
+              <a:schemeClr val="accent1"/>
+            </a:solidFill>
+            <a:prstDash val="solid"/>
+            <a:miter lim="800000"/>
+            <a:headEnd type="none" w="sm" len="sm"/>
+            <a:tailEnd type="none" w="sm" len="sm"/>
+          </a:ln>
+        </p:spPr>
+      </p:cxnSp>
+      <p:sp>
+        <p:nvSpPr>
+          <p:cNvPr id="2" name="CaixaDeTexto 1">
+            <a:extLst>
+              <a:ext uri="{FF2B5EF4-FFF2-40B4-BE49-F238E27FC236}">
+                <a16:creationId xmlns:a16="http://schemas.microsoft.com/office/drawing/2014/main" id="{B7DF5C82-26B6-D85E-2954-A5CD0E2C7B6F}"/>
+              </a:ext>
+            </a:extLst>
+          </p:cNvPr>
+          <p:cNvSpPr txBox="1"/>
+          <p:nvPr/>
+        </p:nvSpPr>
+        <p:spPr>
+          <a:xfrm>
+            <a:off x="1829924" y="2255531"/>
+            <a:ext cx="9136951" cy="3785652"/>
+          </a:xfrm>
+          <a:prstGeom prst="rect">
+            <a:avLst/>
+          </a:prstGeom>
+          <a:noFill/>
+        </p:spPr>
+        <p:txBody>
+          <a:bodyPr wrap="square">
+            <a:spAutoFit/>
+          </a:bodyPr>
+          <a:lstStyle/>
+          <a:p>
+            <a:r>
+              <a:rPr lang="pt-BR" sz="2400" b="1" dirty="0">
+                <a:solidFill>
+                  <a:schemeClr val="bg1"/>
+                </a:solidFill>
+              </a:rPr>
+              <a:t>Um dispositivo mestre pode se comunicar com até sete dispositivos escravos simultaneamente, ele controla o tráfego de dados, atribui slots de tempo para transmissão e mantém a sincronização dos dispositivos escravos.</a:t>
+            </a:r>
+          </a:p>
+          <a:p>
+            <a:endParaRPr lang="pt-BR" sz="2400" b="1" dirty="0">
+              <a:solidFill>
+                <a:schemeClr val="bg1"/>
+              </a:solidFill>
+            </a:endParaRPr>
+          </a:p>
+          <a:p>
+            <a:r>
+              <a:rPr lang="pt-BR" sz="2400" b="1" dirty="0">
+                <a:solidFill>
+                  <a:schemeClr val="bg1"/>
+                </a:solidFill>
+              </a:rPr>
+              <a:t>A troca de dados ocorre por meio de pacotes transmitidos na faixa de 2,4 GHz, utilizando técnicas de salto de frequência para minimizar interferências e garantir a integridade dos dados.</a:t>
+            </a:r>
+          </a:p>
+          <a:p>
+            <a:endParaRPr lang="pt-BR" sz="2400" b="1" dirty="0">
+              <a:solidFill>
+                <a:schemeClr val="bg1"/>
+              </a:solidFill>
+            </a:endParaRPr>
+          </a:p>
+          <a:p>
+            <a:r>
+              <a:rPr lang="pt-BR" sz="2400" b="1" dirty="0">
+                <a:solidFill>
+                  <a:schemeClr val="bg1"/>
+                </a:solidFill>
+              </a:rPr>
+              <a:t> </a:t>
+            </a:r>
           </a:p>
         </p:txBody>
       </p:sp>
     </p:spTree>
     <p:extLst>
       <p:ext uri="{BB962C8B-B14F-4D97-AF65-F5344CB8AC3E}">
-        <p14:creationId xmlns:p14="http://schemas.microsoft.com/office/powerpoint/2010/main" val="192867996"/>
+        <p14:creationId xmlns:p14="http://schemas.microsoft.com/office/powerpoint/2010/main" val="2777844771"/>
+      </p:ext>
+    </p:extLst>
+  </p:cSld>
+  <p:clrMapOvr>
+    <a:masterClrMapping/>
+  </p:clrMapOvr>
+</p:sld>
+</file>
+
+<file path=ppt/slides/slide13.xml><?xml version="1.0" encoding="utf-8"?>
+<p:sld xmlns:a="http://schemas.openxmlformats.org/drawingml/2006/main" xmlns:r="http://schemas.openxmlformats.org/officeDocument/2006/relationships" xmlns:p="http://schemas.openxmlformats.org/presentationml/2006/main">
+  <p:cSld>
+    <p:bg>
+      <p:bgPr>
+        <a:blipFill dpi="0" rotWithShape="1">
+          <a:blip r:embed="rId2">
+            <a:lum/>
+          </a:blip>
+          <a:srcRect/>
+          <a:stretch>
+            <a:fillRect t="-27000" r="-10000" b="-450000"/>
+          </a:stretch>
+        </a:blipFill>
+        <a:effectLst/>
+      </p:bgPr>
+    </p:bg>
+    <p:spTree>
+      <p:nvGrpSpPr>
+        <p:cNvPr id="1" name="">
+          <a:extLst>
+            <a:ext uri="{FF2B5EF4-FFF2-40B4-BE49-F238E27FC236}">
+              <a16:creationId xmlns:a16="http://schemas.microsoft.com/office/drawing/2014/main" id="{0A09E3D6-9FAD-4B93-2254-A4C32E903CEB}"/>
+            </a:ext>
+          </a:extLst>
+        </p:cNvPr>
+        <p:cNvGrpSpPr/>
+        <p:nvPr/>
+      </p:nvGrpSpPr>
+      <p:grpSpPr>
+        <a:xfrm>
+          <a:off x="0" y="0"/>
+          <a:ext cx="0" cy="0"/>
+          <a:chOff x="0" y="0"/>
+          <a:chExt cx="0" cy="0"/>
+        </a:xfrm>
+      </p:grpSpPr>
+      <p:sp>
+        <p:nvSpPr>
+          <p:cNvPr id="3" name="Subtítulo 2">
+            <a:extLst>
+              <a:ext uri="{FF2B5EF4-FFF2-40B4-BE49-F238E27FC236}">
+                <a16:creationId xmlns:a16="http://schemas.microsoft.com/office/drawing/2014/main" id="{B6A554EB-E750-2E8D-72C2-8FA3E1281B90}"/>
+              </a:ext>
+            </a:extLst>
+          </p:cNvPr>
+          <p:cNvSpPr>
+            <a:spLocks noGrp="1"/>
+          </p:cNvSpPr>
+          <p:nvPr>
+            <p:ph type="subTitle" idx="1"/>
+          </p:nvPr>
+        </p:nvSpPr>
+        <p:spPr>
+          <a:xfrm>
+            <a:off x="1333847" y="650025"/>
+            <a:ext cx="9741751" cy="365748"/>
+          </a:xfrm>
+        </p:spPr>
+        <p:txBody>
+          <a:bodyPr>
+            <a:noAutofit/>
+          </a:bodyPr>
+          <a:lstStyle/>
+          <a:p>
+            <a:pPr algn="l"/>
+            <a:r>
+              <a:rPr lang="pt-BR" sz="3200" b="1" dirty="0">
+                <a:solidFill>
+                  <a:schemeClr val="bg1"/>
+                </a:solidFill>
+              </a:rPr>
+              <a:t>DADOS COMPARTILHADOS</a:t>
+            </a:r>
+          </a:p>
+        </p:txBody>
+      </p:sp>
+      <p:cxnSp>
+        <p:nvCxnSpPr>
+          <p:cNvPr id="4" name="Google Shape;140;p3">
+            <a:extLst>
+              <a:ext uri="{FF2B5EF4-FFF2-40B4-BE49-F238E27FC236}">
+                <a16:creationId xmlns:a16="http://schemas.microsoft.com/office/drawing/2014/main" id="{FCC75F2B-CBF7-0496-6627-BEBF084612C2}"/>
+              </a:ext>
+            </a:extLst>
+          </p:cNvPr>
+          <p:cNvCxnSpPr>
+            <a:cxnSpLocks/>
+          </p:cNvCxnSpPr>
+          <p:nvPr/>
+        </p:nvCxnSpPr>
+        <p:spPr>
+          <a:xfrm>
+            <a:off x="1333847" y="1135492"/>
+            <a:ext cx="9741751" cy="0"/>
+          </a:xfrm>
+          <a:prstGeom prst="straightConnector1">
+            <a:avLst/>
+          </a:prstGeom>
+          <a:noFill/>
+          <a:ln w="57150" cap="flat" cmpd="sng">
+            <a:solidFill>
+              <a:schemeClr val="accent1"/>
+            </a:solidFill>
+            <a:prstDash val="solid"/>
+            <a:miter lim="800000"/>
+            <a:headEnd type="none" w="sm" len="sm"/>
+            <a:tailEnd type="none" w="sm" len="sm"/>
+          </a:ln>
+        </p:spPr>
+      </p:cxnSp>
+      <p:pic>
+        <p:nvPicPr>
+          <p:cNvPr id="24" name="Gráfico 23">
+            <a:extLst>
+              <a:ext uri="{FF2B5EF4-FFF2-40B4-BE49-F238E27FC236}">
+                <a16:creationId xmlns:a16="http://schemas.microsoft.com/office/drawing/2014/main" id="{1115055F-6111-0115-674F-DF395B63DEE3}"/>
+              </a:ext>
+            </a:extLst>
+          </p:cNvPr>
+          <p:cNvPicPr>
+            <a:picLocks noChangeAspect="1"/>
+          </p:cNvPicPr>
+          <p:nvPr/>
+        </p:nvPicPr>
+        <p:blipFill>
+          <a:blip r:embed="rId3">
+            <a:extLst>
+              <a:ext uri="{96DAC541-7B7A-43D3-8B79-37D633B846F1}">
+                <asvg:svgBlip xmlns:asvg="http://schemas.microsoft.com/office/drawing/2016/SVG/main" r:embed="rId4"/>
+              </a:ext>
+            </a:extLst>
+          </a:blip>
+          <a:stretch>
+            <a:fillRect/>
+          </a:stretch>
+        </p:blipFill>
+        <p:spPr>
+          <a:xfrm>
+            <a:off x="1334867" y="1646547"/>
+            <a:ext cx="604800" cy="604800"/>
+          </a:xfrm>
+          <a:prstGeom prst="rect">
+            <a:avLst/>
+          </a:prstGeom>
+        </p:spPr>
+      </p:pic>
+      <p:sp>
+        <p:nvSpPr>
+          <p:cNvPr id="25" name="CaixaDeTexto 24">
+            <a:extLst>
+              <a:ext uri="{FF2B5EF4-FFF2-40B4-BE49-F238E27FC236}">
+                <a16:creationId xmlns:a16="http://schemas.microsoft.com/office/drawing/2014/main" id="{B0954C7C-8B81-E6FD-E942-9CCF397A4B19}"/>
+              </a:ext>
+            </a:extLst>
+          </p:cNvPr>
+          <p:cNvSpPr txBox="1"/>
+          <p:nvPr/>
+        </p:nvSpPr>
+        <p:spPr>
+          <a:xfrm>
+            <a:off x="1939667" y="1495347"/>
+            <a:ext cx="9136951" cy="4893647"/>
+          </a:xfrm>
+          <a:prstGeom prst="rect">
+            <a:avLst/>
+          </a:prstGeom>
+          <a:noFill/>
+        </p:spPr>
+        <p:txBody>
+          <a:bodyPr wrap="square">
+            <a:spAutoFit/>
+          </a:bodyPr>
+          <a:lstStyle/>
+          <a:p>
+            <a:r>
+              <a:rPr lang="pt-BR" sz="2400" b="1" dirty="0">
+                <a:solidFill>
+                  <a:schemeClr val="bg1"/>
+                </a:solidFill>
+              </a:rPr>
+              <a:t>Durante a comunicação via Bluetooth, os dispositivos compartilham diversos tipos de dados, dependendo dos perfis e serviços implementados. Abaixo, apresento uma descrição detalhada dos principais dados compartilhados, com base em protocolos confiáveis:</a:t>
+            </a:r>
+          </a:p>
+          <a:p>
+            <a:endParaRPr lang="pt-BR" sz="2400" b="1" dirty="0">
+              <a:solidFill>
+                <a:schemeClr val="bg1"/>
+              </a:solidFill>
+            </a:endParaRPr>
+          </a:p>
+          <a:p>
+            <a:r>
+              <a:rPr lang="pt-BR" sz="2400" b="1" dirty="0">
+                <a:solidFill>
+                  <a:schemeClr val="bg1"/>
+                </a:solidFill>
+              </a:rPr>
+              <a:t>A2DP (</a:t>
+            </a:r>
+            <a:r>
+              <a:rPr lang="pt-BR" sz="2400" b="1" dirty="0" err="1">
+                <a:solidFill>
+                  <a:schemeClr val="bg1"/>
+                </a:solidFill>
+              </a:rPr>
+              <a:t>Advanced</a:t>
+            </a:r>
+            <a:r>
+              <a:rPr lang="pt-BR" sz="2400" b="1" dirty="0">
+                <a:solidFill>
+                  <a:schemeClr val="bg1"/>
+                </a:solidFill>
+              </a:rPr>
+              <a:t> </a:t>
+            </a:r>
+            <a:r>
+              <a:rPr lang="pt-BR" sz="2400" b="1" dirty="0" err="1">
+                <a:solidFill>
+                  <a:schemeClr val="bg1"/>
+                </a:solidFill>
+              </a:rPr>
+              <a:t>Audio</a:t>
+            </a:r>
+            <a:r>
+              <a:rPr lang="pt-BR" sz="2400" b="1" dirty="0">
+                <a:solidFill>
+                  <a:schemeClr val="bg1"/>
+                </a:solidFill>
+              </a:rPr>
+              <a:t> </a:t>
+            </a:r>
+            <a:r>
+              <a:rPr lang="pt-BR" sz="2400" b="1" dirty="0" err="1">
+                <a:solidFill>
+                  <a:schemeClr val="bg1"/>
+                </a:solidFill>
+              </a:rPr>
+              <a:t>Distribution</a:t>
+            </a:r>
+            <a:r>
+              <a:rPr lang="pt-BR" sz="2400" b="1" dirty="0">
+                <a:solidFill>
+                  <a:schemeClr val="bg1"/>
+                </a:solidFill>
+              </a:rPr>
+              <a:t> Profile)  </a:t>
+            </a:r>
+          </a:p>
+          <a:p>
+            <a:r>
+              <a:rPr lang="pt-BR" sz="2400" b="1" dirty="0">
+                <a:solidFill>
+                  <a:schemeClr val="bg1"/>
+                </a:solidFill>
+              </a:rPr>
+              <a:t>HSP (Headset Profile)</a:t>
+            </a:r>
+          </a:p>
+          <a:p>
+            <a:r>
+              <a:rPr lang="pt-BR" sz="2400" b="1" dirty="0">
+                <a:solidFill>
+                  <a:schemeClr val="bg1"/>
+                </a:solidFill>
+              </a:rPr>
+              <a:t>VDP (</a:t>
+            </a:r>
+            <a:r>
+              <a:rPr lang="pt-BR" sz="2400" b="1" dirty="0" err="1">
+                <a:solidFill>
+                  <a:schemeClr val="bg1"/>
+                </a:solidFill>
+              </a:rPr>
+              <a:t>Video</a:t>
+            </a:r>
+            <a:r>
+              <a:rPr lang="pt-BR" sz="2400" b="1" dirty="0">
+                <a:solidFill>
+                  <a:schemeClr val="bg1"/>
+                </a:solidFill>
+              </a:rPr>
+              <a:t> </a:t>
+            </a:r>
+            <a:r>
+              <a:rPr lang="pt-BR" sz="2400" b="1" dirty="0" err="1">
+                <a:solidFill>
+                  <a:schemeClr val="bg1"/>
+                </a:solidFill>
+              </a:rPr>
+              <a:t>Distribution</a:t>
+            </a:r>
+            <a:r>
+              <a:rPr lang="pt-BR" sz="2400" b="1" dirty="0">
+                <a:solidFill>
+                  <a:schemeClr val="bg1"/>
+                </a:solidFill>
+              </a:rPr>
+              <a:t> Profile)</a:t>
+            </a:r>
+          </a:p>
+          <a:p>
+            <a:r>
+              <a:rPr lang="pt-BR" sz="2400" b="1" dirty="0">
+                <a:solidFill>
+                  <a:schemeClr val="bg1"/>
+                </a:solidFill>
+              </a:rPr>
+              <a:t>AVRCP (</a:t>
+            </a:r>
+            <a:r>
+              <a:rPr lang="pt-BR" sz="2400" b="1" dirty="0" err="1">
+                <a:solidFill>
+                  <a:schemeClr val="bg1"/>
+                </a:solidFill>
+              </a:rPr>
+              <a:t>Audio</a:t>
+            </a:r>
+            <a:r>
+              <a:rPr lang="pt-BR" sz="2400" b="1" dirty="0">
+                <a:solidFill>
+                  <a:schemeClr val="bg1"/>
+                </a:solidFill>
+              </a:rPr>
+              <a:t>/</a:t>
+            </a:r>
+            <a:r>
+              <a:rPr lang="pt-BR" sz="2400" b="1" dirty="0" err="1">
+                <a:solidFill>
+                  <a:schemeClr val="bg1"/>
+                </a:solidFill>
+              </a:rPr>
+              <a:t>Video</a:t>
+            </a:r>
+            <a:r>
+              <a:rPr lang="pt-BR" sz="2400" b="1" dirty="0">
+                <a:solidFill>
+                  <a:schemeClr val="bg1"/>
+                </a:solidFill>
+              </a:rPr>
+              <a:t> Remote </a:t>
+            </a:r>
+            <a:r>
+              <a:rPr lang="pt-BR" sz="2400" b="1" dirty="0" err="1">
+                <a:solidFill>
+                  <a:schemeClr val="bg1"/>
+                </a:solidFill>
+              </a:rPr>
+              <a:t>Control</a:t>
+            </a:r>
+            <a:r>
+              <a:rPr lang="pt-BR" sz="2400" b="1" dirty="0">
+                <a:solidFill>
+                  <a:schemeClr val="bg1"/>
+                </a:solidFill>
+              </a:rPr>
+              <a:t> Profile) </a:t>
+            </a:r>
+          </a:p>
+          <a:p>
+            <a:r>
+              <a:rPr lang="pt-BR" sz="2400" b="1" dirty="0">
+                <a:solidFill>
+                  <a:schemeClr val="bg1"/>
+                </a:solidFill>
+              </a:rPr>
+              <a:t>OPP (</a:t>
+            </a:r>
+            <a:r>
+              <a:rPr lang="pt-BR" sz="2400" b="1" dirty="0" err="1">
+                <a:solidFill>
+                  <a:schemeClr val="bg1"/>
+                </a:solidFill>
+              </a:rPr>
+              <a:t>Object</a:t>
+            </a:r>
+            <a:r>
+              <a:rPr lang="pt-BR" sz="2400" b="1" dirty="0">
+                <a:solidFill>
+                  <a:schemeClr val="bg1"/>
+                </a:solidFill>
+              </a:rPr>
+              <a:t> </a:t>
+            </a:r>
+            <a:r>
+              <a:rPr lang="pt-BR" sz="2400" b="1" dirty="0" err="1">
+                <a:solidFill>
+                  <a:schemeClr val="bg1"/>
+                </a:solidFill>
+              </a:rPr>
+              <a:t>Push</a:t>
+            </a:r>
+            <a:r>
+              <a:rPr lang="pt-BR" sz="2400" b="1" dirty="0">
+                <a:solidFill>
+                  <a:schemeClr val="bg1"/>
+                </a:solidFill>
+              </a:rPr>
+              <a:t> Profile) e FTP (File </a:t>
+            </a:r>
+            <a:r>
+              <a:rPr lang="pt-BR" sz="2400" b="1" dirty="0" err="1">
+                <a:solidFill>
+                  <a:schemeClr val="bg1"/>
+                </a:solidFill>
+              </a:rPr>
+              <a:t>Transfer</a:t>
+            </a:r>
+            <a:r>
+              <a:rPr lang="pt-BR" sz="2400" b="1" dirty="0">
+                <a:solidFill>
+                  <a:schemeClr val="bg1"/>
+                </a:solidFill>
+              </a:rPr>
+              <a:t> Profile)</a:t>
+            </a:r>
+          </a:p>
+          <a:p>
+            <a:r>
+              <a:rPr lang="en-US" sz="2400" b="1" dirty="0">
+                <a:solidFill>
+                  <a:schemeClr val="bg1"/>
+                </a:solidFill>
+              </a:rPr>
+              <a:t>HID (Human Interface Device Profile) </a:t>
+            </a:r>
+            <a:endParaRPr lang="pt-BR" sz="2400" b="1" dirty="0">
+              <a:solidFill>
+                <a:schemeClr val="bg1"/>
+              </a:solidFill>
+            </a:endParaRPr>
+          </a:p>
+          <a:p>
+            <a:r>
+              <a:rPr lang="en-US" sz="2400" b="1" dirty="0">
+                <a:solidFill>
+                  <a:schemeClr val="bg1"/>
+                </a:solidFill>
+              </a:rPr>
+              <a:t>PBAP (Phone Book Access Profile) </a:t>
+            </a:r>
+            <a:endParaRPr lang="pt-BR" sz="2400" b="1" dirty="0">
+              <a:solidFill>
+                <a:schemeClr val="bg1"/>
+              </a:solidFill>
+            </a:endParaRPr>
+          </a:p>
+          <a:p>
+            <a:r>
+              <a:rPr lang="pt-BR" sz="2400" b="1" dirty="0">
+                <a:solidFill>
+                  <a:schemeClr val="bg1"/>
+                </a:solidFill>
+              </a:rPr>
+              <a:t>HDP (Health Device Profile) </a:t>
+            </a:r>
+          </a:p>
+        </p:txBody>
+      </p:sp>
+    </p:spTree>
+    <p:extLst>
+      <p:ext uri="{BB962C8B-B14F-4D97-AF65-F5344CB8AC3E}">
+        <p14:creationId xmlns:p14="http://schemas.microsoft.com/office/powerpoint/2010/main" val="2223700102"/>
+      </p:ext>
+    </p:extLst>
+  </p:cSld>
+  <p:clrMapOvr>
+    <a:masterClrMapping/>
+  </p:clrMapOvr>
+</p:sld>
+</file>
+
+<file path=ppt/slides/slide14.xml><?xml version="1.0" encoding="utf-8"?>
+<p:sld xmlns:a="http://schemas.openxmlformats.org/drawingml/2006/main" xmlns:r="http://schemas.openxmlformats.org/officeDocument/2006/relationships" xmlns:p="http://schemas.openxmlformats.org/presentationml/2006/main">
+  <p:cSld>
+    <p:bg>
+      <p:bgPr>
+        <a:blipFill dpi="0" rotWithShape="1">
+          <a:blip r:embed="rId2">
+            <a:lum/>
+          </a:blip>
+          <a:srcRect/>
+          <a:stretch>
+            <a:fillRect/>
+          </a:stretch>
+        </a:blipFill>
+        <a:effectLst/>
+      </p:bgPr>
+    </p:bg>
+    <p:spTree>
+      <p:nvGrpSpPr>
+        <p:cNvPr id="1" name="">
+          <a:extLst>
+            <a:ext uri="{FF2B5EF4-FFF2-40B4-BE49-F238E27FC236}">
+              <a16:creationId xmlns:a16="http://schemas.microsoft.com/office/drawing/2014/main" id="{B12C8E9F-ABAC-1621-9816-15247BBD9CDA}"/>
+            </a:ext>
+          </a:extLst>
+        </p:cNvPr>
+        <p:cNvGrpSpPr/>
+        <p:nvPr/>
+      </p:nvGrpSpPr>
+      <p:grpSpPr>
+        <a:xfrm>
+          <a:off x="0" y="0"/>
+          <a:ext cx="0" cy="0"/>
+          <a:chOff x="0" y="0"/>
+          <a:chExt cx="0" cy="0"/>
+        </a:xfrm>
+      </p:grpSpPr>
+      <p:sp>
+        <p:nvSpPr>
+          <p:cNvPr id="16" name="Subtítulo 2">
+            <a:extLst>
+              <a:ext uri="{FF2B5EF4-FFF2-40B4-BE49-F238E27FC236}">
+                <a16:creationId xmlns:a16="http://schemas.microsoft.com/office/drawing/2014/main" id="{A1ADE879-1C3A-FE85-31A1-9D427950BA4F}"/>
+              </a:ext>
+            </a:extLst>
+          </p:cNvPr>
+          <p:cNvSpPr>
+            <a:spLocks noGrp="1"/>
+          </p:cNvSpPr>
+          <p:nvPr>
+            <p:ph type="subTitle" idx="1"/>
+          </p:nvPr>
+        </p:nvSpPr>
+        <p:spPr>
+          <a:xfrm>
+            <a:off x="1333847" y="935775"/>
+            <a:ext cx="9741751" cy="365748"/>
+          </a:xfrm>
+        </p:spPr>
+        <p:txBody>
+          <a:bodyPr>
+            <a:noAutofit/>
+          </a:bodyPr>
+          <a:lstStyle/>
+          <a:p>
+            <a:pPr algn="l"/>
+            <a:r>
+              <a:rPr lang="pt-BR" sz="3200" b="1" dirty="0">
+                <a:solidFill>
+                  <a:schemeClr val="bg1"/>
+                </a:solidFill>
+              </a:rPr>
+              <a:t>PADRÕES EVOLVIDOS</a:t>
+            </a:r>
+          </a:p>
+        </p:txBody>
+      </p:sp>
+      <p:cxnSp>
+        <p:nvCxnSpPr>
+          <p:cNvPr id="17" name="Google Shape;140;p3">
+            <a:extLst>
+              <a:ext uri="{FF2B5EF4-FFF2-40B4-BE49-F238E27FC236}">
+                <a16:creationId xmlns:a16="http://schemas.microsoft.com/office/drawing/2014/main" id="{A3FB3D16-0008-6DE3-8DA8-5E645A29D1AB}"/>
+              </a:ext>
+            </a:extLst>
+          </p:cNvPr>
+          <p:cNvCxnSpPr>
+            <a:cxnSpLocks/>
+          </p:cNvCxnSpPr>
+          <p:nvPr/>
+        </p:nvCxnSpPr>
+        <p:spPr>
+          <a:xfrm>
+            <a:off x="1333847" y="1421242"/>
+            <a:ext cx="9741751" cy="0"/>
+          </a:xfrm>
+          <a:prstGeom prst="straightConnector1">
+            <a:avLst/>
+          </a:prstGeom>
+          <a:noFill/>
+          <a:ln w="57150" cap="flat" cmpd="sng">
+            <a:solidFill>
+              <a:schemeClr val="accent1"/>
+            </a:solidFill>
+            <a:prstDash val="solid"/>
+            <a:miter lim="800000"/>
+            <a:headEnd type="none" w="sm" len="sm"/>
+            <a:tailEnd type="none" w="sm" len="sm"/>
+          </a:ln>
+        </p:spPr>
+      </p:cxnSp>
+      <p:sp>
+        <p:nvSpPr>
+          <p:cNvPr id="19" name="CaixaDeTexto 18">
+            <a:extLst>
+              <a:ext uri="{FF2B5EF4-FFF2-40B4-BE49-F238E27FC236}">
+                <a16:creationId xmlns:a16="http://schemas.microsoft.com/office/drawing/2014/main" id="{AB3F36EC-D7B2-4307-E351-E3F59C8A0CC0}"/>
+              </a:ext>
+            </a:extLst>
+          </p:cNvPr>
+          <p:cNvSpPr txBox="1"/>
+          <p:nvPr/>
+        </p:nvSpPr>
+        <p:spPr>
+          <a:xfrm>
+            <a:off x="1939667" y="1781097"/>
+            <a:ext cx="9136951" cy="1938992"/>
+          </a:xfrm>
+          <a:prstGeom prst="rect">
+            <a:avLst/>
+          </a:prstGeom>
+          <a:noFill/>
+        </p:spPr>
+        <p:txBody>
+          <a:bodyPr wrap="square">
+            <a:spAutoFit/>
+          </a:bodyPr>
+          <a:lstStyle/>
+          <a:p>
+            <a:r>
+              <a:rPr lang="pt-BR" sz="2400" b="1" dirty="0">
+                <a:solidFill>
+                  <a:schemeClr val="bg1"/>
+                </a:solidFill>
+              </a:rPr>
+              <a:t>O Bluetooth contém vários protocolos que foram criados especificamente para atender seus propósitos de transmissão de dados, mas também faz uso de protocolos oriundos de outras especificações técnicas e padrões. O próprio Bluetooth foi utilizado como base para a especificação do padrão IEEE 802.15.1.</a:t>
+            </a:r>
+          </a:p>
+        </p:txBody>
+      </p:sp>
+      <p:pic>
+        <p:nvPicPr>
+          <p:cNvPr id="20" name="Gráfico 19">
+            <a:extLst>
+              <a:ext uri="{FF2B5EF4-FFF2-40B4-BE49-F238E27FC236}">
+                <a16:creationId xmlns:a16="http://schemas.microsoft.com/office/drawing/2014/main" id="{3E3CB69A-FBF2-EF21-9DA4-DFAFF8D0B604}"/>
+              </a:ext>
+            </a:extLst>
+          </p:cNvPr>
+          <p:cNvPicPr>
+            <a:picLocks noChangeAspect="1"/>
+          </p:cNvPicPr>
+          <p:nvPr/>
+        </p:nvPicPr>
+        <p:blipFill>
+          <a:blip r:embed="rId3">
+            <a:extLst>
+              <a:ext uri="{96DAC541-7B7A-43D3-8B79-37D633B846F1}">
+                <asvg:svgBlip xmlns:asvg="http://schemas.microsoft.com/office/drawing/2016/SVG/main" r:embed="rId4"/>
+              </a:ext>
+            </a:extLst>
+          </a:blip>
+          <a:stretch>
+            <a:fillRect/>
+          </a:stretch>
+        </p:blipFill>
+        <p:spPr>
+          <a:xfrm>
+            <a:off x="1333847" y="1856940"/>
+            <a:ext cx="604800" cy="604800"/>
+          </a:xfrm>
+          <a:prstGeom prst="rect">
+            <a:avLst/>
+          </a:prstGeom>
+        </p:spPr>
+      </p:pic>
+      <p:sp>
+        <p:nvSpPr>
+          <p:cNvPr id="22" name="CaixaDeTexto 21">
+            <a:extLst>
+              <a:ext uri="{FF2B5EF4-FFF2-40B4-BE49-F238E27FC236}">
+                <a16:creationId xmlns:a16="http://schemas.microsoft.com/office/drawing/2014/main" id="{33D8C953-090C-03B1-D5CD-5EBE1F0138BB}"/>
+              </a:ext>
+            </a:extLst>
+          </p:cNvPr>
+          <p:cNvSpPr txBox="1"/>
+          <p:nvPr/>
+        </p:nvSpPr>
+        <p:spPr>
+          <a:xfrm>
+            <a:off x="1939666" y="3894077"/>
+            <a:ext cx="9135931" cy="1938992"/>
+          </a:xfrm>
+          <a:prstGeom prst="rect">
+            <a:avLst/>
+          </a:prstGeom>
+          <a:noFill/>
+        </p:spPr>
+        <p:txBody>
+          <a:bodyPr wrap="square">
+            <a:spAutoFit/>
+          </a:bodyPr>
+          <a:lstStyle/>
+          <a:p>
+            <a:r>
+              <a:rPr lang="pt-BR" sz="2400" b="1" dirty="0">
+                <a:solidFill>
+                  <a:schemeClr val="bg1"/>
+                </a:solidFill>
+              </a:rPr>
+              <a:t>O protocolo RFCOMM, baseado no padrão ETSI 07.10, atua na camada de transporte com a função de prover compatibilidade com o protocolo RS-232. Criando uma interface entre as comunicações baseadas em pacote (naturais do Bluetooth) com dispositivos que operem por meio de conexões seriais.</a:t>
+            </a:r>
+          </a:p>
+        </p:txBody>
+      </p:sp>
+      <p:pic>
+        <p:nvPicPr>
+          <p:cNvPr id="24" name="Gráfico 23">
+            <a:extLst>
+              <a:ext uri="{FF2B5EF4-FFF2-40B4-BE49-F238E27FC236}">
+                <a16:creationId xmlns:a16="http://schemas.microsoft.com/office/drawing/2014/main" id="{435A1170-8E6A-AF2F-0C39-58A2F14086E3}"/>
+              </a:ext>
+            </a:extLst>
+          </p:cNvPr>
+          <p:cNvPicPr>
+            <a:picLocks noChangeAspect="1"/>
+          </p:cNvPicPr>
+          <p:nvPr/>
+        </p:nvPicPr>
+        <p:blipFill>
+          <a:blip r:embed="rId5">
+            <a:extLst>
+              <a:ext uri="{96DAC541-7B7A-43D3-8B79-37D633B846F1}">
+                <asvg:svgBlip xmlns:asvg="http://schemas.microsoft.com/office/drawing/2016/SVG/main" r:embed="rId6"/>
+              </a:ext>
+            </a:extLst>
+          </a:blip>
+          <a:stretch>
+            <a:fillRect/>
+          </a:stretch>
+        </p:blipFill>
+        <p:spPr>
+          <a:xfrm>
+            <a:off x="1333847" y="3972889"/>
+            <a:ext cx="604800" cy="604800"/>
+          </a:xfrm>
+          <a:prstGeom prst="rect">
+            <a:avLst/>
+          </a:prstGeom>
+        </p:spPr>
+      </p:pic>
+    </p:spTree>
+    <p:extLst>
+      <p:ext uri="{BB962C8B-B14F-4D97-AF65-F5344CB8AC3E}">
+        <p14:creationId xmlns:p14="http://schemas.microsoft.com/office/powerpoint/2010/main" val="3332660130"/>
+      </p:ext>
+    </p:extLst>
+  </p:cSld>
+  <p:clrMapOvr>
+    <a:masterClrMapping/>
+  </p:clrMapOvr>
+</p:sld>
+</file>
+
+<file path=ppt/slides/slide15.xml><?xml version="1.0" encoding="utf-8"?>
+<p:sld xmlns:a="http://schemas.openxmlformats.org/drawingml/2006/main" xmlns:r="http://schemas.openxmlformats.org/officeDocument/2006/relationships" xmlns:p="http://schemas.openxmlformats.org/presentationml/2006/main">
+  <p:cSld>
+    <p:bg>
+      <p:bgPr>
+        <a:blipFill dpi="0" rotWithShape="1">
+          <a:blip r:embed="rId2">
+            <a:lum/>
+          </a:blip>
+          <a:srcRect/>
+          <a:stretch>
+            <a:fillRect/>
+          </a:stretch>
+        </a:blipFill>
+        <a:effectLst/>
+      </p:bgPr>
+    </p:bg>
+    <p:spTree>
+      <p:nvGrpSpPr>
+        <p:cNvPr id="1" name="">
+          <a:extLst>
+            <a:ext uri="{FF2B5EF4-FFF2-40B4-BE49-F238E27FC236}">
+              <a16:creationId xmlns:a16="http://schemas.microsoft.com/office/drawing/2014/main" id="{7055A63F-A37C-5BFA-8450-1BDC3F7D5593}"/>
+            </a:ext>
+          </a:extLst>
+        </p:cNvPr>
+        <p:cNvGrpSpPr/>
+        <p:nvPr/>
+      </p:nvGrpSpPr>
+      <p:grpSpPr>
+        <a:xfrm>
+          <a:off x="0" y="0"/>
+          <a:ext cx="0" cy="0"/>
+          <a:chOff x="0" y="0"/>
+          <a:chExt cx="0" cy="0"/>
+        </a:xfrm>
+      </p:grpSpPr>
+      <p:sp>
+        <p:nvSpPr>
+          <p:cNvPr id="16" name="Subtítulo 2">
+            <a:extLst>
+              <a:ext uri="{FF2B5EF4-FFF2-40B4-BE49-F238E27FC236}">
+                <a16:creationId xmlns:a16="http://schemas.microsoft.com/office/drawing/2014/main" id="{6633F8A9-4E88-5918-97E3-C2B9A1701081}"/>
+              </a:ext>
+            </a:extLst>
+          </p:cNvPr>
+          <p:cNvSpPr>
+            <a:spLocks noGrp="1"/>
+          </p:cNvSpPr>
+          <p:nvPr>
+            <p:ph type="subTitle" idx="1"/>
+          </p:nvPr>
+        </p:nvSpPr>
+        <p:spPr>
+          <a:xfrm>
+            <a:off x="1333847" y="558405"/>
+            <a:ext cx="9741751" cy="365748"/>
+          </a:xfrm>
+        </p:spPr>
+        <p:txBody>
+          <a:bodyPr>
+            <a:noAutofit/>
+          </a:bodyPr>
+          <a:lstStyle/>
+          <a:p>
+            <a:pPr algn="l"/>
+            <a:r>
+              <a:rPr lang="pt-BR" sz="3200" b="1" dirty="0">
+                <a:solidFill>
+                  <a:schemeClr val="bg1"/>
+                </a:solidFill>
+              </a:rPr>
+              <a:t>PADRÕES EVOLVIDOS</a:t>
+            </a:r>
+          </a:p>
+        </p:txBody>
+      </p:sp>
+      <p:cxnSp>
+        <p:nvCxnSpPr>
+          <p:cNvPr id="17" name="Google Shape;140;p3">
+            <a:extLst>
+              <a:ext uri="{FF2B5EF4-FFF2-40B4-BE49-F238E27FC236}">
+                <a16:creationId xmlns:a16="http://schemas.microsoft.com/office/drawing/2014/main" id="{4C5FB502-35E4-BAFD-255C-5B0E58DFAE15}"/>
+              </a:ext>
+            </a:extLst>
+          </p:cNvPr>
+          <p:cNvCxnSpPr>
+            <a:cxnSpLocks/>
+          </p:cNvCxnSpPr>
+          <p:nvPr/>
+        </p:nvCxnSpPr>
+        <p:spPr>
+          <a:xfrm>
+            <a:off x="1333847" y="1043872"/>
+            <a:ext cx="9741751" cy="0"/>
+          </a:xfrm>
+          <a:prstGeom prst="straightConnector1">
+            <a:avLst/>
+          </a:prstGeom>
+          <a:noFill/>
+          <a:ln w="57150" cap="flat" cmpd="sng">
+            <a:solidFill>
+              <a:schemeClr val="accent1"/>
+            </a:solidFill>
+            <a:prstDash val="solid"/>
+            <a:miter lim="800000"/>
+            <a:headEnd type="none" w="sm" len="sm"/>
+            <a:tailEnd type="none" w="sm" len="sm"/>
+          </a:ln>
+        </p:spPr>
+      </p:cxnSp>
+      <p:sp>
+        <p:nvSpPr>
+          <p:cNvPr id="19" name="CaixaDeTexto 18">
+            <a:extLst>
+              <a:ext uri="{FF2B5EF4-FFF2-40B4-BE49-F238E27FC236}">
+                <a16:creationId xmlns:a16="http://schemas.microsoft.com/office/drawing/2014/main" id="{8774D79B-D737-CC70-8CE8-223E9E178480}"/>
+              </a:ext>
+            </a:extLst>
+          </p:cNvPr>
+          <p:cNvSpPr txBox="1"/>
+          <p:nvPr/>
+        </p:nvSpPr>
+        <p:spPr>
+          <a:xfrm>
+            <a:off x="1939667" y="1403727"/>
+            <a:ext cx="9136951" cy="1569660"/>
+          </a:xfrm>
+          <a:prstGeom prst="rect">
+            <a:avLst/>
+          </a:prstGeom>
+          <a:noFill/>
+        </p:spPr>
+        <p:txBody>
+          <a:bodyPr wrap="square">
+            <a:spAutoFit/>
+          </a:bodyPr>
+          <a:lstStyle/>
+          <a:p>
+            <a:r>
+              <a:rPr lang="pt-BR" sz="2400" b="1" dirty="0">
+                <a:solidFill>
+                  <a:schemeClr val="bg1"/>
+                </a:solidFill>
+              </a:rPr>
+              <a:t>Sobre  o protocolo RFCOMM, dispositivos Bluetooth utilizam o protocolo PPP, definido pelo IETF RFC 1621, para permitir a transferência dos datagramas entre pares conectados dentro da </a:t>
+            </a:r>
+            <a:r>
+              <a:rPr lang="pt-BR" sz="2400" b="1" dirty="0" err="1">
+                <a:solidFill>
+                  <a:schemeClr val="bg1"/>
+                </a:solidFill>
+              </a:rPr>
+              <a:t>piconet</a:t>
+            </a:r>
+            <a:r>
+              <a:rPr lang="pt-BR" sz="2400" b="1" dirty="0">
+                <a:solidFill>
+                  <a:schemeClr val="bg1"/>
+                </a:solidFill>
+              </a:rPr>
+              <a:t>.</a:t>
+            </a:r>
+          </a:p>
+        </p:txBody>
+      </p:sp>
+      <p:pic>
+        <p:nvPicPr>
+          <p:cNvPr id="2" name="Gráfico 1">
+            <a:extLst>
+              <a:ext uri="{FF2B5EF4-FFF2-40B4-BE49-F238E27FC236}">
+                <a16:creationId xmlns:a16="http://schemas.microsoft.com/office/drawing/2014/main" id="{E7BC4676-D192-5278-715F-B761D32759EF}"/>
+              </a:ext>
+            </a:extLst>
+          </p:cNvPr>
+          <p:cNvPicPr>
+            <a:picLocks noChangeAspect="1"/>
+          </p:cNvPicPr>
+          <p:nvPr/>
+        </p:nvPicPr>
+        <p:blipFill>
+          <a:blip r:embed="rId3">
+            <a:extLst>
+              <a:ext uri="{96DAC541-7B7A-43D3-8B79-37D633B846F1}">
+                <asvg:svgBlip xmlns:asvg="http://schemas.microsoft.com/office/drawing/2016/SVG/main" r:embed="rId4"/>
+              </a:ext>
+            </a:extLst>
+          </a:blip>
+          <a:stretch>
+            <a:fillRect/>
+          </a:stretch>
+        </p:blipFill>
+        <p:spPr>
+          <a:xfrm>
+            <a:off x="1333847" y="1480230"/>
+            <a:ext cx="604800" cy="604800"/>
+          </a:xfrm>
+          <a:prstGeom prst="rect">
+            <a:avLst/>
+          </a:prstGeom>
+        </p:spPr>
+      </p:pic>
+      <p:grpSp>
+        <p:nvGrpSpPr>
+          <p:cNvPr id="6" name="Agrupar 5">
+            <a:extLst>
+              <a:ext uri="{FF2B5EF4-FFF2-40B4-BE49-F238E27FC236}">
+                <a16:creationId xmlns:a16="http://schemas.microsoft.com/office/drawing/2014/main" id="{946125B8-F5E6-DE41-BC74-2FE22ACEC1F1}"/>
+              </a:ext>
+            </a:extLst>
+          </p:cNvPr>
+          <p:cNvGrpSpPr/>
+          <p:nvPr/>
+        </p:nvGrpSpPr>
+        <p:grpSpPr>
+          <a:xfrm>
+            <a:off x="1651682" y="2859317"/>
+            <a:ext cx="8888637" cy="3770482"/>
+            <a:chOff x="1333847" y="2973387"/>
+            <a:chExt cx="8619723" cy="3656411"/>
+          </a:xfrm>
+        </p:grpSpPr>
+        <p:grpSp>
+          <p:nvGrpSpPr>
+            <p:cNvPr id="7" name="Agrupar 6">
+              <a:extLst>
+                <a:ext uri="{FF2B5EF4-FFF2-40B4-BE49-F238E27FC236}">
+                  <a16:creationId xmlns:a16="http://schemas.microsoft.com/office/drawing/2014/main" id="{62BF925A-6118-72CC-2640-0173939D3270}"/>
+                </a:ext>
+              </a:extLst>
+            </p:cNvPr>
+            <p:cNvGrpSpPr/>
+            <p:nvPr/>
+          </p:nvGrpSpPr>
+          <p:grpSpPr>
+            <a:xfrm>
+              <a:off x="5121114" y="2973387"/>
+              <a:ext cx="4832456" cy="3656411"/>
+              <a:chOff x="3679772" y="2973387"/>
+              <a:chExt cx="4832456" cy="3656411"/>
+            </a:xfrm>
+          </p:grpSpPr>
+          <p:pic>
+            <p:nvPicPr>
+              <p:cNvPr id="9" name="Imagem 8">
+                <a:extLst>
+                  <a:ext uri="{FF2B5EF4-FFF2-40B4-BE49-F238E27FC236}">
+                    <a16:creationId xmlns:a16="http://schemas.microsoft.com/office/drawing/2014/main" id="{8916C56B-238B-2E53-B5E0-9BDD8AAA7B89}"/>
+                  </a:ext>
+                </a:extLst>
+              </p:cNvPr>
+              <p:cNvPicPr>
+                <a:picLocks noChangeAspect="1"/>
+              </p:cNvPicPr>
+              <p:nvPr/>
+            </p:nvPicPr>
+            <p:blipFill>
+              <a:blip r:embed="rId5">
+                <a:lum/>
+                <a:alphaModFix/>
+              </a:blip>
+              <a:srcRect r="19659"/>
+              <a:stretch>
+                <a:fillRect/>
+              </a:stretch>
+            </p:blipFill>
+            <p:spPr>
+              <a:xfrm>
+                <a:off x="3679772" y="2973387"/>
+                <a:ext cx="4832456" cy="3656411"/>
+              </a:xfrm>
+              <a:prstGeom prst="rect">
+                <a:avLst/>
+              </a:prstGeom>
+              <a:noFill/>
+              <a:ln>
+                <a:noFill/>
+              </a:ln>
+              <a:effectLst>
+                <a:glow rad="12700">
+                  <a:schemeClr val="bg1">
+                    <a:alpha val="40000"/>
+                  </a:schemeClr>
+                </a:glow>
+              </a:effectLst>
+            </p:spPr>
+          </p:pic>
+          <p:sp>
+            <p:nvSpPr>
+              <p:cNvPr id="10" name="CaixaDeTexto 9">
+                <a:extLst>
+                  <a:ext uri="{FF2B5EF4-FFF2-40B4-BE49-F238E27FC236}">
+                    <a16:creationId xmlns:a16="http://schemas.microsoft.com/office/drawing/2014/main" id="{16F5C030-5D5E-71F9-9246-B4CC61FD3D82}"/>
+                  </a:ext>
+                </a:extLst>
+              </p:cNvPr>
+              <p:cNvSpPr txBox="1"/>
+              <p:nvPr/>
+            </p:nvSpPr>
+            <p:spPr>
+              <a:xfrm>
+                <a:off x="3800217" y="5177274"/>
+                <a:ext cx="2613283" cy="276999"/>
+              </a:xfrm>
+              <a:prstGeom prst="rect">
+                <a:avLst/>
+              </a:prstGeom>
+              <a:noFill/>
+              <a:effectLst>
+                <a:outerShdw blurRad="101600" dir="4140000" algn="tl" rotWithShape="0">
+                  <a:prstClr val="black"/>
+                </a:outerShdw>
+              </a:effectLst>
+            </p:spPr>
+            <p:txBody>
+              <a:bodyPr wrap="square">
+                <a:spAutoFit/>
+              </a:bodyPr>
+              <a:lstStyle/>
+              <a:p>
+                <a:r>
+                  <a:rPr lang="pt-BR" sz="1200" b="1" dirty="0">
+                    <a:solidFill>
+                      <a:schemeClr val="bg1"/>
+                    </a:solidFill>
+                  </a:rPr>
+                  <a:t>HOST CONTROLLER INTERFACE (HCI)</a:t>
+                </a:r>
+              </a:p>
+            </p:txBody>
+          </p:sp>
+        </p:grpSp>
+        <p:sp>
+          <p:nvSpPr>
+            <p:cNvPr id="8" name="CaixaDeTexto 7">
+              <a:extLst>
+                <a:ext uri="{FF2B5EF4-FFF2-40B4-BE49-F238E27FC236}">
+                  <a16:creationId xmlns:a16="http://schemas.microsoft.com/office/drawing/2014/main" id="{A108556F-D7F4-BA5A-E207-A224F6600F83}"/>
+                </a:ext>
+              </a:extLst>
+            </p:cNvPr>
+            <p:cNvSpPr txBox="1"/>
+            <p:nvPr/>
+          </p:nvSpPr>
+          <p:spPr>
+            <a:xfrm>
+              <a:off x="1333847" y="4201427"/>
+              <a:ext cx="3185711" cy="1164015"/>
+            </a:xfrm>
+            <a:prstGeom prst="rect">
+              <a:avLst/>
+            </a:prstGeom>
+            <a:noFill/>
+          </p:spPr>
+          <p:txBody>
+            <a:bodyPr wrap="square">
+              <a:spAutoFit/>
+            </a:bodyPr>
+            <a:lstStyle/>
+            <a:p>
+              <a:r>
+                <a:rPr lang="pt-BR" sz="2400" b="1" dirty="0">
+                  <a:solidFill>
+                    <a:schemeClr val="bg1"/>
+                  </a:solidFill>
+                </a:rPr>
+                <a:t>IEEE 802.15.1 (PAN)</a:t>
+              </a:r>
+            </a:p>
+            <a:p>
+              <a:r>
+                <a:rPr lang="pt-BR" sz="2400" b="1" dirty="0">
+                  <a:solidFill>
+                    <a:schemeClr val="bg1"/>
+                  </a:solidFill>
+                </a:rPr>
+                <a:t>ETSI 07.10 (RFCOMM)</a:t>
+              </a:r>
+            </a:p>
+            <a:p>
+              <a:r>
+                <a:rPr lang="pt-BR" sz="2400" b="1" dirty="0">
+                  <a:solidFill>
+                    <a:schemeClr val="bg1"/>
+                  </a:solidFill>
+                </a:rPr>
+                <a:t>IETF 1621 (PPP)</a:t>
+              </a:r>
+            </a:p>
+          </p:txBody>
+        </p:sp>
+      </p:grpSp>
+    </p:spTree>
+    <p:extLst>
+      <p:ext uri="{BB962C8B-B14F-4D97-AF65-F5344CB8AC3E}">
+        <p14:creationId xmlns:p14="http://schemas.microsoft.com/office/powerpoint/2010/main" val="2123515566"/>
+      </p:ext>
+    </p:extLst>
+  </p:cSld>
+  <p:clrMapOvr>
+    <a:masterClrMapping/>
+  </p:clrMapOvr>
+</p:sld>
+</file>
+
+<file path=ppt/slides/slide16.xml><?xml version="1.0" encoding="utf-8"?>
+<p:sld xmlns:a="http://schemas.openxmlformats.org/drawingml/2006/main" xmlns:r="http://schemas.openxmlformats.org/officeDocument/2006/relationships" xmlns:p="http://schemas.openxmlformats.org/presentationml/2006/main">
+  <p:cSld>
+    <p:bg>
+      <p:bgPr>
+        <a:blipFill dpi="0" rotWithShape="1">
+          <a:blip r:embed="rId2">
+            <a:lum/>
+          </a:blip>
+          <a:srcRect/>
+          <a:stretch>
+            <a:fillRect/>
+          </a:stretch>
+        </a:blipFill>
+        <a:effectLst/>
+      </p:bgPr>
+    </p:bg>
+    <p:spTree>
+      <p:nvGrpSpPr>
+        <p:cNvPr id="1" name="">
+          <a:extLst>
+            <a:ext uri="{FF2B5EF4-FFF2-40B4-BE49-F238E27FC236}">
+              <a16:creationId xmlns:a16="http://schemas.microsoft.com/office/drawing/2014/main" id="{F4569D19-C852-D3BC-C09B-6F072592C425}"/>
+            </a:ext>
+          </a:extLst>
+        </p:cNvPr>
+        <p:cNvGrpSpPr/>
+        <p:nvPr/>
+      </p:nvGrpSpPr>
+      <p:grpSpPr>
+        <a:xfrm>
+          <a:off x="0" y="0"/>
+          <a:ext cx="0" cy="0"/>
+          <a:chOff x="0" y="0"/>
+          <a:chExt cx="0" cy="0"/>
+        </a:xfrm>
+      </p:grpSpPr>
+      <p:sp>
+        <p:nvSpPr>
+          <p:cNvPr id="16" name="Subtítulo 2">
+            <a:extLst>
+              <a:ext uri="{FF2B5EF4-FFF2-40B4-BE49-F238E27FC236}">
+                <a16:creationId xmlns:a16="http://schemas.microsoft.com/office/drawing/2014/main" id="{093A0A14-1F10-B5ED-B35D-567E328147D1}"/>
+              </a:ext>
+            </a:extLst>
+          </p:cNvPr>
+          <p:cNvSpPr>
+            <a:spLocks noGrp="1"/>
+          </p:cNvSpPr>
+          <p:nvPr>
+            <p:ph type="subTitle" idx="1"/>
+          </p:nvPr>
+        </p:nvSpPr>
+        <p:spPr>
+          <a:xfrm>
+            <a:off x="1333847" y="1472802"/>
+            <a:ext cx="9741751" cy="365748"/>
+          </a:xfrm>
+        </p:spPr>
+        <p:txBody>
+          <a:bodyPr>
+            <a:noAutofit/>
+          </a:bodyPr>
+          <a:lstStyle/>
+          <a:p>
+            <a:pPr algn="l"/>
+            <a:r>
+              <a:rPr lang="pt-BR" sz="3200" b="1" dirty="0">
+                <a:solidFill>
+                  <a:schemeClr val="bg1"/>
+                </a:solidFill>
+              </a:rPr>
+              <a:t>BLUETOOTH LOW ENERGY</a:t>
+            </a:r>
+          </a:p>
+        </p:txBody>
+      </p:sp>
+      <p:cxnSp>
+        <p:nvCxnSpPr>
+          <p:cNvPr id="17" name="Google Shape;140;p3">
+            <a:extLst>
+              <a:ext uri="{FF2B5EF4-FFF2-40B4-BE49-F238E27FC236}">
+                <a16:creationId xmlns:a16="http://schemas.microsoft.com/office/drawing/2014/main" id="{99028955-574A-82B7-6A34-2B99E4431B79}"/>
+              </a:ext>
+            </a:extLst>
+          </p:cNvPr>
+          <p:cNvCxnSpPr>
+            <a:cxnSpLocks/>
+          </p:cNvCxnSpPr>
+          <p:nvPr/>
+        </p:nvCxnSpPr>
+        <p:spPr>
+          <a:xfrm>
+            <a:off x="1333847" y="1958269"/>
+            <a:ext cx="9741751" cy="0"/>
+          </a:xfrm>
+          <a:prstGeom prst="straightConnector1">
+            <a:avLst/>
+          </a:prstGeom>
+          <a:noFill/>
+          <a:ln w="57150" cap="flat" cmpd="sng">
+            <a:solidFill>
+              <a:schemeClr val="accent1"/>
+            </a:solidFill>
+            <a:prstDash val="solid"/>
+            <a:miter lim="800000"/>
+            <a:headEnd type="none" w="sm" len="sm"/>
+            <a:tailEnd type="none" w="sm" len="sm"/>
+          </a:ln>
+        </p:spPr>
+      </p:cxnSp>
+      <p:grpSp>
+        <p:nvGrpSpPr>
+          <p:cNvPr id="40" name="Agrupar 39">
+            <a:extLst>
+              <a:ext uri="{FF2B5EF4-FFF2-40B4-BE49-F238E27FC236}">
+                <a16:creationId xmlns:a16="http://schemas.microsoft.com/office/drawing/2014/main" id="{B2635BD2-2971-304F-D57C-AFCC9D88BAB0}"/>
+              </a:ext>
+            </a:extLst>
+          </p:cNvPr>
+          <p:cNvGrpSpPr/>
+          <p:nvPr/>
+        </p:nvGrpSpPr>
+        <p:grpSpPr>
+          <a:xfrm>
+            <a:off x="1333847" y="2698017"/>
+            <a:ext cx="5468124" cy="2687181"/>
+            <a:chOff x="3361938" y="2568170"/>
+            <a:chExt cx="5468124" cy="2687181"/>
+          </a:xfrm>
+        </p:grpSpPr>
+        <p:grpSp>
+          <p:nvGrpSpPr>
+            <p:cNvPr id="37" name="Agrupar 36">
+              <a:extLst>
+                <a:ext uri="{FF2B5EF4-FFF2-40B4-BE49-F238E27FC236}">
+                  <a16:creationId xmlns:a16="http://schemas.microsoft.com/office/drawing/2014/main" id="{EF72F286-C8E9-978D-4F2D-9FC67ED32BEB}"/>
+                </a:ext>
+              </a:extLst>
+            </p:cNvPr>
+            <p:cNvGrpSpPr/>
+            <p:nvPr/>
+          </p:nvGrpSpPr>
+          <p:grpSpPr>
+            <a:xfrm>
+              <a:off x="3361938" y="4650551"/>
+              <a:ext cx="5468124" cy="604800"/>
+              <a:chOff x="1335600" y="3997410"/>
+              <a:chExt cx="5468124" cy="604800"/>
+            </a:xfrm>
+          </p:grpSpPr>
+          <p:sp>
+            <p:nvSpPr>
+              <p:cNvPr id="10" name="CaixaDeTexto 9">
+                <a:extLst>
+                  <a:ext uri="{FF2B5EF4-FFF2-40B4-BE49-F238E27FC236}">
+                    <a16:creationId xmlns:a16="http://schemas.microsoft.com/office/drawing/2014/main" id="{D9A1A143-647A-8655-11AD-6134B9E49CDD}"/>
+                  </a:ext>
+                </a:extLst>
+              </p:cNvPr>
+              <p:cNvSpPr txBox="1"/>
+              <p:nvPr/>
+            </p:nvSpPr>
+            <p:spPr>
+              <a:xfrm>
+                <a:off x="1941437" y="4068978"/>
+                <a:ext cx="4862287" cy="461665"/>
+              </a:xfrm>
+              <a:prstGeom prst="rect">
+                <a:avLst/>
+              </a:prstGeom>
+              <a:noFill/>
+            </p:spPr>
+            <p:txBody>
+              <a:bodyPr wrap="square">
+                <a:spAutoFit/>
+              </a:bodyPr>
+              <a:lstStyle/>
+              <a:p>
+                <a:r>
+                  <a:rPr lang="pt-BR" sz="2400" b="1" dirty="0">
+                    <a:solidFill>
+                      <a:schemeClr val="bg1"/>
+                    </a:solidFill>
+                  </a:rPr>
+                  <a:t>Diferenças com o Bluetooth clássico</a:t>
+                </a:r>
+              </a:p>
+            </p:txBody>
+          </p:sp>
+          <p:pic>
+            <p:nvPicPr>
+              <p:cNvPr id="25" name="Gráfico 24">
+                <a:extLst>
+                  <a:ext uri="{FF2B5EF4-FFF2-40B4-BE49-F238E27FC236}">
+                    <a16:creationId xmlns:a16="http://schemas.microsoft.com/office/drawing/2014/main" id="{CDCA600B-8588-44DE-7D40-ED1CDA19638D}"/>
+                  </a:ext>
+                </a:extLst>
+              </p:cNvPr>
+              <p:cNvPicPr>
+                <a:picLocks noChangeAspect="1"/>
+              </p:cNvPicPr>
+              <p:nvPr/>
+            </p:nvPicPr>
+            <p:blipFill>
+              <a:blip r:embed="rId3">
+                <a:extLst>
+                  <a:ext uri="{96DAC541-7B7A-43D3-8B79-37D633B846F1}">
+                    <asvg:svgBlip xmlns:asvg="http://schemas.microsoft.com/office/drawing/2016/SVG/main" r:embed="rId4"/>
+                  </a:ext>
+                </a:extLst>
+              </a:blip>
+              <a:stretch>
+                <a:fillRect/>
+              </a:stretch>
+            </p:blipFill>
+            <p:spPr>
+              <a:xfrm>
+                <a:off x="1335600" y="3997410"/>
+                <a:ext cx="604800" cy="604800"/>
+              </a:xfrm>
+              <a:prstGeom prst="rect">
+                <a:avLst/>
+              </a:prstGeom>
+            </p:spPr>
+          </p:pic>
+        </p:grpSp>
+        <p:grpSp>
+          <p:nvGrpSpPr>
+            <p:cNvPr id="39" name="Agrupar 38">
+              <a:extLst>
+                <a:ext uri="{FF2B5EF4-FFF2-40B4-BE49-F238E27FC236}">
+                  <a16:creationId xmlns:a16="http://schemas.microsoft.com/office/drawing/2014/main" id="{A21E5CB6-46D5-469E-7653-85C1CF1385E7}"/>
+                </a:ext>
+              </a:extLst>
+            </p:cNvPr>
+            <p:cNvGrpSpPr/>
+            <p:nvPr/>
+          </p:nvGrpSpPr>
+          <p:grpSpPr>
+            <a:xfrm>
+              <a:off x="3361938" y="2568170"/>
+              <a:ext cx="2302971" cy="604800"/>
+              <a:chOff x="1335600" y="2437542"/>
+              <a:chExt cx="2302971" cy="604800"/>
+            </a:xfrm>
+          </p:grpSpPr>
+          <p:sp>
+            <p:nvSpPr>
+              <p:cNvPr id="13" name="CaixaDeTexto 12">
+                <a:extLst>
+                  <a:ext uri="{FF2B5EF4-FFF2-40B4-BE49-F238E27FC236}">
+                    <a16:creationId xmlns:a16="http://schemas.microsoft.com/office/drawing/2014/main" id="{DA2C61F9-E071-9066-3312-20399FB29446}"/>
+                  </a:ext>
+                </a:extLst>
+              </p:cNvPr>
+              <p:cNvSpPr txBox="1"/>
+              <p:nvPr/>
+            </p:nvSpPr>
+            <p:spPr>
+              <a:xfrm>
+                <a:off x="1940400" y="2437542"/>
+                <a:ext cx="1698171" cy="461665"/>
+              </a:xfrm>
+              <a:prstGeom prst="rect">
+                <a:avLst/>
+              </a:prstGeom>
+              <a:noFill/>
+            </p:spPr>
+            <p:txBody>
+              <a:bodyPr wrap="square">
+                <a:spAutoFit/>
+              </a:bodyPr>
+              <a:lstStyle/>
+              <a:p>
+                <a:r>
+                  <a:rPr lang="pt-BR" sz="2400" b="1" dirty="0">
+                    <a:solidFill>
+                      <a:schemeClr val="bg1"/>
+                    </a:solidFill>
+                  </a:rPr>
+                  <a:t>Origem</a:t>
+                </a:r>
+              </a:p>
+            </p:txBody>
+          </p:sp>
+          <p:pic>
+            <p:nvPicPr>
+              <p:cNvPr id="27" name="Gráfico 26">
+                <a:extLst>
+                  <a:ext uri="{FF2B5EF4-FFF2-40B4-BE49-F238E27FC236}">
+                    <a16:creationId xmlns:a16="http://schemas.microsoft.com/office/drawing/2014/main" id="{3C5E7062-BFE5-AAEB-BFF7-B3BDA4BFF40B}"/>
+                  </a:ext>
+                </a:extLst>
+              </p:cNvPr>
+              <p:cNvPicPr>
+                <a:picLocks noChangeAspect="1"/>
+              </p:cNvPicPr>
+              <p:nvPr/>
+            </p:nvPicPr>
+            <p:blipFill>
+              <a:blip r:embed="rId5">
+                <a:extLst>
+                  <a:ext uri="{96DAC541-7B7A-43D3-8B79-37D633B846F1}">
+                    <asvg:svgBlip xmlns:asvg="http://schemas.microsoft.com/office/drawing/2016/SVG/main" r:embed="rId6"/>
+                  </a:ext>
+                </a:extLst>
+              </a:blip>
+              <a:stretch>
+                <a:fillRect/>
+              </a:stretch>
+            </p:blipFill>
+            <p:spPr>
+              <a:xfrm>
+                <a:off x="1335600" y="2437542"/>
+                <a:ext cx="604800" cy="604800"/>
+              </a:xfrm>
+              <a:prstGeom prst="rect">
+                <a:avLst/>
+              </a:prstGeom>
+            </p:spPr>
+          </p:pic>
+        </p:grpSp>
+        <p:grpSp>
+          <p:nvGrpSpPr>
+            <p:cNvPr id="38" name="Agrupar 37">
+              <a:extLst>
+                <a:ext uri="{FF2B5EF4-FFF2-40B4-BE49-F238E27FC236}">
+                  <a16:creationId xmlns:a16="http://schemas.microsoft.com/office/drawing/2014/main" id="{9E0F975A-4F6E-10FC-B608-B1572A83DD40}"/>
+                </a:ext>
+              </a:extLst>
+            </p:cNvPr>
+            <p:cNvGrpSpPr/>
+            <p:nvPr/>
+          </p:nvGrpSpPr>
+          <p:grpSpPr>
+            <a:xfrm>
+              <a:off x="3361938" y="3609360"/>
+              <a:ext cx="2302971" cy="604800"/>
+              <a:chOff x="1335600" y="3257911"/>
+              <a:chExt cx="2302971" cy="604800"/>
+            </a:xfrm>
+          </p:grpSpPr>
+          <p:sp>
+            <p:nvSpPr>
+              <p:cNvPr id="8" name="CaixaDeTexto 7">
+                <a:extLst>
+                  <a:ext uri="{FF2B5EF4-FFF2-40B4-BE49-F238E27FC236}">
+                    <a16:creationId xmlns:a16="http://schemas.microsoft.com/office/drawing/2014/main" id="{2733AD23-B077-E2DC-5301-03EDFC3B568D}"/>
+                  </a:ext>
+                </a:extLst>
+              </p:cNvPr>
+              <p:cNvSpPr txBox="1"/>
+              <p:nvPr/>
+            </p:nvSpPr>
+            <p:spPr>
+              <a:xfrm>
+                <a:off x="1940400" y="3329479"/>
+                <a:ext cx="1698171" cy="461665"/>
+              </a:xfrm>
+              <a:prstGeom prst="rect">
+                <a:avLst/>
+              </a:prstGeom>
+              <a:noFill/>
+            </p:spPr>
+            <p:txBody>
+              <a:bodyPr wrap="square">
+                <a:spAutoFit/>
+              </a:bodyPr>
+              <a:lstStyle/>
+              <a:p>
+                <a:r>
+                  <a:rPr lang="pt-BR" sz="2400" b="1" dirty="0">
+                    <a:solidFill>
+                      <a:schemeClr val="bg1"/>
+                    </a:solidFill>
+                  </a:rPr>
+                  <a:t>Proposta</a:t>
+                </a:r>
+              </a:p>
+            </p:txBody>
+          </p:sp>
+          <p:pic>
+            <p:nvPicPr>
+              <p:cNvPr id="29" name="Gráfico 28">
+                <a:extLst>
+                  <a:ext uri="{FF2B5EF4-FFF2-40B4-BE49-F238E27FC236}">
+                    <a16:creationId xmlns:a16="http://schemas.microsoft.com/office/drawing/2014/main" id="{FCF9C8E8-A35A-6FF8-E2CD-0442E715E3A3}"/>
+                  </a:ext>
+                </a:extLst>
+              </p:cNvPr>
+              <p:cNvPicPr>
+                <a:picLocks noChangeAspect="1"/>
+              </p:cNvPicPr>
+              <p:nvPr/>
+            </p:nvPicPr>
+            <p:blipFill>
+              <a:blip r:embed="rId7">
+                <a:extLst>
+                  <a:ext uri="{96DAC541-7B7A-43D3-8B79-37D633B846F1}">
+                    <asvg:svgBlip xmlns:asvg="http://schemas.microsoft.com/office/drawing/2016/SVG/main" r:embed="rId8"/>
+                  </a:ext>
+                </a:extLst>
+              </a:blip>
+              <a:stretch>
+                <a:fillRect/>
+              </a:stretch>
+            </p:blipFill>
+            <p:spPr>
+              <a:xfrm>
+                <a:off x="1335600" y="3257911"/>
+                <a:ext cx="604800" cy="604800"/>
+              </a:xfrm>
+              <a:prstGeom prst="rect">
+                <a:avLst/>
+              </a:prstGeom>
+            </p:spPr>
+          </p:pic>
+        </p:grpSp>
+      </p:grpSp>
+    </p:spTree>
+    <p:extLst>
+      <p:ext uri="{BB962C8B-B14F-4D97-AF65-F5344CB8AC3E}">
+        <p14:creationId xmlns:p14="http://schemas.microsoft.com/office/powerpoint/2010/main" val="2025192628"/>
+      </p:ext>
+    </p:extLst>
+  </p:cSld>
+  <p:clrMapOvr>
+    <a:masterClrMapping/>
+  </p:clrMapOvr>
+</p:sld>
+</file>
+
+<file path=ppt/slides/slide17.xml><?xml version="1.0" encoding="utf-8"?>
+<p:sld xmlns:a="http://schemas.openxmlformats.org/drawingml/2006/main" xmlns:r="http://schemas.openxmlformats.org/officeDocument/2006/relationships" xmlns:p="http://schemas.openxmlformats.org/presentationml/2006/main">
+  <p:cSld>
+    <p:bg>
+      <p:bgPr>
+        <a:blipFill dpi="0" rotWithShape="1">
+          <a:blip r:embed="rId2">
+            <a:lum/>
+          </a:blip>
+          <a:srcRect/>
+          <a:stretch>
+            <a:fillRect/>
+          </a:stretch>
+        </a:blipFill>
+        <a:effectLst/>
+      </p:bgPr>
+    </p:bg>
+    <p:spTree>
+      <p:nvGrpSpPr>
+        <p:cNvPr id="1" name="">
+          <a:extLst>
+            <a:ext uri="{FF2B5EF4-FFF2-40B4-BE49-F238E27FC236}">
+              <a16:creationId xmlns:a16="http://schemas.microsoft.com/office/drawing/2014/main" id="{DDFEA824-1328-EDCA-B478-9D9CC469442A}"/>
+            </a:ext>
+          </a:extLst>
+        </p:cNvPr>
+        <p:cNvGrpSpPr/>
+        <p:nvPr/>
+      </p:nvGrpSpPr>
+      <p:grpSpPr>
+        <a:xfrm>
+          <a:off x="0" y="0"/>
+          <a:ext cx="0" cy="0"/>
+          <a:chOff x="0" y="0"/>
+          <a:chExt cx="0" cy="0"/>
+        </a:xfrm>
+      </p:grpSpPr>
+      <p:sp>
+        <p:nvSpPr>
+          <p:cNvPr id="16" name="Subtítulo 2">
+            <a:extLst>
+              <a:ext uri="{FF2B5EF4-FFF2-40B4-BE49-F238E27FC236}">
+                <a16:creationId xmlns:a16="http://schemas.microsoft.com/office/drawing/2014/main" id="{1BB6C190-26F2-D7E7-F35A-9BC5DD44E262}"/>
+              </a:ext>
+            </a:extLst>
+          </p:cNvPr>
+          <p:cNvSpPr>
+            <a:spLocks noGrp="1"/>
+          </p:cNvSpPr>
+          <p:nvPr>
+            <p:ph type="subTitle" idx="1"/>
+          </p:nvPr>
+        </p:nvSpPr>
+        <p:spPr>
+          <a:xfrm>
+            <a:off x="1333847" y="1472802"/>
+            <a:ext cx="9741751" cy="365748"/>
+          </a:xfrm>
+        </p:spPr>
+        <p:txBody>
+          <a:bodyPr>
+            <a:noAutofit/>
+          </a:bodyPr>
+          <a:lstStyle/>
+          <a:p>
+            <a:pPr algn="l"/>
+            <a:r>
+              <a:rPr lang="pt-BR" sz="3200" b="1" dirty="0">
+                <a:solidFill>
+                  <a:schemeClr val="bg1"/>
+                </a:solidFill>
+              </a:rPr>
+              <a:t>BLUETOOTH LOW ENERGY</a:t>
+            </a:r>
+          </a:p>
+        </p:txBody>
+      </p:sp>
+      <p:cxnSp>
+        <p:nvCxnSpPr>
+          <p:cNvPr id="17" name="Google Shape;140;p3">
+            <a:extLst>
+              <a:ext uri="{FF2B5EF4-FFF2-40B4-BE49-F238E27FC236}">
+                <a16:creationId xmlns:a16="http://schemas.microsoft.com/office/drawing/2014/main" id="{2F15AA2B-0E4F-4DE4-BC74-761419E88596}"/>
+              </a:ext>
+            </a:extLst>
+          </p:cNvPr>
+          <p:cNvCxnSpPr>
+            <a:cxnSpLocks/>
+          </p:cNvCxnSpPr>
+          <p:nvPr/>
+        </p:nvCxnSpPr>
+        <p:spPr>
+          <a:xfrm>
+            <a:off x="1333847" y="1958269"/>
+            <a:ext cx="9741751" cy="0"/>
+          </a:xfrm>
+          <a:prstGeom prst="straightConnector1">
+            <a:avLst/>
+          </a:prstGeom>
+          <a:noFill/>
+          <a:ln w="57150" cap="flat" cmpd="sng">
+            <a:solidFill>
+              <a:schemeClr val="accent1"/>
+            </a:solidFill>
+            <a:prstDash val="solid"/>
+            <a:miter lim="800000"/>
+            <a:headEnd type="none" w="sm" len="sm"/>
+            <a:tailEnd type="none" w="sm" len="sm"/>
+          </a:ln>
+        </p:spPr>
+      </p:cxnSp>
+      <p:grpSp>
+        <p:nvGrpSpPr>
+          <p:cNvPr id="2" name="Agrupar 1">
+            <a:extLst>
+              <a:ext uri="{FF2B5EF4-FFF2-40B4-BE49-F238E27FC236}">
+                <a16:creationId xmlns:a16="http://schemas.microsoft.com/office/drawing/2014/main" id="{A29D1C03-9766-E923-AB7F-21C93AD63F3D}"/>
+              </a:ext>
+            </a:extLst>
+          </p:cNvPr>
+          <p:cNvGrpSpPr/>
+          <p:nvPr/>
+        </p:nvGrpSpPr>
+        <p:grpSpPr>
+          <a:xfrm>
+            <a:off x="1333847" y="2559975"/>
+            <a:ext cx="7556593" cy="2686385"/>
+            <a:chOff x="2685428" y="2852225"/>
+            <a:chExt cx="7556593" cy="2686385"/>
+          </a:xfrm>
+        </p:grpSpPr>
+        <p:sp>
+          <p:nvSpPr>
+            <p:cNvPr id="14" name="CaixaDeTexto 13">
+              <a:extLst>
+                <a:ext uri="{FF2B5EF4-FFF2-40B4-BE49-F238E27FC236}">
+                  <a16:creationId xmlns:a16="http://schemas.microsoft.com/office/drawing/2014/main" id="{D7099E79-578B-C368-B1DD-313E702B582D}"/>
+                </a:ext>
+              </a:extLst>
+            </p:cNvPr>
+            <p:cNvSpPr txBox="1"/>
+            <p:nvPr/>
+          </p:nvSpPr>
+          <p:spPr>
+            <a:xfrm>
+              <a:off x="3290228" y="2967335"/>
+              <a:ext cx="1698171" cy="461665"/>
+            </a:xfrm>
+            <a:prstGeom prst="rect">
+              <a:avLst/>
+            </a:prstGeom>
+            <a:noFill/>
+          </p:spPr>
+          <p:txBody>
+            <a:bodyPr wrap="square">
+              <a:spAutoFit/>
+            </a:bodyPr>
+            <a:lstStyle/>
+            <a:p>
+              <a:r>
+                <a:rPr lang="pt-BR" sz="2400" dirty="0">
+                  <a:solidFill>
+                    <a:schemeClr val="bg1"/>
+                  </a:solidFill>
+                </a:rPr>
+                <a:t>Vantagens</a:t>
+              </a:r>
+            </a:p>
+          </p:txBody>
+        </p:sp>
+        <p:grpSp>
+          <p:nvGrpSpPr>
+            <p:cNvPr id="36" name="Agrupar 35">
+              <a:extLst>
+                <a:ext uri="{FF2B5EF4-FFF2-40B4-BE49-F238E27FC236}">
+                  <a16:creationId xmlns:a16="http://schemas.microsoft.com/office/drawing/2014/main" id="{1AAFA645-D8E4-C73A-D07C-BFB6D601394B}"/>
+                </a:ext>
+              </a:extLst>
+            </p:cNvPr>
+            <p:cNvGrpSpPr/>
+            <p:nvPr/>
+          </p:nvGrpSpPr>
+          <p:grpSpPr>
+            <a:xfrm>
+              <a:off x="4988399" y="3389086"/>
+              <a:ext cx="5253622" cy="604800"/>
+              <a:chOff x="3027353" y="6088845"/>
+              <a:chExt cx="5253622" cy="604800"/>
+            </a:xfrm>
+          </p:grpSpPr>
+          <p:sp>
+            <p:nvSpPr>
+              <p:cNvPr id="15" name="CaixaDeTexto 14">
+                <a:extLst>
+                  <a:ext uri="{FF2B5EF4-FFF2-40B4-BE49-F238E27FC236}">
+                    <a16:creationId xmlns:a16="http://schemas.microsoft.com/office/drawing/2014/main" id="{A9BA61C0-F5C8-F987-1C13-DEBA267E0280}"/>
+                  </a:ext>
+                </a:extLst>
+              </p:cNvPr>
+              <p:cNvSpPr txBox="1"/>
+              <p:nvPr/>
+            </p:nvSpPr>
+            <p:spPr>
+              <a:xfrm>
+                <a:off x="3418689" y="6145184"/>
+                <a:ext cx="4862286" cy="492122"/>
+              </a:xfrm>
+              <a:prstGeom prst="rect">
+                <a:avLst/>
+              </a:prstGeom>
+              <a:noFill/>
+            </p:spPr>
+            <p:txBody>
+              <a:bodyPr wrap="square">
+                <a:spAutoFit/>
+              </a:bodyPr>
+              <a:lstStyle/>
+              <a:p>
+                <a:pPr marL="360000" lvl="0" rtl="0">
+                  <a:lnSpc>
+                    <a:spcPct val="115000"/>
+                  </a:lnSpc>
+                  <a:spcBef>
+                    <a:spcPts val="850"/>
+                  </a:spcBef>
+                  <a:spcAft>
+                    <a:spcPts val="850"/>
+                  </a:spcAft>
+                  <a:buSzPct val="45000"/>
+                </a:pPr>
+                <a:r>
+                  <a:rPr lang="zxx-none" sz="2400" dirty="0">
+                    <a:solidFill>
+                      <a:schemeClr val="bg1"/>
+                    </a:solidFill>
+                  </a:rPr>
+                  <a:t>Consumo de energia</a:t>
+                </a:r>
+              </a:p>
+            </p:txBody>
+          </p:sp>
+          <p:pic>
+            <p:nvPicPr>
+              <p:cNvPr id="23" name="Gráfico 22">
+                <a:extLst>
+                  <a:ext uri="{FF2B5EF4-FFF2-40B4-BE49-F238E27FC236}">
+                    <a16:creationId xmlns:a16="http://schemas.microsoft.com/office/drawing/2014/main" id="{06CF7EB9-A160-F757-6FF3-40DE74953DBE}"/>
+                  </a:ext>
+                </a:extLst>
+              </p:cNvPr>
+              <p:cNvPicPr>
+                <a:picLocks noChangeAspect="1"/>
+              </p:cNvPicPr>
+              <p:nvPr/>
+            </p:nvPicPr>
+            <p:blipFill>
+              <a:blip r:embed="rId3">
+                <a:extLst>
+                  <a:ext uri="{96DAC541-7B7A-43D3-8B79-37D633B846F1}">
+                    <asvg:svgBlip xmlns:asvg="http://schemas.microsoft.com/office/drawing/2016/SVG/main" r:embed="rId4"/>
+                  </a:ext>
+                </a:extLst>
+              </a:blip>
+              <a:stretch>
+                <a:fillRect/>
+              </a:stretch>
+            </p:blipFill>
+            <p:spPr>
+              <a:xfrm>
+                <a:off x="3027353" y="6088845"/>
+                <a:ext cx="604800" cy="604800"/>
+              </a:xfrm>
+              <a:prstGeom prst="rect">
+                <a:avLst/>
+              </a:prstGeom>
+            </p:spPr>
+          </p:pic>
+        </p:grpSp>
+        <p:pic>
+          <p:nvPicPr>
+            <p:cNvPr id="31" name="Gráfico 30">
+              <a:extLst>
+                <a:ext uri="{FF2B5EF4-FFF2-40B4-BE49-F238E27FC236}">
+                  <a16:creationId xmlns:a16="http://schemas.microsoft.com/office/drawing/2014/main" id="{FA5F798B-BE37-354E-EDE4-912B63125E67}"/>
+                </a:ext>
+              </a:extLst>
+            </p:cNvPr>
+            <p:cNvPicPr>
+              <a:picLocks noChangeAspect="1"/>
+            </p:cNvPicPr>
+            <p:nvPr/>
+          </p:nvPicPr>
+          <p:blipFill>
+            <a:blip r:embed="rId5">
+              <a:extLst>
+                <a:ext uri="{96DAC541-7B7A-43D3-8B79-37D633B846F1}">
+                  <asvg:svgBlip xmlns:asvg="http://schemas.microsoft.com/office/drawing/2016/SVG/main" r:embed="rId6"/>
+                </a:ext>
+              </a:extLst>
+            </a:blip>
+            <a:stretch>
+              <a:fillRect/>
+            </a:stretch>
+          </p:blipFill>
+          <p:spPr>
+            <a:xfrm>
+              <a:off x="2685428" y="2852225"/>
+              <a:ext cx="612000" cy="736430"/>
+            </a:xfrm>
+            <a:prstGeom prst="rect">
+              <a:avLst/>
+            </a:prstGeom>
+          </p:spPr>
+        </p:pic>
+        <p:grpSp>
+          <p:nvGrpSpPr>
+            <p:cNvPr id="34" name="Agrupar 33">
+              <a:extLst>
+                <a:ext uri="{FF2B5EF4-FFF2-40B4-BE49-F238E27FC236}">
+                  <a16:creationId xmlns:a16="http://schemas.microsoft.com/office/drawing/2014/main" id="{BD7B80CA-96DA-44F1-4B45-7BECF7325A65}"/>
+                </a:ext>
+              </a:extLst>
+            </p:cNvPr>
+            <p:cNvGrpSpPr/>
+            <p:nvPr/>
+          </p:nvGrpSpPr>
+          <p:grpSpPr>
+            <a:xfrm>
+              <a:off x="5026499" y="4161448"/>
+              <a:ext cx="5202687" cy="604800"/>
+              <a:chOff x="3027353" y="4519731"/>
+              <a:chExt cx="5202687" cy="604800"/>
+            </a:xfrm>
+          </p:grpSpPr>
+          <p:pic>
+            <p:nvPicPr>
+              <p:cNvPr id="21" name="Gráfico 20">
+                <a:extLst>
+                  <a:ext uri="{FF2B5EF4-FFF2-40B4-BE49-F238E27FC236}">
+                    <a16:creationId xmlns:a16="http://schemas.microsoft.com/office/drawing/2014/main" id="{1A09D39E-571F-D4FF-5422-1E4DFE73F3F6}"/>
+                  </a:ext>
+                </a:extLst>
+              </p:cNvPr>
+              <p:cNvPicPr>
+                <a:picLocks noChangeAspect="1"/>
+              </p:cNvPicPr>
+              <p:nvPr/>
+            </p:nvPicPr>
+            <p:blipFill>
+              <a:blip r:embed="rId7">
+                <a:extLst>
+                  <a:ext uri="{96DAC541-7B7A-43D3-8B79-37D633B846F1}">
+                    <asvg:svgBlip xmlns:asvg="http://schemas.microsoft.com/office/drawing/2016/SVG/main" r:embed="rId8"/>
+                  </a:ext>
+                </a:extLst>
+              </a:blip>
+              <a:stretch>
+                <a:fillRect/>
+              </a:stretch>
+            </p:blipFill>
+            <p:spPr>
+              <a:xfrm>
+                <a:off x="3027353" y="4519731"/>
+                <a:ext cx="604800" cy="604800"/>
+              </a:xfrm>
+              <a:prstGeom prst="rect">
+                <a:avLst/>
+              </a:prstGeom>
+            </p:spPr>
+          </p:pic>
+          <p:sp>
+            <p:nvSpPr>
+              <p:cNvPr id="32" name="CaixaDeTexto 31">
+                <a:extLst>
+                  <a:ext uri="{FF2B5EF4-FFF2-40B4-BE49-F238E27FC236}">
+                    <a16:creationId xmlns:a16="http://schemas.microsoft.com/office/drawing/2014/main" id="{0EE3753F-C86A-31A4-54B7-F6D8CC63C13A}"/>
+                  </a:ext>
+                </a:extLst>
+              </p:cNvPr>
+              <p:cNvSpPr txBox="1"/>
+              <p:nvPr/>
+            </p:nvSpPr>
+            <p:spPr>
+              <a:xfrm>
+                <a:off x="3367754" y="4576070"/>
+                <a:ext cx="4862286" cy="492122"/>
+              </a:xfrm>
+              <a:prstGeom prst="rect">
+                <a:avLst/>
+              </a:prstGeom>
+              <a:noFill/>
+            </p:spPr>
+            <p:txBody>
+              <a:bodyPr wrap="square">
+                <a:spAutoFit/>
+              </a:bodyPr>
+              <a:lstStyle/>
+              <a:p>
+                <a:pPr marL="360000" lvl="0" rtl="0">
+                  <a:lnSpc>
+                    <a:spcPct val="115000"/>
+                  </a:lnSpc>
+                  <a:spcBef>
+                    <a:spcPts val="850"/>
+                  </a:spcBef>
+                  <a:spcAft>
+                    <a:spcPts val="850"/>
+                  </a:spcAft>
+                  <a:buSzPct val="45000"/>
+                </a:pPr>
+                <a:r>
+                  <a:rPr lang="zxx-none" sz="2400" dirty="0">
+                    <a:solidFill>
+                      <a:schemeClr val="bg1"/>
+                    </a:solidFill>
+                  </a:rPr>
+                  <a:t>Velocidade de conexã</a:t>
+                </a:r>
+                <a:r>
+                  <a:rPr lang="pt-BR" sz="2400" dirty="0">
+                    <a:solidFill>
+                      <a:schemeClr val="bg1"/>
+                    </a:solidFill>
+                  </a:rPr>
+                  <a:t>o</a:t>
+                </a:r>
+                <a:endParaRPr lang="zxx-none" sz="2400" dirty="0">
+                  <a:solidFill>
+                    <a:schemeClr val="bg1"/>
+                  </a:solidFill>
+                </a:endParaRPr>
+              </a:p>
+            </p:txBody>
+          </p:sp>
+        </p:grpSp>
+        <p:grpSp>
+          <p:nvGrpSpPr>
+            <p:cNvPr id="35" name="Agrupar 34">
+              <a:extLst>
+                <a:ext uri="{FF2B5EF4-FFF2-40B4-BE49-F238E27FC236}">
+                  <a16:creationId xmlns:a16="http://schemas.microsoft.com/office/drawing/2014/main" id="{5358AF37-48A6-AE45-81AA-D7A74570079A}"/>
+                </a:ext>
+              </a:extLst>
+            </p:cNvPr>
+            <p:cNvGrpSpPr/>
+            <p:nvPr/>
+          </p:nvGrpSpPr>
+          <p:grpSpPr>
+            <a:xfrm>
+              <a:off x="5026499" y="4933810"/>
+              <a:ext cx="5202687" cy="604800"/>
+              <a:chOff x="3027353" y="5413168"/>
+              <a:chExt cx="5202687" cy="604800"/>
+            </a:xfrm>
+          </p:grpSpPr>
+          <p:pic>
+            <p:nvPicPr>
+              <p:cNvPr id="19" name="Gráfico 18">
+                <a:extLst>
+                  <a:ext uri="{FF2B5EF4-FFF2-40B4-BE49-F238E27FC236}">
+                    <a16:creationId xmlns:a16="http://schemas.microsoft.com/office/drawing/2014/main" id="{86EFB67C-3CCA-B8BC-F8BE-7272606A0905}"/>
+                  </a:ext>
+                </a:extLst>
+              </p:cNvPr>
+              <p:cNvPicPr>
+                <a:picLocks noChangeAspect="1"/>
+              </p:cNvPicPr>
+              <p:nvPr/>
+            </p:nvPicPr>
+            <p:blipFill>
+              <a:blip r:embed="rId9">
+                <a:extLst>
+                  <a:ext uri="{96DAC541-7B7A-43D3-8B79-37D633B846F1}">
+                    <asvg:svgBlip xmlns:asvg="http://schemas.microsoft.com/office/drawing/2016/SVG/main" r:embed="rId10"/>
+                  </a:ext>
+                </a:extLst>
+              </a:blip>
+              <a:stretch>
+                <a:fillRect/>
+              </a:stretch>
+            </p:blipFill>
+            <p:spPr>
+              <a:xfrm>
+                <a:off x="3027353" y="5413168"/>
+                <a:ext cx="604800" cy="604800"/>
+              </a:xfrm>
+              <a:prstGeom prst="rect">
+                <a:avLst/>
+              </a:prstGeom>
+            </p:spPr>
+          </p:pic>
+          <p:sp>
+            <p:nvSpPr>
+              <p:cNvPr id="33" name="CaixaDeTexto 32">
+                <a:extLst>
+                  <a:ext uri="{FF2B5EF4-FFF2-40B4-BE49-F238E27FC236}">
+                    <a16:creationId xmlns:a16="http://schemas.microsoft.com/office/drawing/2014/main" id="{B3712CDB-A209-EDAF-B300-21056AB050F9}"/>
+                  </a:ext>
+                </a:extLst>
+              </p:cNvPr>
+              <p:cNvSpPr txBox="1"/>
+              <p:nvPr/>
+            </p:nvSpPr>
+            <p:spPr>
+              <a:xfrm>
+                <a:off x="3367754" y="5469507"/>
+                <a:ext cx="4862286" cy="492122"/>
+              </a:xfrm>
+              <a:prstGeom prst="rect">
+                <a:avLst/>
+              </a:prstGeom>
+              <a:noFill/>
+            </p:spPr>
+            <p:txBody>
+              <a:bodyPr wrap="square">
+                <a:spAutoFit/>
+              </a:bodyPr>
+              <a:lstStyle/>
+              <a:p>
+                <a:pPr marL="360000" lvl="0" rtl="0">
+                  <a:lnSpc>
+                    <a:spcPct val="115000"/>
+                  </a:lnSpc>
+                  <a:spcBef>
+                    <a:spcPts val="850"/>
+                  </a:spcBef>
+                  <a:spcAft>
+                    <a:spcPts val="850"/>
+                  </a:spcAft>
+                  <a:buSzPct val="45000"/>
+                </a:pPr>
+                <a:r>
+                  <a:rPr lang="zxx-none" sz="2400" dirty="0">
+                    <a:solidFill>
+                      <a:schemeClr val="bg1"/>
+                    </a:solidFill>
+                  </a:rPr>
+                  <a:t>Maior número de participantes</a:t>
+                </a:r>
+              </a:p>
+            </p:txBody>
+          </p:sp>
+        </p:grpSp>
+      </p:grpSp>
+    </p:spTree>
+    <p:extLst>
+      <p:ext uri="{BB962C8B-B14F-4D97-AF65-F5344CB8AC3E}">
+        <p14:creationId xmlns:p14="http://schemas.microsoft.com/office/powerpoint/2010/main" val="710727645"/>
+      </p:ext>
+    </p:extLst>
+  </p:cSld>
+  <p:clrMapOvr>
+    <a:masterClrMapping/>
+  </p:clrMapOvr>
+</p:sld>
+</file>
+
+<file path=ppt/slides/slide18.xml><?xml version="1.0" encoding="utf-8"?>
+<p:sld xmlns:a="http://schemas.openxmlformats.org/drawingml/2006/main" xmlns:r="http://schemas.openxmlformats.org/officeDocument/2006/relationships" xmlns:p="http://schemas.openxmlformats.org/presentationml/2006/main">
+  <p:cSld>
+    <p:bg>
+      <p:bgPr>
+        <a:blipFill dpi="0" rotWithShape="1">
+          <a:blip r:embed="rId2">
+            <a:lum/>
+          </a:blip>
+          <a:srcRect/>
+          <a:stretch>
+            <a:fillRect/>
+          </a:stretch>
+        </a:blipFill>
+        <a:effectLst/>
+      </p:bgPr>
+    </p:bg>
+    <p:spTree>
+      <p:nvGrpSpPr>
+        <p:cNvPr id="1" name="">
+          <a:extLst>
+            <a:ext uri="{FF2B5EF4-FFF2-40B4-BE49-F238E27FC236}">
+              <a16:creationId xmlns:a16="http://schemas.microsoft.com/office/drawing/2014/main" id="{CB722924-E4CD-F1EA-D899-7268C9A4D539}"/>
+            </a:ext>
+          </a:extLst>
+        </p:cNvPr>
+        <p:cNvGrpSpPr/>
+        <p:nvPr/>
+      </p:nvGrpSpPr>
+      <p:grpSpPr>
+        <a:xfrm>
+          <a:off x="0" y="0"/>
+          <a:ext cx="0" cy="0"/>
+          <a:chOff x="0" y="0"/>
+          <a:chExt cx="0" cy="0"/>
+        </a:xfrm>
+      </p:grpSpPr>
+      <p:sp>
+        <p:nvSpPr>
+          <p:cNvPr id="16" name="Subtítulo 2">
+            <a:extLst>
+              <a:ext uri="{FF2B5EF4-FFF2-40B4-BE49-F238E27FC236}">
+                <a16:creationId xmlns:a16="http://schemas.microsoft.com/office/drawing/2014/main" id="{2DFFAFCE-8519-038A-5CE8-A1CAA69F47A1}"/>
+              </a:ext>
+            </a:extLst>
+          </p:cNvPr>
+          <p:cNvSpPr>
+            <a:spLocks noGrp="1"/>
+          </p:cNvSpPr>
+          <p:nvPr>
+            <p:ph type="subTitle" idx="1"/>
+          </p:nvPr>
+        </p:nvSpPr>
+        <p:spPr>
+          <a:xfrm>
+            <a:off x="1333847" y="1007856"/>
+            <a:ext cx="9741751" cy="365748"/>
+          </a:xfrm>
+        </p:spPr>
+        <p:txBody>
+          <a:bodyPr>
+            <a:noAutofit/>
+          </a:bodyPr>
+          <a:lstStyle/>
+          <a:p>
+            <a:pPr algn="l"/>
+            <a:r>
+              <a:rPr lang="pt-BR" sz="3200" b="1" dirty="0">
+                <a:solidFill>
+                  <a:schemeClr val="bg1"/>
+                </a:solidFill>
+              </a:rPr>
+              <a:t>BLUETOOTH LOW ENERGY</a:t>
+            </a:r>
+          </a:p>
+        </p:txBody>
+      </p:sp>
+      <p:cxnSp>
+        <p:nvCxnSpPr>
+          <p:cNvPr id="17" name="Google Shape;140;p3">
+            <a:extLst>
+              <a:ext uri="{FF2B5EF4-FFF2-40B4-BE49-F238E27FC236}">
+                <a16:creationId xmlns:a16="http://schemas.microsoft.com/office/drawing/2014/main" id="{9BCFCDB4-1B34-25FB-C0EB-4697D65529A1}"/>
+              </a:ext>
+            </a:extLst>
+          </p:cNvPr>
+          <p:cNvCxnSpPr>
+            <a:cxnSpLocks/>
+          </p:cNvCxnSpPr>
+          <p:nvPr/>
+        </p:nvCxnSpPr>
+        <p:spPr>
+          <a:xfrm>
+            <a:off x="1333847" y="1493323"/>
+            <a:ext cx="9741751" cy="0"/>
+          </a:xfrm>
+          <a:prstGeom prst="straightConnector1">
+            <a:avLst/>
+          </a:prstGeom>
+          <a:noFill/>
+          <a:ln w="57150" cap="flat" cmpd="sng">
+            <a:solidFill>
+              <a:schemeClr val="accent1"/>
+            </a:solidFill>
+            <a:prstDash val="solid"/>
+            <a:miter lim="800000"/>
+            <a:headEnd type="none" w="sm" len="sm"/>
+            <a:tailEnd type="none" w="sm" len="sm"/>
+          </a:ln>
+        </p:spPr>
+      </p:cxnSp>
+      <p:grpSp>
+        <p:nvGrpSpPr>
+          <p:cNvPr id="38" name="Agrupar 37">
+            <a:extLst>
+              <a:ext uri="{FF2B5EF4-FFF2-40B4-BE49-F238E27FC236}">
+                <a16:creationId xmlns:a16="http://schemas.microsoft.com/office/drawing/2014/main" id="{FBA4D89F-3AB9-BEE2-B3FF-BCFA97675801}"/>
+              </a:ext>
+            </a:extLst>
+          </p:cNvPr>
+          <p:cNvGrpSpPr/>
+          <p:nvPr/>
+        </p:nvGrpSpPr>
+        <p:grpSpPr>
+          <a:xfrm>
+            <a:off x="1333847" y="1933099"/>
+            <a:ext cx="6778506" cy="4128598"/>
+            <a:chOff x="2316337" y="2398045"/>
+            <a:chExt cx="6778506" cy="4128598"/>
+          </a:xfrm>
+        </p:grpSpPr>
+        <p:grpSp>
+          <p:nvGrpSpPr>
+            <p:cNvPr id="29" name="Agrupar 28">
+              <a:extLst>
+                <a:ext uri="{FF2B5EF4-FFF2-40B4-BE49-F238E27FC236}">
+                  <a16:creationId xmlns:a16="http://schemas.microsoft.com/office/drawing/2014/main" id="{AF600545-A53A-98EC-053C-7C84FA686B25}"/>
+                </a:ext>
+              </a:extLst>
+            </p:cNvPr>
+            <p:cNvGrpSpPr/>
+            <p:nvPr/>
+          </p:nvGrpSpPr>
+          <p:grpSpPr>
+            <a:xfrm>
+              <a:off x="5421167" y="2978821"/>
+              <a:ext cx="3673676" cy="604800"/>
+              <a:chOff x="5421167" y="2771333"/>
+              <a:chExt cx="3673676" cy="604800"/>
+            </a:xfrm>
+          </p:grpSpPr>
+          <p:sp>
+            <p:nvSpPr>
+              <p:cNvPr id="15" name="CaixaDeTexto 14">
+                <a:extLst>
+                  <a:ext uri="{FF2B5EF4-FFF2-40B4-BE49-F238E27FC236}">
+                    <a16:creationId xmlns:a16="http://schemas.microsoft.com/office/drawing/2014/main" id="{CA9E07CA-88A2-6265-5185-8FFE45702883}"/>
+                  </a:ext>
+                </a:extLst>
+              </p:cNvPr>
+              <p:cNvSpPr txBox="1"/>
+              <p:nvPr/>
+            </p:nvSpPr>
+            <p:spPr>
+              <a:xfrm>
+                <a:off x="5723567" y="2800230"/>
+                <a:ext cx="3371276" cy="492122"/>
+              </a:xfrm>
+              <a:prstGeom prst="rect">
+                <a:avLst/>
+              </a:prstGeom>
+              <a:noFill/>
+            </p:spPr>
+            <p:txBody>
+              <a:bodyPr wrap="square">
+                <a:spAutoFit/>
+              </a:bodyPr>
+              <a:lstStyle/>
+              <a:p>
+                <a:pPr marL="360000" lvl="0" rtl="0">
+                  <a:lnSpc>
+                    <a:spcPct val="115000"/>
+                  </a:lnSpc>
+                  <a:spcBef>
+                    <a:spcPts val="850"/>
+                  </a:spcBef>
+                  <a:spcAft>
+                    <a:spcPts val="850"/>
+                  </a:spcAft>
+                  <a:buSzPct val="45000"/>
+                </a:pPr>
+                <a:r>
+                  <a:rPr lang="pt-BR" sz="2400" dirty="0">
+                    <a:solidFill>
+                      <a:schemeClr val="bg1"/>
+                    </a:solidFill>
+                  </a:rPr>
+                  <a:t>Entre dispositivos BLE</a:t>
+                </a:r>
+                <a:endParaRPr lang="zxx-none" sz="2400" dirty="0">
+                  <a:solidFill>
+                    <a:schemeClr val="bg1"/>
+                  </a:solidFill>
+                </a:endParaRPr>
+              </a:p>
+            </p:txBody>
+          </p:sp>
+          <p:pic>
+            <p:nvPicPr>
+              <p:cNvPr id="6" name="Gráfico 5">
+                <a:extLst>
+                  <a:ext uri="{FF2B5EF4-FFF2-40B4-BE49-F238E27FC236}">
+                    <a16:creationId xmlns:a16="http://schemas.microsoft.com/office/drawing/2014/main" id="{C9F51A75-F5DE-5DFE-DECB-11D6065DD9A0}"/>
+                  </a:ext>
+                </a:extLst>
+              </p:cNvPr>
+              <p:cNvPicPr>
+                <a:picLocks noChangeAspect="1"/>
+              </p:cNvPicPr>
+              <p:nvPr/>
+            </p:nvPicPr>
+            <p:blipFill>
+              <a:blip r:embed="rId3">
+                <a:extLst>
+                  <a:ext uri="{96DAC541-7B7A-43D3-8B79-37D633B846F1}">
+                    <asvg:svgBlip xmlns:asvg="http://schemas.microsoft.com/office/drawing/2016/SVG/main" r:embed="rId4"/>
+                  </a:ext>
+                </a:extLst>
+              </a:blip>
+              <a:stretch>
+                <a:fillRect/>
+              </a:stretch>
+            </p:blipFill>
+            <p:spPr>
+              <a:xfrm>
+                <a:off x="5421167" y="2771333"/>
+                <a:ext cx="604800" cy="604800"/>
+              </a:xfrm>
+              <a:prstGeom prst="rect">
+                <a:avLst/>
+              </a:prstGeom>
+            </p:spPr>
+          </p:pic>
+        </p:grpSp>
+        <p:grpSp>
+          <p:nvGrpSpPr>
+            <p:cNvPr id="37" name="Agrupar 36">
+              <a:extLst>
+                <a:ext uri="{FF2B5EF4-FFF2-40B4-BE49-F238E27FC236}">
+                  <a16:creationId xmlns:a16="http://schemas.microsoft.com/office/drawing/2014/main" id="{97113339-5FBC-276E-C599-0659DC3F05AD}"/>
+                </a:ext>
+              </a:extLst>
+            </p:cNvPr>
+            <p:cNvGrpSpPr/>
+            <p:nvPr/>
+          </p:nvGrpSpPr>
+          <p:grpSpPr>
+            <a:xfrm>
+              <a:off x="5408332" y="4388341"/>
+              <a:ext cx="3673676" cy="604800"/>
+              <a:chOff x="5408332" y="4344954"/>
+              <a:chExt cx="3673676" cy="604800"/>
+            </a:xfrm>
+          </p:grpSpPr>
+          <p:sp>
+            <p:nvSpPr>
+              <p:cNvPr id="33" name="CaixaDeTexto 32">
+                <a:extLst>
+                  <a:ext uri="{FF2B5EF4-FFF2-40B4-BE49-F238E27FC236}">
+                    <a16:creationId xmlns:a16="http://schemas.microsoft.com/office/drawing/2014/main" id="{80F007DD-2F42-FCCB-A8FF-803D4A604E78}"/>
+                  </a:ext>
+                </a:extLst>
+              </p:cNvPr>
+              <p:cNvSpPr txBox="1"/>
+              <p:nvPr/>
+            </p:nvSpPr>
+            <p:spPr>
+              <a:xfrm>
+                <a:off x="5710732" y="4344954"/>
+                <a:ext cx="3371276" cy="492122"/>
+              </a:xfrm>
+              <a:prstGeom prst="rect">
+                <a:avLst/>
+              </a:prstGeom>
+              <a:noFill/>
+            </p:spPr>
+            <p:txBody>
+              <a:bodyPr wrap="square">
+                <a:spAutoFit/>
+              </a:bodyPr>
+              <a:lstStyle/>
+              <a:p>
+                <a:pPr marL="360000" lvl="0" rtl="0">
+                  <a:lnSpc>
+                    <a:spcPct val="115000"/>
+                  </a:lnSpc>
+                  <a:spcBef>
+                    <a:spcPts val="850"/>
+                  </a:spcBef>
+                  <a:spcAft>
+                    <a:spcPts val="850"/>
+                  </a:spcAft>
+                  <a:buSzPct val="45000"/>
+                </a:pPr>
+                <a:r>
+                  <a:rPr lang="pt-BR" sz="2400" dirty="0">
+                    <a:solidFill>
+                      <a:schemeClr val="bg1"/>
+                    </a:solidFill>
+                  </a:rPr>
+                  <a:t>Dual </a:t>
+                </a:r>
+                <a:r>
+                  <a:rPr lang="pt-BR" sz="2400" dirty="0" err="1">
+                    <a:solidFill>
+                      <a:schemeClr val="bg1"/>
+                    </a:solidFill>
+                  </a:rPr>
+                  <a:t>mode</a:t>
+                </a:r>
+                <a:endParaRPr lang="zxx-none" sz="2400" dirty="0">
+                  <a:solidFill>
+                    <a:schemeClr val="bg1"/>
+                  </a:solidFill>
+                </a:endParaRPr>
+              </a:p>
+            </p:txBody>
+          </p:sp>
+          <p:pic>
+            <p:nvPicPr>
+              <p:cNvPr id="8" name="Gráfico 7">
+                <a:extLst>
+                  <a:ext uri="{FF2B5EF4-FFF2-40B4-BE49-F238E27FC236}">
+                    <a16:creationId xmlns:a16="http://schemas.microsoft.com/office/drawing/2014/main" id="{50C05BFA-E3A7-5849-BD8E-F0B630F719A8}"/>
+                  </a:ext>
+                </a:extLst>
+              </p:cNvPr>
+              <p:cNvPicPr>
+                <a:picLocks noChangeAspect="1"/>
+              </p:cNvPicPr>
+              <p:nvPr/>
+            </p:nvPicPr>
+            <p:blipFill>
+              <a:blip r:embed="rId5">
+                <a:extLst>
+                  <a:ext uri="{96DAC541-7B7A-43D3-8B79-37D633B846F1}">
+                    <asvg:svgBlip xmlns:asvg="http://schemas.microsoft.com/office/drawing/2016/SVG/main" r:embed="rId6"/>
+                  </a:ext>
+                </a:extLst>
+              </a:blip>
+              <a:stretch>
+                <a:fillRect/>
+              </a:stretch>
+            </p:blipFill>
+            <p:spPr>
+              <a:xfrm>
+                <a:off x="5408332" y="4344954"/>
+                <a:ext cx="604800" cy="604800"/>
+              </a:xfrm>
+              <a:prstGeom prst="rect">
+                <a:avLst/>
+              </a:prstGeom>
+            </p:spPr>
+          </p:pic>
+        </p:grpSp>
+        <p:grpSp>
+          <p:nvGrpSpPr>
+            <p:cNvPr id="30" name="Agrupar 29">
+              <a:extLst>
+                <a:ext uri="{FF2B5EF4-FFF2-40B4-BE49-F238E27FC236}">
+                  <a16:creationId xmlns:a16="http://schemas.microsoft.com/office/drawing/2014/main" id="{DC7334A4-373C-1096-DF43-0C3A3DC6BE3A}"/>
+                </a:ext>
+              </a:extLst>
+            </p:cNvPr>
+            <p:cNvGrpSpPr/>
+            <p:nvPr/>
+          </p:nvGrpSpPr>
+          <p:grpSpPr>
+            <a:xfrm>
+              <a:off x="5421167" y="3683581"/>
+              <a:ext cx="3660841" cy="604800"/>
+              <a:chOff x="5421167" y="3516253"/>
+              <a:chExt cx="3660841" cy="604800"/>
+            </a:xfrm>
+          </p:grpSpPr>
+          <p:sp>
+            <p:nvSpPr>
+              <p:cNvPr id="32" name="CaixaDeTexto 31">
+                <a:extLst>
+                  <a:ext uri="{FF2B5EF4-FFF2-40B4-BE49-F238E27FC236}">
+                    <a16:creationId xmlns:a16="http://schemas.microsoft.com/office/drawing/2014/main" id="{83FD48D3-FEAA-A4F8-78E3-65D71AB3381B}"/>
+                  </a:ext>
+                </a:extLst>
+              </p:cNvPr>
+              <p:cNvSpPr txBox="1"/>
+              <p:nvPr/>
+            </p:nvSpPr>
+            <p:spPr>
+              <a:xfrm>
+                <a:off x="5710732" y="3572592"/>
+                <a:ext cx="3371276" cy="492122"/>
+              </a:xfrm>
+              <a:prstGeom prst="rect">
+                <a:avLst/>
+              </a:prstGeom>
+              <a:noFill/>
+            </p:spPr>
+            <p:txBody>
+              <a:bodyPr wrap="square">
+                <a:spAutoFit/>
+              </a:bodyPr>
+              <a:lstStyle/>
+              <a:p>
+                <a:pPr marL="360000" lvl="0" rtl="0">
+                  <a:lnSpc>
+                    <a:spcPct val="115000"/>
+                  </a:lnSpc>
+                  <a:spcBef>
+                    <a:spcPts val="850"/>
+                  </a:spcBef>
+                  <a:spcAft>
+                    <a:spcPts val="850"/>
+                  </a:spcAft>
+                  <a:buSzPct val="45000"/>
+                </a:pPr>
+                <a:r>
+                  <a:rPr lang="pt-BR" sz="2400" dirty="0">
+                    <a:solidFill>
+                      <a:schemeClr val="bg1"/>
+                    </a:solidFill>
+                  </a:rPr>
+                  <a:t>Single </a:t>
+                </a:r>
+                <a:r>
+                  <a:rPr lang="pt-BR" sz="2400" dirty="0" err="1">
+                    <a:solidFill>
+                      <a:schemeClr val="bg1"/>
+                    </a:solidFill>
+                  </a:rPr>
+                  <a:t>mode</a:t>
+                </a:r>
+                <a:endParaRPr lang="zxx-none" sz="2400" dirty="0">
+                  <a:solidFill>
+                    <a:schemeClr val="bg1"/>
+                  </a:solidFill>
+                </a:endParaRPr>
+              </a:p>
+            </p:txBody>
+          </p:sp>
+          <p:pic>
+            <p:nvPicPr>
+              <p:cNvPr id="10" name="Gráfico 9">
+                <a:extLst>
+                  <a:ext uri="{FF2B5EF4-FFF2-40B4-BE49-F238E27FC236}">
+                    <a16:creationId xmlns:a16="http://schemas.microsoft.com/office/drawing/2014/main" id="{6194113F-97F8-ACEE-8470-6B7279214BA7}"/>
+                  </a:ext>
+                </a:extLst>
+              </p:cNvPr>
+              <p:cNvPicPr>
+                <a:picLocks noChangeAspect="1"/>
+              </p:cNvPicPr>
+              <p:nvPr/>
+            </p:nvPicPr>
+            <p:blipFill>
+              <a:blip r:embed="rId7">
+                <a:extLst>
+                  <a:ext uri="{96DAC541-7B7A-43D3-8B79-37D633B846F1}">
+                    <asvg:svgBlip xmlns:asvg="http://schemas.microsoft.com/office/drawing/2016/SVG/main" r:embed="rId8"/>
+                  </a:ext>
+                </a:extLst>
+              </a:blip>
+              <a:stretch>
+                <a:fillRect/>
+              </a:stretch>
+            </p:blipFill>
+            <p:spPr>
+              <a:xfrm>
+                <a:off x="5421167" y="3516253"/>
+                <a:ext cx="604800" cy="604800"/>
+              </a:xfrm>
+              <a:prstGeom prst="rect">
+                <a:avLst/>
+              </a:prstGeom>
+            </p:spPr>
+          </p:pic>
+        </p:grpSp>
+        <p:grpSp>
+          <p:nvGrpSpPr>
+            <p:cNvPr id="28" name="Agrupar 27">
+              <a:extLst>
+                <a:ext uri="{FF2B5EF4-FFF2-40B4-BE49-F238E27FC236}">
+                  <a16:creationId xmlns:a16="http://schemas.microsoft.com/office/drawing/2014/main" id="{41E3F5EF-5419-3934-773D-289CC4C61822}"/>
+                </a:ext>
+              </a:extLst>
+            </p:cNvPr>
+            <p:cNvGrpSpPr/>
+            <p:nvPr/>
+          </p:nvGrpSpPr>
+          <p:grpSpPr>
+            <a:xfrm>
+              <a:off x="2319070" y="2398045"/>
+              <a:ext cx="3107906" cy="604800"/>
+              <a:chOff x="2319070" y="2398045"/>
+              <a:chExt cx="3107906" cy="604800"/>
+            </a:xfrm>
+          </p:grpSpPr>
+          <p:sp>
+            <p:nvSpPr>
+              <p:cNvPr id="14" name="CaixaDeTexto 13">
+                <a:extLst>
+                  <a:ext uri="{FF2B5EF4-FFF2-40B4-BE49-F238E27FC236}">
+                    <a16:creationId xmlns:a16="http://schemas.microsoft.com/office/drawing/2014/main" id="{1205FF61-7B1F-E867-4B3E-03A539216E74}"/>
+                  </a:ext>
+                </a:extLst>
+              </p:cNvPr>
+              <p:cNvSpPr txBox="1"/>
+              <p:nvPr/>
+            </p:nvSpPr>
+            <p:spPr>
+              <a:xfrm>
+                <a:off x="2921137" y="2446124"/>
+                <a:ext cx="2505839" cy="461665"/>
+              </a:xfrm>
+              <a:prstGeom prst="rect">
+                <a:avLst/>
+              </a:prstGeom>
+              <a:noFill/>
+            </p:spPr>
+            <p:txBody>
+              <a:bodyPr wrap="square">
+                <a:spAutoFit/>
+              </a:bodyPr>
+              <a:lstStyle/>
+              <a:p>
+                <a:r>
+                  <a:rPr lang="pt-BR" sz="2400" dirty="0">
+                    <a:solidFill>
+                      <a:schemeClr val="bg1"/>
+                    </a:solidFill>
+                  </a:rPr>
+                  <a:t>Compatibilidade</a:t>
+                </a:r>
+              </a:p>
+            </p:txBody>
+          </p:sp>
+          <p:pic>
+            <p:nvPicPr>
+              <p:cNvPr id="12" name="Gráfico 11">
+                <a:extLst>
+                  <a:ext uri="{FF2B5EF4-FFF2-40B4-BE49-F238E27FC236}">
+                    <a16:creationId xmlns:a16="http://schemas.microsoft.com/office/drawing/2014/main" id="{8754970C-5566-54E9-CAA5-464565DEF6FE}"/>
+                  </a:ext>
+                </a:extLst>
+              </p:cNvPr>
+              <p:cNvPicPr>
+                <a:picLocks noChangeAspect="1"/>
+              </p:cNvPicPr>
+              <p:nvPr/>
+            </p:nvPicPr>
+            <p:blipFill>
+              <a:blip r:embed="rId9">
+                <a:extLst>
+                  <a:ext uri="{96DAC541-7B7A-43D3-8B79-37D633B846F1}">
+                    <asvg:svgBlip xmlns:asvg="http://schemas.microsoft.com/office/drawing/2016/SVG/main" r:embed="rId10"/>
+                  </a:ext>
+                </a:extLst>
+              </a:blip>
+              <a:stretch>
+                <a:fillRect/>
+              </a:stretch>
+            </p:blipFill>
+            <p:spPr>
+              <a:xfrm>
+                <a:off x="2319070" y="2398045"/>
+                <a:ext cx="604800" cy="604800"/>
+              </a:xfrm>
+              <a:prstGeom prst="rect">
+                <a:avLst/>
+              </a:prstGeom>
+            </p:spPr>
+          </p:pic>
+        </p:grpSp>
+        <p:grpSp>
+          <p:nvGrpSpPr>
+            <p:cNvPr id="27" name="Agrupar 26">
+              <a:extLst>
+                <a:ext uri="{FF2B5EF4-FFF2-40B4-BE49-F238E27FC236}">
+                  <a16:creationId xmlns:a16="http://schemas.microsoft.com/office/drawing/2014/main" id="{16C3458F-91E3-5D96-1E71-87580E74264E}"/>
+                </a:ext>
+              </a:extLst>
+            </p:cNvPr>
+            <p:cNvGrpSpPr/>
+            <p:nvPr/>
+          </p:nvGrpSpPr>
+          <p:grpSpPr>
+            <a:xfrm>
+              <a:off x="2316337" y="5217085"/>
+              <a:ext cx="3649034" cy="604800"/>
+              <a:chOff x="2316337" y="5657826"/>
+              <a:chExt cx="3649034" cy="604800"/>
+            </a:xfrm>
+          </p:grpSpPr>
+          <p:sp>
+            <p:nvSpPr>
+              <p:cNvPr id="20" name="CaixaDeTexto 19">
+                <a:extLst>
+                  <a:ext uri="{FF2B5EF4-FFF2-40B4-BE49-F238E27FC236}">
+                    <a16:creationId xmlns:a16="http://schemas.microsoft.com/office/drawing/2014/main" id="{FEF562DF-9BF3-6879-D05C-32983DA88879}"/>
+                  </a:ext>
+                </a:extLst>
+              </p:cNvPr>
+              <p:cNvSpPr txBox="1"/>
+              <p:nvPr/>
+            </p:nvSpPr>
+            <p:spPr>
+              <a:xfrm>
+                <a:off x="2921137" y="5729394"/>
+                <a:ext cx="3044234" cy="461665"/>
+              </a:xfrm>
+              <a:prstGeom prst="rect">
+                <a:avLst/>
+              </a:prstGeom>
+              <a:noFill/>
+            </p:spPr>
+            <p:txBody>
+              <a:bodyPr wrap="square">
+                <a:spAutoFit/>
+              </a:bodyPr>
+              <a:lstStyle/>
+              <a:p>
+                <a:r>
+                  <a:rPr lang="pt-BR" sz="2400" dirty="0">
+                    <a:solidFill>
+                      <a:schemeClr val="bg1"/>
+                    </a:solidFill>
+                  </a:rPr>
+                  <a:t>Dinâmica de conexão</a:t>
+                </a:r>
+              </a:p>
+            </p:txBody>
+          </p:sp>
+          <p:pic>
+            <p:nvPicPr>
+              <p:cNvPr id="18" name="Gráfico 17">
+                <a:extLst>
+                  <a:ext uri="{FF2B5EF4-FFF2-40B4-BE49-F238E27FC236}">
+                    <a16:creationId xmlns:a16="http://schemas.microsoft.com/office/drawing/2014/main" id="{DB080262-9C2F-6C77-B2D1-E9F1C0445856}"/>
+                  </a:ext>
+                </a:extLst>
+              </p:cNvPr>
+              <p:cNvPicPr>
+                <a:picLocks noChangeAspect="1"/>
+              </p:cNvPicPr>
+              <p:nvPr/>
+            </p:nvPicPr>
+            <p:blipFill>
+              <a:blip r:embed="rId11">
+                <a:extLst>
+                  <a:ext uri="{96DAC541-7B7A-43D3-8B79-37D633B846F1}">
+                    <asvg:svgBlip xmlns:asvg="http://schemas.microsoft.com/office/drawing/2016/SVG/main" r:embed="rId12"/>
+                  </a:ext>
+                </a:extLst>
+              </a:blip>
+              <a:stretch>
+                <a:fillRect/>
+              </a:stretch>
+            </p:blipFill>
+            <p:spPr>
+              <a:xfrm>
+                <a:off x="2316337" y="5657826"/>
+                <a:ext cx="604800" cy="604800"/>
+              </a:xfrm>
+              <a:prstGeom prst="rect">
+                <a:avLst/>
+              </a:prstGeom>
+            </p:spPr>
+          </p:pic>
+        </p:grpSp>
+        <p:grpSp>
+          <p:nvGrpSpPr>
+            <p:cNvPr id="26" name="Agrupar 25">
+              <a:extLst>
+                <a:ext uri="{FF2B5EF4-FFF2-40B4-BE49-F238E27FC236}">
+                  <a16:creationId xmlns:a16="http://schemas.microsoft.com/office/drawing/2014/main" id="{CC6F5BA0-7061-A823-8614-CEDFBD106E27}"/>
+                </a:ext>
+              </a:extLst>
+            </p:cNvPr>
+            <p:cNvGrpSpPr/>
+            <p:nvPr/>
+          </p:nvGrpSpPr>
+          <p:grpSpPr>
+            <a:xfrm>
+              <a:off x="2316337" y="5921843"/>
+              <a:ext cx="3858458" cy="604800"/>
+              <a:chOff x="2316337" y="6402289"/>
+              <a:chExt cx="3858458" cy="604800"/>
+            </a:xfrm>
+          </p:grpSpPr>
+          <p:sp>
+            <p:nvSpPr>
+              <p:cNvPr id="22" name="CaixaDeTexto 21">
+                <a:extLst>
+                  <a:ext uri="{FF2B5EF4-FFF2-40B4-BE49-F238E27FC236}">
+                    <a16:creationId xmlns:a16="http://schemas.microsoft.com/office/drawing/2014/main" id="{C0360E89-9FD0-2009-B8AB-8ABD3A28651A}"/>
+                  </a:ext>
+                </a:extLst>
+              </p:cNvPr>
+              <p:cNvSpPr txBox="1"/>
+              <p:nvPr/>
+            </p:nvSpPr>
+            <p:spPr>
+              <a:xfrm>
+                <a:off x="2921137" y="6473857"/>
+                <a:ext cx="3253658" cy="461665"/>
+              </a:xfrm>
+              <a:prstGeom prst="rect">
+                <a:avLst/>
+              </a:prstGeom>
+              <a:noFill/>
+            </p:spPr>
+            <p:txBody>
+              <a:bodyPr wrap="square">
+                <a:spAutoFit/>
+              </a:bodyPr>
+              <a:lstStyle/>
+              <a:p>
+                <a:r>
+                  <a:rPr lang="pt-BR" sz="2400" dirty="0">
+                    <a:solidFill>
+                      <a:schemeClr val="bg1"/>
+                    </a:solidFill>
+                  </a:rPr>
+                  <a:t>Exemplos de aplicações</a:t>
+                </a:r>
+              </a:p>
+            </p:txBody>
+          </p:sp>
+          <p:pic>
+            <p:nvPicPr>
+              <p:cNvPr id="25" name="Gráfico 24">
+                <a:extLst>
+                  <a:ext uri="{FF2B5EF4-FFF2-40B4-BE49-F238E27FC236}">
+                    <a16:creationId xmlns:a16="http://schemas.microsoft.com/office/drawing/2014/main" id="{B34E49BA-746A-CE53-477B-2F2FE37B7923}"/>
+                  </a:ext>
+                </a:extLst>
+              </p:cNvPr>
+              <p:cNvPicPr>
+                <a:picLocks noChangeAspect="1"/>
+              </p:cNvPicPr>
+              <p:nvPr/>
+            </p:nvPicPr>
+            <p:blipFill>
+              <a:blip r:embed="rId13">
+                <a:extLst>
+                  <a:ext uri="{96DAC541-7B7A-43D3-8B79-37D633B846F1}">
+                    <asvg:svgBlip xmlns:asvg="http://schemas.microsoft.com/office/drawing/2016/SVG/main" r:embed="rId14"/>
+                  </a:ext>
+                </a:extLst>
+              </a:blip>
+              <a:stretch>
+                <a:fillRect/>
+              </a:stretch>
+            </p:blipFill>
+            <p:spPr>
+              <a:xfrm>
+                <a:off x="2316337" y="6402289"/>
+                <a:ext cx="604800" cy="604800"/>
+              </a:xfrm>
+              <a:prstGeom prst="rect">
+                <a:avLst/>
+              </a:prstGeom>
+            </p:spPr>
+          </p:pic>
+        </p:grpSp>
+      </p:grpSp>
+    </p:spTree>
+    <p:extLst>
+      <p:ext uri="{BB962C8B-B14F-4D97-AF65-F5344CB8AC3E}">
+        <p14:creationId xmlns:p14="http://schemas.microsoft.com/office/powerpoint/2010/main" val="3962416499"/>
+      </p:ext>
+    </p:extLst>
+  </p:cSld>
+  <p:clrMapOvr>
+    <a:masterClrMapping/>
+  </p:clrMapOvr>
+</p:sld>
+</file>
+
+<file path=ppt/slides/slide19.xml><?xml version="1.0" encoding="utf-8"?>
+<p:sld xmlns:a="http://schemas.openxmlformats.org/drawingml/2006/main" xmlns:r="http://schemas.openxmlformats.org/officeDocument/2006/relationships" xmlns:p="http://schemas.openxmlformats.org/presentationml/2006/main">
+  <p:cSld>
+    <p:bg>
+      <p:bgPr>
+        <a:blipFill dpi="0" rotWithShape="1">
+          <a:blip r:embed="rId2">
+            <a:lum/>
+          </a:blip>
+          <a:srcRect/>
+          <a:stretch>
+            <a:fillRect/>
+          </a:stretch>
+        </a:blipFill>
+        <a:effectLst/>
+      </p:bgPr>
+    </p:bg>
+    <p:spTree>
+      <p:nvGrpSpPr>
+        <p:cNvPr id="1" name="">
+          <a:extLst>
+            <a:ext uri="{FF2B5EF4-FFF2-40B4-BE49-F238E27FC236}">
+              <a16:creationId xmlns:a16="http://schemas.microsoft.com/office/drawing/2014/main" id="{1D899F7A-E39A-4B38-B501-A87F9F47AD4E}"/>
+            </a:ext>
+          </a:extLst>
+        </p:cNvPr>
+        <p:cNvGrpSpPr/>
+        <p:nvPr/>
+      </p:nvGrpSpPr>
+      <p:grpSpPr>
+        <a:xfrm>
+          <a:off x="0" y="0"/>
+          <a:ext cx="0" cy="0"/>
+          <a:chOff x="0" y="0"/>
+          <a:chExt cx="0" cy="0"/>
+        </a:xfrm>
+      </p:grpSpPr>
+      <p:sp>
+        <p:nvSpPr>
+          <p:cNvPr id="16" name="Subtítulo 2">
+            <a:extLst>
+              <a:ext uri="{FF2B5EF4-FFF2-40B4-BE49-F238E27FC236}">
+                <a16:creationId xmlns:a16="http://schemas.microsoft.com/office/drawing/2014/main" id="{58AED009-C463-3C03-3FBC-3D71B1D6E4E6}"/>
+              </a:ext>
+            </a:extLst>
+          </p:cNvPr>
+          <p:cNvSpPr>
+            <a:spLocks noGrp="1"/>
+          </p:cNvSpPr>
+          <p:nvPr>
+            <p:ph type="subTitle" idx="1"/>
+          </p:nvPr>
+        </p:nvSpPr>
+        <p:spPr>
+          <a:xfrm>
+            <a:off x="1225125" y="558405"/>
+            <a:ext cx="9850473" cy="365748"/>
+          </a:xfrm>
+        </p:spPr>
+        <p:txBody>
+          <a:bodyPr>
+            <a:noAutofit/>
+          </a:bodyPr>
+          <a:lstStyle/>
+          <a:p>
+            <a:pPr algn="l"/>
+            <a:r>
+              <a:rPr lang="pt-BR" sz="3200" b="1" dirty="0">
+                <a:solidFill>
+                  <a:schemeClr val="bg1"/>
+                </a:solidFill>
+              </a:rPr>
+              <a:t>EXEMPLOS DE APLICAÇÕES </a:t>
+            </a:r>
+          </a:p>
+        </p:txBody>
+      </p:sp>
+      <p:cxnSp>
+        <p:nvCxnSpPr>
+          <p:cNvPr id="17" name="Google Shape;140;p3">
+            <a:extLst>
+              <a:ext uri="{FF2B5EF4-FFF2-40B4-BE49-F238E27FC236}">
+                <a16:creationId xmlns:a16="http://schemas.microsoft.com/office/drawing/2014/main" id="{22BF85B8-76E3-CB7A-4261-1BF0079E97B9}"/>
+              </a:ext>
+            </a:extLst>
+          </p:cNvPr>
+          <p:cNvCxnSpPr>
+            <a:cxnSpLocks/>
+          </p:cNvCxnSpPr>
+          <p:nvPr/>
+        </p:nvCxnSpPr>
+        <p:spPr>
+          <a:xfrm>
+            <a:off x="1225125" y="1043872"/>
+            <a:ext cx="9741751" cy="0"/>
+          </a:xfrm>
+          <a:prstGeom prst="straightConnector1">
+            <a:avLst/>
+          </a:prstGeom>
+          <a:noFill/>
+          <a:ln w="57150" cap="flat" cmpd="sng">
+            <a:solidFill>
+              <a:schemeClr val="accent1"/>
+            </a:solidFill>
+            <a:prstDash val="solid"/>
+            <a:miter lim="800000"/>
+            <a:headEnd type="none" w="sm" len="sm"/>
+            <a:tailEnd type="none" w="sm" len="sm"/>
+          </a:ln>
+        </p:spPr>
+      </p:cxnSp>
+      <p:sp>
+        <p:nvSpPr>
+          <p:cNvPr id="19" name="CaixaDeTexto 18">
+            <a:extLst>
+              <a:ext uri="{FF2B5EF4-FFF2-40B4-BE49-F238E27FC236}">
+                <a16:creationId xmlns:a16="http://schemas.microsoft.com/office/drawing/2014/main" id="{30FC3CD4-BA1B-F0E0-E01B-0770A854885C}"/>
+              </a:ext>
+            </a:extLst>
+          </p:cNvPr>
+          <p:cNvSpPr txBox="1"/>
+          <p:nvPr/>
+        </p:nvSpPr>
+        <p:spPr>
+          <a:xfrm>
+            <a:off x="4653838" y="1340160"/>
+            <a:ext cx="1906619" cy="461665"/>
+          </a:xfrm>
+          <a:prstGeom prst="rect">
+            <a:avLst/>
+          </a:prstGeom>
+          <a:noFill/>
+        </p:spPr>
+        <p:txBody>
+          <a:bodyPr wrap="square">
+            <a:spAutoFit/>
+          </a:bodyPr>
+          <a:lstStyle/>
+          <a:p>
+            <a:r>
+              <a:rPr lang="pt-BR" sz="2400" b="1" dirty="0">
+                <a:solidFill>
+                  <a:schemeClr val="bg1"/>
+                </a:solidFill>
+              </a:rPr>
+              <a:t>Apple </a:t>
+            </a:r>
+            <a:r>
+              <a:rPr lang="pt-BR" sz="2400" b="1" dirty="0" err="1">
+                <a:solidFill>
+                  <a:schemeClr val="bg1"/>
+                </a:solidFill>
+              </a:rPr>
+              <a:t>AirTag</a:t>
+            </a:r>
+            <a:endParaRPr lang="pt-BR" sz="2400" b="1" dirty="0">
+              <a:solidFill>
+                <a:schemeClr val="bg1"/>
+              </a:solidFill>
+            </a:endParaRPr>
+          </a:p>
+        </p:txBody>
+      </p:sp>
+      <p:pic>
+        <p:nvPicPr>
+          <p:cNvPr id="13" name="Imagem 12">
+            <a:extLst>
+              <a:ext uri="{FF2B5EF4-FFF2-40B4-BE49-F238E27FC236}">
+                <a16:creationId xmlns:a16="http://schemas.microsoft.com/office/drawing/2014/main" id="{4147BC22-E0AA-C11B-EB14-7799E3D8816F}"/>
+              </a:ext>
+            </a:extLst>
+          </p:cNvPr>
+          <p:cNvPicPr>
+            <a:picLocks noChangeAspect="1"/>
+          </p:cNvPicPr>
+          <p:nvPr/>
+        </p:nvPicPr>
+        <p:blipFill>
+          <a:blip r:embed="rId3">
+            <a:extLst>
+              <a:ext uri="{28A0092B-C50C-407E-A947-70E740481C1C}">
+                <a14:useLocalDpi xmlns:a14="http://schemas.microsoft.com/office/drawing/2010/main" val="0"/>
+              </a:ext>
+            </a:extLst>
+          </a:blip>
+          <a:stretch>
+            <a:fillRect/>
+          </a:stretch>
+        </p:blipFill>
+        <p:spPr>
+          <a:xfrm>
+            <a:off x="6511554" y="3091551"/>
+            <a:ext cx="4516444" cy="3208044"/>
+          </a:xfrm>
+          <a:prstGeom prst="rect">
+            <a:avLst/>
+          </a:prstGeom>
+        </p:spPr>
+      </p:pic>
+      <p:pic>
+        <p:nvPicPr>
+          <p:cNvPr id="15" name="Imagem 14">
+            <a:extLst>
+              <a:ext uri="{FF2B5EF4-FFF2-40B4-BE49-F238E27FC236}">
+                <a16:creationId xmlns:a16="http://schemas.microsoft.com/office/drawing/2014/main" id="{B54AA7CD-7A0A-276D-A915-63CBEFCD4146}"/>
+              </a:ext>
+            </a:extLst>
+          </p:cNvPr>
+          <p:cNvPicPr>
+            <a:picLocks noChangeAspect="1"/>
+          </p:cNvPicPr>
+          <p:nvPr/>
+        </p:nvPicPr>
+        <p:blipFill>
+          <a:blip r:embed="rId4">
+            <a:extLst>
+              <a:ext uri="{28A0092B-C50C-407E-A947-70E740481C1C}">
+                <a14:useLocalDpi xmlns:a14="http://schemas.microsoft.com/office/drawing/2010/main" val="0"/>
+              </a:ext>
+            </a:extLst>
+          </a:blip>
+          <a:stretch>
+            <a:fillRect/>
+          </a:stretch>
+        </p:blipFill>
+        <p:spPr>
+          <a:xfrm>
+            <a:off x="3496978" y="1832929"/>
+            <a:ext cx="4220338" cy="1893903"/>
+          </a:xfrm>
+          <a:prstGeom prst="rect">
+            <a:avLst/>
+          </a:prstGeom>
+        </p:spPr>
+      </p:pic>
+      <p:pic>
+        <p:nvPicPr>
+          <p:cNvPr id="20" name="Imagem 19">
+            <a:extLst>
+              <a:ext uri="{FF2B5EF4-FFF2-40B4-BE49-F238E27FC236}">
+                <a16:creationId xmlns:a16="http://schemas.microsoft.com/office/drawing/2014/main" id="{D6C89F16-6AF4-7774-0D0D-C0EA45E056F7}"/>
+              </a:ext>
+            </a:extLst>
+          </p:cNvPr>
+          <p:cNvPicPr>
+            <a:picLocks noChangeAspect="1"/>
+          </p:cNvPicPr>
+          <p:nvPr/>
+        </p:nvPicPr>
+        <p:blipFill>
+          <a:blip r:embed="rId5">
+            <a:extLst>
+              <a:ext uri="{28A0092B-C50C-407E-A947-70E740481C1C}">
+                <a14:useLocalDpi xmlns:a14="http://schemas.microsoft.com/office/drawing/2010/main" val="0"/>
+              </a:ext>
+            </a:extLst>
+          </a:blip>
+          <a:stretch>
+            <a:fillRect/>
+          </a:stretch>
+        </p:blipFill>
+        <p:spPr>
+          <a:xfrm>
+            <a:off x="1115382" y="3384852"/>
+            <a:ext cx="4606015" cy="2986958"/>
+          </a:xfrm>
+          <a:prstGeom prst="rect">
+            <a:avLst/>
+          </a:prstGeom>
+        </p:spPr>
+      </p:pic>
+    </p:spTree>
+    <p:extLst>
+      <p:ext uri="{BB962C8B-B14F-4D97-AF65-F5344CB8AC3E}">
+        <p14:creationId xmlns:p14="http://schemas.microsoft.com/office/powerpoint/2010/main" val="1556860948"/>
+      </p:ext>
+    </p:extLst>
+  </p:cSld>
+  <p:clrMapOvr>
+    <a:masterClrMapping/>
+  </p:clrMapOvr>
+</p:sld>
+</file>
+
+<file path=ppt/slides/slide2.xml><?xml version="1.0" encoding="utf-8"?>
+<p:sld xmlns:a="http://schemas.openxmlformats.org/drawingml/2006/main" xmlns:r="http://schemas.openxmlformats.org/officeDocument/2006/relationships" xmlns:p="http://schemas.openxmlformats.org/presentationml/2006/main">
+  <p:cSld>
+    <p:bg>
+      <p:bgPr>
+        <a:blipFill dpi="0" rotWithShape="1">
+          <a:blip r:embed="rId2">
+            <a:lum/>
+          </a:blip>
+          <a:srcRect/>
+          <a:stretch>
+            <a:fillRect t="-9000" b="-9000"/>
+          </a:stretch>
+        </a:blipFill>
+        <a:effectLst/>
+      </p:bgPr>
+    </p:bg>
+    <p:spTree>
+      <p:nvGrpSpPr>
+        <p:cNvPr id="1" name=""/>
+        <p:cNvGrpSpPr/>
+        <p:nvPr/>
+      </p:nvGrpSpPr>
+      <p:grpSpPr>
+        <a:xfrm>
+          <a:off x="0" y="0"/>
+          <a:ext cx="0" cy="0"/>
+          <a:chOff x="0" y="0"/>
+          <a:chExt cx="0" cy="0"/>
+        </a:xfrm>
+      </p:grpSpPr>
+    </p:spTree>
+    <p:extLst>
+      <p:ext uri="{BB962C8B-B14F-4D97-AF65-F5344CB8AC3E}">
+        <p14:creationId xmlns:p14="http://schemas.microsoft.com/office/powerpoint/2010/main" val="2111624773"/>
       </p:ext>
     </p:extLst>
   </p:cSld>
@@ -4414,7 +8512,7 @@
         </p:nvSpPr>
         <p:spPr>
           <a:xfrm>
-            <a:off x="1225124" y="1579087"/>
+            <a:off x="1225124" y="1159987"/>
             <a:ext cx="9741600" cy="365748"/>
           </a:xfrm>
         </p:spPr>
@@ -4452,7 +8550,7 @@
         </p:nvCxnSpPr>
         <p:spPr>
           <a:xfrm>
-            <a:off x="1206074" y="2094443"/>
+            <a:off x="1206074" y="1675343"/>
             <a:ext cx="9741751" cy="0"/>
           </a:xfrm>
           <a:prstGeom prst="straightConnector1">
@@ -4492,7 +8590,7 @@
         </p:blipFill>
         <p:spPr>
           <a:xfrm>
-            <a:off x="5295640" y="2679097"/>
+            <a:off x="5295640" y="2259997"/>
             <a:ext cx="5677421" cy="3215274"/>
           </a:xfrm>
           <a:prstGeom prst="roundRect">
@@ -4542,7 +8640,7 @@
         </p:nvSpPr>
         <p:spPr>
           <a:xfrm>
-            <a:off x="1225124" y="2496223"/>
+            <a:off x="1225124" y="2077123"/>
             <a:ext cx="3842175" cy="1732875"/>
           </a:xfrm>
           <a:prstGeom prst="rect">
@@ -4791,7 +8889,7 @@
         </p:nvSpPr>
         <p:spPr>
           <a:xfrm>
-            <a:off x="1225124" y="4286734"/>
+            <a:off x="1225124" y="3867634"/>
             <a:ext cx="3842175" cy="1732875"/>
           </a:xfrm>
           <a:prstGeom prst="rect">
@@ -5059,8 +9157,8 @@
         </p:nvSpPr>
         <p:spPr>
           <a:xfrm>
-            <a:off x="2008981" y="3196566"/>
-            <a:ext cx="8684292" cy="830997"/>
+            <a:off x="3919742" y="2605429"/>
+            <a:ext cx="5574947" cy="830997"/>
           </a:xfrm>
           <a:prstGeom prst="rect">
             <a:avLst/>
@@ -5079,7 +9177,7 @@
                   <a:schemeClr val="bg1"/>
                 </a:solidFill>
               </a:rPr>
-              <a:t>Bluetooth 4.0 (2010): destaque para o Bluetooth </a:t>
+              <a:t>Bluetooth 4.0: destaque para o Bluetooth </a:t>
             </a:r>
             <a:r>
               <a:rPr lang="pt-BR" sz="2400" b="1" dirty="0" err="1">
@@ -5118,7 +9216,7 @@
         </p:nvSpPr>
         <p:spPr>
           <a:xfrm>
-            <a:off x="1225124" y="1579087"/>
+            <a:off x="1225124" y="1083787"/>
             <a:ext cx="9741600" cy="365748"/>
           </a:xfrm>
         </p:spPr>
@@ -5156,7 +9254,7 @@
         </p:nvCxnSpPr>
         <p:spPr>
           <a:xfrm>
-            <a:off x="1206074" y="2094443"/>
+            <a:off x="1206074" y="1599143"/>
             <a:ext cx="9741751" cy="0"/>
           </a:xfrm>
           <a:prstGeom prst="straightConnector1">
@@ -5174,12 +9272,129 @@
           </a:ln>
         </p:spPr>
       </p:cxnSp>
+      <p:sp>
+        <p:nvSpPr>
+          <p:cNvPr id="80" name="CaixaDeTexto 79">
+            <a:extLst>
+              <a:ext uri="{FF2B5EF4-FFF2-40B4-BE49-F238E27FC236}">
+                <a16:creationId xmlns:a16="http://schemas.microsoft.com/office/drawing/2014/main" id="{7797426B-A308-A261-95D6-5B2C81007DA9}"/>
+              </a:ext>
+            </a:extLst>
+          </p:cNvPr>
+          <p:cNvSpPr txBox="1"/>
+          <p:nvPr/>
+        </p:nvSpPr>
+        <p:spPr>
+          <a:xfrm>
+            <a:off x="1128877" y="1774432"/>
+            <a:ext cx="3851180" cy="830997"/>
+          </a:xfrm>
+          <a:prstGeom prst="rect">
+            <a:avLst/>
+          </a:prstGeom>
+          <a:noFill/>
+        </p:spPr>
+        <p:txBody>
+          <a:bodyPr wrap="square">
+            <a:spAutoFit/>
+          </a:bodyPr>
+          <a:lstStyle/>
+          <a:p>
+            <a:r>
+              <a:rPr lang="pt-BR" sz="2400" b="1" dirty="0">
+                <a:solidFill>
+                  <a:schemeClr val="bg1"/>
+                </a:solidFill>
+              </a:rPr>
+              <a:t>Bluetooth 2.0: introdução do EDR (Enhanced Data Rate);</a:t>
+            </a:r>
+          </a:p>
+        </p:txBody>
+      </p:sp>
+      <p:sp>
+        <p:nvSpPr>
+          <p:cNvPr id="84" name="CaixaDeTexto 83">
+            <a:extLst>
+              <a:ext uri="{FF2B5EF4-FFF2-40B4-BE49-F238E27FC236}">
+                <a16:creationId xmlns:a16="http://schemas.microsoft.com/office/drawing/2014/main" id="{256687FA-0FE1-CCD8-997E-96DCD88DD186}"/>
+              </a:ext>
+            </a:extLst>
+          </p:cNvPr>
+          <p:cNvSpPr txBox="1"/>
+          <p:nvPr/>
+        </p:nvSpPr>
+        <p:spPr>
+          <a:xfrm>
+            <a:off x="3481165" y="4617642"/>
+            <a:ext cx="4880003" cy="830997"/>
+          </a:xfrm>
+          <a:prstGeom prst="rect">
+            <a:avLst/>
+          </a:prstGeom>
+          <a:noFill/>
+        </p:spPr>
+        <p:txBody>
+          <a:bodyPr wrap="square">
+            <a:spAutoFit/>
+          </a:bodyPr>
+          <a:lstStyle/>
+          <a:p>
+            <a:r>
+              <a:rPr lang="pt-BR" sz="2400" b="1" dirty="0">
+                <a:solidFill>
+                  <a:schemeClr val="bg1"/>
+                </a:solidFill>
+              </a:rPr>
+              <a:t>Bluetooth 5.0: melhorias em alcance, velocidade e eficiência energética;</a:t>
+            </a:r>
+          </a:p>
+        </p:txBody>
+      </p:sp>
+      <p:sp>
+        <p:nvSpPr>
+          <p:cNvPr id="86" name="CaixaDeTexto 85">
+            <a:extLst>
+              <a:ext uri="{FF2B5EF4-FFF2-40B4-BE49-F238E27FC236}">
+                <a16:creationId xmlns:a16="http://schemas.microsoft.com/office/drawing/2014/main" id="{F2ECE0B2-CEA5-B9D3-DECA-2A4EB88EA961}"/>
+              </a:ext>
+            </a:extLst>
+          </p:cNvPr>
+          <p:cNvSpPr txBox="1"/>
+          <p:nvPr/>
+        </p:nvSpPr>
+        <p:spPr>
+          <a:xfrm>
+            <a:off x="4900637" y="5508997"/>
+            <a:ext cx="6294416" cy="830997"/>
+          </a:xfrm>
+          <a:prstGeom prst="rect">
+            <a:avLst/>
+          </a:prstGeom>
+          <a:noFill/>
+        </p:spPr>
+        <p:txBody>
+          <a:bodyPr wrap="square">
+            <a:spAutoFit/>
+          </a:bodyPr>
+          <a:lstStyle/>
+          <a:p>
+            <a:r>
+              <a:rPr lang="pt-BR" sz="2400" b="1" dirty="0">
+                <a:solidFill>
+                  <a:schemeClr val="bg1"/>
+                </a:solidFill>
+              </a:rPr>
+              <a:t>Bluetooth 6.0: melhorias em transmissão de áudio e adição de novos serviços de localização.</a:t>
+            </a:r>
+          </a:p>
+        </p:txBody>
+      </p:sp>
       <p:pic>
         <p:nvPicPr>
-          <p:cNvPr id="78" name="Imagem 77">
-            <a:extLst>
-              <a:ext uri="{FF2B5EF4-FFF2-40B4-BE49-F238E27FC236}">
-                <a16:creationId xmlns:a16="http://schemas.microsoft.com/office/drawing/2014/main" id="{3A8B943F-6879-CC5F-9D73-D2886122CCFB}"/>
+          <p:cNvPr id="7" name="Imagem 6">
+            <a:extLst>
+              <a:ext uri="{FF2B5EF4-FFF2-40B4-BE49-F238E27FC236}">
+                <a16:creationId xmlns:a16="http://schemas.microsoft.com/office/drawing/2014/main" id="{E2416E8A-AB2C-0940-068F-307C4442B54A}"/>
               </a:ext>
             </a:extLst>
           </p:cNvPr>
@@ -5196,7 +9411,7 @@
         </p:blipFill>
         <p:spPr>
           <a:xfrm>
-            <a:off x="1280529" y="2472266"/>
+            <a:off x="5070627" y="3533040"/>
             <a:ext cx="457200" cy="457200"/>
           </a:xfrm>
           <a:prstGeom prst="rect">
@@ -5204,51 +9419,12 @@
           </a:prstGeom>
         </p:spPr>
       </p:pic>
-      <p:sp>
-        <p:nvSpPr>
-          <p:cNvPr id="80" name="CaixaDeTexto 79">
-            <a:extLst>
-              <a:ext uri="{FF2B5EF4-FFF2-40B4-BE49-F238E27FC236}">
-                <a16:creationId xmlns:a16="http://schemas.microsoft.com/office/drawing/2014/main" id="{7797426B-A308-A261-95D6-5B2C81007DA9}"/>
-              </a:ext>
-            </a:extLst>
-          </p:cNvPr>
-          <p:cNvSpPr txBox="1"/>
-          <p:nvPr/>
-        </p:nvSpPr>
-        <p:spPr>
-          <a:xfrm>
-            <a:off x="2008981" y="2470034"/>
-            <a:ext cx="8684292" cy="461665"/>
-          </a:xfrm>
-          <a:prstGeom prst="rect">
-            <a:avLst/>
-          </a:prstGeom>
-          <a:noFill/>
-        </p:spPr>
-        <p:txBody>
-          <a:bodyPr wrap="square">
-            <a:spAutoFit/>
-          </a:bodyPr>
-          <a:lstStyle/>
-          <a:p>
-            <a:r>
-              <a:rPr lang="pt-BR" sz="2400" b="1" dirty="0">
-                <a:solidFill>
-                  <a:schemeClr val="bg1"/>
-                </a:solidFill>
-              </a:rPr>
-              <a:t>Bluetooth 2.0 (2004): introdução do EDR (Enhanced Data Rate);</a:t>
-            </a:r>
-          </a:p>
-        </p:txBody>
-      </p:sp>
       <p:pic>
         <p:nvPicPr>
-          <p:cNvPr id="81" name="Imagem 80">
-            <a:extLst>
-              <a:ext uri="{FF2B5EF4-FFF2-40B4-BE49-F238E27FC236}">
-                <a16:creationId xmlns:a16="http://schemas.microsoft.com/office/drawing/2014/main" id="{EAE22958-ACF4-B85A-43D0-A0AD45F5FA8C}"/>
+          <p:cNvPr id="8" name="Imagem 7">
+            <a:extLst>
+              <a:ext uri="{FF2B5EF4-FFF2-40B4-BE49-F238E27FC236}">
+                <a16:creationId xmlns:a16="http://schemas.microsoft.com/office/drawing/2014/main" id="{BE2D42B8-CFBB-D2CE-2526-620E60FE4EC0}"/>
               </a:ext>
             </a:extLst>
           </p:cNvPr>
@@ -5265,7 +9441,7 @@
         </p:blipFill>
         <p:spPr>
           <a:xfrm>
-            <a:off x="1280529" y="3383464"/>
+            <a:off x="6967702" y="3533040"/>
             <a:ext cx="457200" cy="457200"/>
           </a:xfrm>
           <a:prstGeom prst="rect">
@@ -5273,12 +9449,100 @@
           </a:prstGeom>
         </p:spPr>
       </p:pic>
+      <p:cxnSp>
+        <p:nvCxnSpPr>
+          <p:cNvPr id="13" name="Conector de Seta Reta 12">
+            <a:extLst>
+              <a:ext uri="{FF2B5EF4-FFF2-40B4-BE49-F238E27FC236}">
+                <a16:creationId xmlns:a16="http://schemas.microsoft.com/office/drawing/2014/main" id="{0E73309E-B2B1-11FA-D37B-E25F67A0C0FF}"/>
+              </a:ext>
+            </a:extLst>
+          </p:cNvPr>
+          <p:cNvCxnSpPr>
+            <a:cxnSpLocks/>
+          </p:cNvCxnSpPr>
+          <p:nvPr/>
+        </p:nvCxnSpPr>
+        <p:spPr>
+          <a:xfrm>
+            <a:off x="9321673" y="3761640"/>
+            <a:ext cx="1626152" cy="0"/>
+          </a:xfrm>
+          <a:prstGeom prst="straightConnector1">
+            <a:avLst/>
+          </a:prstGeom>
+          <a:ln w="38100">
+            <a:solidFill>
+              <a:srgbClr val="ECECEC"/>
+            </a:solidFill>
+            <a:tailEnd type="triangle"/>
+          </a:ln>
+        </p:spPr>
+        <p:style>
+          <a:lnRef idx="3">
+            <a:schemeClr val="accent1"/>
+          </a:lnRef>
+          <a:fillRef idx="0">
+            <a:schemeClr val="accent1"/>
+          </a:fillRef>
+          <a:effectRef idx="2">
+            <a:schemeClr val="accent1"/>
+          </a:effectRef>
+          <a:fontRef idx="minor">
+            <a:schemeClr val="tx1"/>
+          </a:fontRef>
+        </p:style>
+      </p:cxnSp>
+      <p:cxnSp>
+        <p:nvCxnSpPr>
+          <p:cNvPr id="16" name="Conector reto 15">
+            <a:extLst>
+              <a:ext uri="{FF2B5EF4-FFF2-40B4-BE49-F238E27FC236}">
+                <a16:creationId xmlns:a16="http://schemas.microsoft.com/office/drawing/2014/main" id="{68179AB9-38AF-BCB9-7C4B-A261424CA829}"/>
+              </a:ext>
+            </a:extLst>
+          </p:cNvPr>
+          <p:cNvCxnSpPr>
+            <a:cxnSpLocks/>
+            <a:endCxn id="18" idx="1"/>
+          </p:cNvCxnSpPr>
+          <p:nvPr/>
+        </p:nvCxnSpPr>
+        <p:spPr>
+          <a:xfrm>
+            <a:off x="1619377" y="3761640"/>
+            <a:ext cx="1554175" cy="0"/>
+          </a:xfrm>
+          <a:prstGeom prst="line">
+            <a:avLst/>
+          </a:prstGeom>
+          <a:ln w="38100">
+            <a:solidFill>
+              <a:srgbClr val="DDDDDE"/>
+            </a:solidFill>
+          </a:ln>
+        </p:spPr>
+        <p:style>
+          <a:lnRef idx="1">
+            <a:schemeClr val="accent1"/>
+          </a:lnRef>
+          <a:fillRef idx="0">
+            <a:schemeClr val="accent1"/>
+          </a:fillRef>
+          <a:effectRef idx="0">
+            <a:schemeClr val="accent1"/>
+          </a:effectRef>
+          <a:fontRef idx="minor">
+            <a:schemeClr val="tx1"/>
+          </a:fontRef>
+        </p:style>
+      </p:cxnSp>
       <p:pic>
         <p:nvPicPr>
-          <p:cNvPr id="83" name="Imagem 82">
-            <a:extLst>
-              <a:ext uri="{FF2B5EF4-FFF2-40B4-BE49-F238E27FC236}">
-                <a16:creationId xmlns:a16="http://schemas.microsoft.com/office/drawing/2014/main" id="{2847315E-9936-C5AD-C0B0-91315667DF21}"/>
+          <p:cNvPr id="9" name="Imagem 8">
+            <a:extLst>
+              <a:ext uri="{FF2B5EF4-FFF2-40B4-BE49-F238E27FC236}">
+                <a16:creationId xmlns:a16="http://schemas.microsoft.com/office/drawing/2014/main" id="{1E57F9E6-1281-89BD-E945-F848DA84DFA7}"/>
               </a:ext>
             </a:extLst>
           </p:cNvPr>
@@ -5295,7 +9559,7 @@
         </p:blipFill>
         <p:spPr>
           <a:xfrm>
-            <a:off x="1280529" y="4479328"/>
+            <a:off x="8864777" y="3533040"/>
             <a:ext cx="457200" cy="457200"/>
           </a:xfrm>
           <a:prstGeom prst="rect">
@@ -5303,51 +9567,12 @@
           </a:prstGeom>
         </p:spPr>
       </p:pic>
-      <p:sp>
-        <p:nvSpPr>
-          <p:cNvPr id="84" name="CaixaDeTexto 83">
-            <a:extLst>
-              <a:ext uri="{FF2B5EF4-FFF2-40B4-BE49-F238E27FC236}">
-                <a16:creationId xmlns:a16="http://schemas.microsoft.com/office/drawing/2014/main" id="{256687FA-0FE1-CCD8-997E-96DCD88DD186}"/>
-              </a:ext>
-            </a:extLst>
-          </p:cNvPr>
-          <p:cNvSpPr txBox="1"/>
-          <p:nvPr/>
-        </p:nvSpPr>
-        <p:spPr>
-          <a:xfrm>
-            <a:off x="2008981" y="4292430"/>
-            <a:ext cx="8684292" cy="830997"/>
-          </a:xfrm>
-          <a:prstGeom prst="rect">
-            <a:avLst/>
-          </a:prstGeom>
-          <a:noFill/>
-        </p:spPr>
-        <p:txBody>
-          <a:bodyPr wrap="square">
-            <a:spAutoFit/>
-          </a:bodyPr>
-          <a:lstStyle/>
-          <a:p>
-            <a:r>
-              <a:rPr lang="pt-BR" sz="2400" b="1" dirty="0">
-                <a:solidFill>
-                  <a:schemeClr val="bg1"/>
-                </a:solidFill>
-              </a:rPr>
-              <a:t>Bluetooth 5.0 (2016): melhorias em alcance, velocidade e eficiência energética;</a:t>
-            </a:r>
-          </a:p>
-        </p:txBody>
-      </p:sp>
       <p:pic>
         <p:nvPicPr>
-          <p:cNvPr id="85" name="Imagem 84">
-            <a:extLst>
-              <a:ext uri="{FF2B5EF4-FFF2-40B4-BE49-F238E27FC236}">
-                <a16:creationId xmlns:a16="http://schemas.microsoft.com/office/drawing/2014/main" id="{EA949E1A-59EF-7730-586B-D286DB567BEF}"/>
+          <p:cNvPr id="18" name="Imagem 17">
+            <a:extLst>
+              <a:ext uri="{FF2B5EF4-FFF2-40B4-BE49-F238E27FC236}">
+                <a16:creationId xmlns:a16="http://schemas.microsoft.com/office/drawing/2014/main" id="{9F892CDE-5DFF-7BDB-FB04-9655EDC5B8B6}"/>
               </a:ext>
             </a:extLst>
           </p:cNvPr>
@@ -5364,7 +9589,7 @@
         </p:blipFill>
         <p:spPr>
           <a:xfrm>
-            <a:off x="1280529" y="5575193"/>
+            <a:off x="3173552" y="3533040"/>
             <a:ext cx="457200" cy="457200"/>
           </a:xfrm>
           <a:prstGeom prst="rect">
@@ -5372,12 +9597,182 @@
           </a:prstGeom>
         </p:spPr>
       </p:pic>
+      <p:pic>
+        <p:nvPicPr>
+          <p:cNvPr id="19" name="Gráfico 18">
+            <a:extLst>
+              <a:ext uri="{FF2B5EF4-FFF2-40B4-BE49-F238E27FC236}">
+                <a16:creationId xmlns:a16="http://schemas.microsoft.com/office/drawing/2014/main" id="{BD82C290-D82B-29DA-E71A-A2DB00BD1905}"/>
+              </a:ext>
+            </a:extLst>
+          </p:cNvPr>
+          <p:cNvPicPr>
+            <a:picLocks noChangeAspect="1"/>
+          </p:cNvPicPr>
+          <p:nvPr/>
+        </p:nvPicPr>
+        <p:blipFill>
+          <a:blip r:embed="rId4">
+            <a:extLst>
+              <a:ext uri="{96DAC541-7B7A-43D3-8B79-37D633B846F1}">
+                <asvg:svgBlip xmlns:asvg="http://schemas.microsoft.com/office/drawing/2016/SVG/main" r:embed="rId5"/>
+              </a:ext>
+            </a:extLst>
+          </a:blip>
+          <a:stretch>
+            <a:fillRect/>
+          </a:stretch>
+        </p:blipFill>
+        <p:spPr>
+          <a:xfrm>
+            <a:off x="1128877" y="3459240"/>
+            <a:ext cx="604800" cy="604800"/>
+          </a:xfrm>
+          <a:prstGeom prst="rect">
+            <a:avLst/>
+          </a:prstGeom>
+        </p:spPr>
+      </p:pic>
+      <p:cxnSp>
+        <p:nvCxnSpPr>
+          <p:cNvPr id="21" name="Conector reto 20">
+            <a:extLst>
+              <a:ext uri="{FF2B5EF4-FFF2-40B4-BE49-F238E27FC236}">
+                <a16:creationId xmlns:a16="http://schemas.microsoft.com/office/drawing/2014/main" id="{163884D4-8EB4-7BD7-9DD4-98632572EDDE}"/>
+              </a:ext>
+            </a:extLst>
+          </p:cNvPr>
+          <p:cNvCxnSpPr>
+            <a:cxnSpLocks/>
+            <a:stCxn id="18" idx="3"/>
+            <a:endCxn id="7" idx="1"/>
+          </p:cNvCxnSpPr>
+          <p:nvPr/>
+        </p:nvCxnSpPr>
+        <p:spPr>
+          <a:xfrm>
+            <a:off x="3630752" y="3761640"/>
+            <a:ext cx="1439875" cy="0"/>
+          </a:xfrm>
+          <a:prstGeom prst="line">
+            <a:avLst/>
+          </a:prstGeom>
+          <a:ln w="38100">
+            <a:solidFill>
+              <a:srgbClr val="DDDDDE"/>
+            </a:solidFill>
+          </a:ln>
+        </p:spPr>
+        <p:style>
+          <a:lnRef idx="1">
+            <a:schemeClr val="accent1"/>
+          </a:lnRef>
+          <a:fillRef idx="0">
+            <a:schemeClr val="accent1"/>
+          </a:fillRef>
+          <a:effectRef idx="0">
+            <a:schemeClr val="accent1"/>
+          </a:effectRef>
+          <a:fontRef idx="minor">
+            <a:schemeClr val="tx1"/>
+          </a:fontRef>
+        </p:style>
+      </p:cxnSp>
+      <p:cxnSp>
+        <p:nvCxnSpPr>
+          <p:cNvPr id="22" name="Conector reto 21">
+            <a:extLst>
+              <a:ext uri="{FF2B5EF4-FFF2-40B4-BE49-F238E27FC236}">
+                <a16:creationId xmlns:a16="http://schemas.microsoft.com/office/drawing/2014/main" id="{1B877B8F-A628-B907-7AC0-2EC2D5CF0DD3}"/>
+              </a:ext>
+            </a:extLst>
+          </p:cNvPr>
+          <p:cNvCxnSpPr>
+            <a:cxnSpLocks/>
+            <a:stCxn id="7" idx="3"/>
+            <a:endCxn id="8" idx="1"/>
+          </p:cNvCxnSpPr>
+          <p:nvPr/>
+        </p:nvCxnSpPr>
+        <p:spPr>
+          <a:xfrm>
+            <a:off x="5527827" y="3761640"/>
+            <a:ext cx="1439875" cy="0"/>
+          </a:xfrm>
+          <a:prstGeom prst="line">
+            <a:avLst/>
+          </a:prstGeom>
+          <a:ln w="38100">
+            <a:solidFill>
+              <a:srgbClr val="DDDDDE"/>
+            </a:solidFill>
+          </a:ln>
+        </p:spPr>
+        <p:style>
+          <a:lnRef idx="1">
+            <a:schemeClr val="accent1"/>
+          </a:lnRef>
+          <a:fillRef idx="0">
+            <a:schemeClr val="accent1"/>
+          </a:fillRef>
+          <a:effectRef idx="0">
+            <a:schemeClr val="accent1"/>
+          </a:effectRef>
+          <a:fontRef idx="minor">
+            <a:schemeClr val="tx1"/>
+          </a:fontRef>
+        </p:style>
+      </p:cxnSp>
+      <p:cxnSp>
+        <p:nvCxnSpPr>
+          <p:cNvPr id="23" name="Conector reto 22">
+            <a:extLst>
+              <a:ext uri="{FF2B5EF4-FFF2-40B4-BE49-F238E27FC236}">
+                <a16:creationId xmlns:a16="http://schemas.microsoft.com/office/drawing/2014/main" id="{AD639ACB-8E0F-A5BC-0DF2-3BE740AE3D57}"/>
+              </a:ext>
+            </a:extLst>
+          </p:cNvPr>
+          <p:cNvCxnSpPr>
+            <a:cxnSpLocks/>
+            <a:stCxn id="8" idx="3"/>
+          </p:cNvCxnSpPr>
+          <p:nvPr/>
+        </p:nvCxnSpPr>
+        <p:spPr>
+          <a:xfrm>
+            <a:off x="7424902" y="3761640"/>
+            <a:ext cx="1420367" cy="0"/>
+          </a:xfrm>
+          <a:prstGeom prst="line">
+            <a:avLst/>
+          </a:prstGeom>
+          <a:ln w="38100">
+            <a:solidFill>
+              <a:srgbClr val="DDDDDE"/>
+            </a:solidFill>
+          </a:ln>
+        </p:spPr>
+        <p:style>
+          <a:lnRef idx="1">
+            <a:schemeClr val="accent1"/>
+          </a:lnRef>
+          <a:fillRef idx="0">
+            <a:schemeClr val="accent1"/>
+          </a:fillRef>
+          <a:effectRef idx="0">
+            <a:schemeClr val="accent1"/>
+          </a:effectRef>
+          <a:fontRef idx="minor">
+            <a:schemeClr val="tx1"/>
+          </a:fontRef>
+        </p:style>
+      </p:cxnSp>
       <p:sp>
         <p:nvSpPr>
-          <p:cNvPr id="86" name="CaixaDeTexto 85">
-            <a:extLst>
-              <a:ext uri="{FF2B5EF4-FFF2-40B4-BE49-F238E27FC236}">
-                <a16:creationId xmlns:a16="http://schemas.microsoft.com/office/drawing/2014/main" id="{F2ECE0B2-CEA5-B9D3-DECA-2A4EB88EA961}"/>
+          <p:cNvPr id="29" name="CaixaDeTexto 28">
+            <a:extLst>
+              <a:ext uri="{FF2B5EF4-FFF2-40B4-BE49-F238E27FC236}">
+                <a16:creationId xmlns:a16="http://schemas.microsoft.com/office/drawing/2014/main" id="{2DDCC8A4-A342-8678-A471-1042C582E403}"/>
               </a:ext>
             </a:extLst>
           </p:cNvPr>
@@ -5386,8 +9781,8 @@
         </p:nvSpPr>
         <p:spPr>
           <a:xfrm>
-            <a:off x="2008981" y="5388295"/>
-            <a:ext cx="8684292" cy="830997"/>
+            <a:off x="1038653" y="3941220"/>
+            <a:ext cx="883571" cy="461665"/>
           </a:xfrm>
           <a:prstGeom prst="rect">
             <a:avLst/>
@@ -5406,11 +9801,339 @@
                   <a:schemeClr val="bg1"/>
                 </a:solidFill>
               </a:rPr>
-              <a:t>Bluetooth 6.0 (2024): melhorias em transmissão de áudio e adição de novos serviços de localização.</a:t>
+              <a:t>1994</a:t>
             </a:r>
           </a:p>
         </p:txBody>
       </p:sp>
+      <p:sp>
+        <p:nvSpPr>
+          <p:cNvPr id="30" name="CaixaDeTexto 29">
+            <a:extLst>
+              <a:ext uri="{FF2B5EF4-FFF2-40B4-BE49-F238E27FC236}">
+                <a16:creationId xmlns:a16="http://schemas.microsoft.com/office/drawing/2014/main" id="{C8F69B9F-A686-D026-8EC0-A4CFBFA8820E}"/>
+              </a:ext>
+            </a:extLst>
+          </p:cNvPr>
+          <p:cNvSpPr txBox="1"/>
+          <p:nvPr/>
+        </p:nvSpPr>
+        <p:spPr>
+          <a:xfrm>
+            <a:off x="2987963" y="3941220"/>
+            <a:ext cx="802624" cy="461665"/>
+          </a:xfrm>
+          <a:prstGeom prst="rect">
+            <a:avLst/>
+          </a:prstGeom>
+          <a:noFill/>
+        </p:spPr>
+        <p:txBody>
+          <a:bodyPr wrap="square">
+            <a:spAutoFit/>
+          </a:bodyPr>
+          <a:lstStyle/>
+          <a:p>
+            <a:r>
+              <a:rPr lang="pt-BR" sz="2400" b="1" dirty="0">
+                <a:solidFill>
+                  <a:schemeClr val="bg1"/>
+                </a:solidFill>
+              </a:rPr>
+              <a:t>2004</a:t>
+            </a:r>
+          </a:p>
+        </p:txBody>
+      </p:sp>
+      <p:sp>
+        <p:nvSpPr>
+          <p:cNvPr id="31" name="CaixaDeTexto 30">
+            <a:extLst>
+              <a:ext uri="{FF2B5EF4-FFF2-40B4-BE49-F238E27FC236}">
+                <a16:creationId xmlns:a16="http://schemas.microsoft.com/office/drawing/2014/main" id="{D314E329-A470-7CDD-5703-8930876649D2}"/>
+              </a:ext>
+            </a:extLst>
+          </p:cNvPr>
+          <p:cNvSpPr txBox="1"/>
+          <p:nvPr/>
+        </p:nvSpPr>
+        <p:spPr>
+          <a:xfrm>
+            <a:off x="4900637" y="3941220"/>
+            <a:ext cx="802624" cy="461665"/>
+          </a:xfrm>
+          <a:prstGeom prst="rect">
+            <a:avLst/>
+          </a:prstGeom>
+          <a:noFill/>
+        </p:spPr>
+        <p:txBody>
+          <a:bodyPr wrap="square">
+            <a:spAutoFit/>
+          </a:bodyPr>
+          <a:lstStyle/>
+          <a:p>
+            <a:r>
+              <a:rPr lang="pt-BR" sz="2400" b="1" dirty="0">
+                <a:solidFill>
+                  <a:schemeClr val="bg1"/>
+                </a:solidFill>
+              </a:rPr>
+              <a:t>2010</a:t>
+            </a:r>
+          </a:p>
+        </p:txBody>
+      </p:sp>
+      <p:sp>
+        <p:nvSpPr>
+          <p:cNvPr id="32" name="CaixaDeTexto 31">
+            <a:extLst>
+              <a:ext uri="{FF2B5EF4-FFF2-40B4-BE49-F238E27FC236}">
+                <a16:creationId xmlns:a16="http://schemas.microsoft.com/office/drawing/2014/main" id="{AFE6512C-24B8-4FC2-4A4E-38BA333445AA}"/>
+              </a:ext>
+            </a:extLst>
+          </p:cNvPr>
+          <p:cNvSpPr txBox="1"/>
+          <p:nvPr/>
+        </p:nvSpPr>
+        <p:spPr>
+          <a:xfrm>
+            <a:off x="6781304" y="3941220"/>
+            <a:ext cx="802624" cy="461665"/>
+          </a:xfrm>
+          <a:prstGeom prst="rect">
+            <a:avLst/>
+          </a:prstGeom>
+          <a:noFill/>
+        </p:spPr>
+        <p:txBody>
+          <a:bodyPr wrap="square">
+            <a:spAutoFit/>
+          </a:bodyPr>
+          <a:lstStyle/>
+          <a:p>
+            <a:r>
+              <a:rPr lang="pt-BR" sz="2400" b="1" dirty="0">
+                <a:solidFill>
+                  <a:schemeClr val="bg1"/>
+                </a:solidFill>
+              </a:rPr>
+              <a:t>2016</a:t>
+            </a:r>
+          </a:p>
+        </p:txBody>
+      </p:sp>
+      <p:sp>
+        <p:nvSpPr>
+          <p:cNvPr id="33" name="CaixaDeTexto 32">
+            <a:extLst>
+              <a:ext uri="{FF2B5EF4-FFF2-40B4-BE49-F238E27FC236}">
+                <a16:creationId xmlns:a16="http://schemas.microsoft.com/office/drawing/2014/main" id="{B4788052-C96C-2D85-305E-E4F6539F0898}"/>
+              </a:ext>
+            </a:extLst>
+          </p:cNvPr>
+          <p:cNvSpPr txBox="1"/>
+          <p:nvPr/>
+        </p:nvSpPr>
+        <p:spPr>
+          <a:xfrm>
+            <a:off x="8692065" y="3941220"/>
+            <a:ext cx="802624" cy="461665"/>
+          </a:xfrm>
+          <a:prstGeom prst="rect">
+            <a:avLst/>
+          </a:prstGeom>
+          <a:noFill/>
+        </p:spPr>
+        <p:txBody>
+          <a:bodyPr wrap="square">
+            <a:spAutoFit/>
+          </a:bodyPr>
+          <a:lstStyle/>
+          <a:p>
+            <a:r>
+              <a:rPr lang="pt-BR" sz="2400" b="1" dirty="0">
+                <a:solidFill>
+                  <a:schemeClr val="bg1"/>
+                </a:solidFill>
+              </a:rPr>
+              <a:t>2024</a:t>
+            </a:r>
+          </a:p>
+        </p:txBody>
+      </p:sp>
+      <p:cxnSp>
+        <p:nvCxnSpPr>
+          <p:cNvPr id="39" name="Conector reto 38">
+            <a:extLst>
+              <a:ext uri="{FF2B5EF4-FFF2-40B4-BE49-F238E27FC236}">
+                <a16:creationId xmlns:a16="http://schemas.microsoft.com/office/drawing/2014/main" id="{4F752DB3-614B-DD47-0344-790A72097964}"/>
+              </a:ext>
+            </a:extLst>
+          </p:cNvPr>
+          <p:cNvCxnSpPr>
+            <a:cxnSpLocks/>
+          </p:cNvCxnSpPr>
+          <p:nvPr/>
+        </p:nvCxnSpPr>
+        <p:spPr>
+          <a:xfrm>
+            <a:off x="3402152" y="2495351"/>
+            <a:ext cx="0" cy="1051152"/>
+          </a:xfrm>
+          <a:prstGeom prst="line">
+            <a:avLst/>
+          </a:prstGeom>
+          <a:ln w="38100">
+            <a:solidFill>
+              <a:srgbClr val="DDDDDE"/>
+            </a:solidFill>
+          </a:ln>
+        </p:spPr>
+        <p:style>
+          <a:lnRef idx="1">
+            <a:schemeClr val="accent1"/>
+          </a:lnRef>
+          <a:fillRef idx="0">
+            <a:schemeClr val="accent1"/>
+          </a:fillRef>
+          <a:effectRef idx="0">
+            <a:schemeClr val="accent1"/>
+          </a:effectRef>
+          <a:fontRef idx="minor">
+            <a:schemeClr val="tx1"/>
+          </a:fontRef>
+        </p:style>
+      </p:cxnSp>
+      <p:cxnSp>
+        <p:nvCxnSpPr>
+          <p:cNvPr id="41" name="Conector reto 40">
+            <a:extLst>
+              <a:ext uri="{FF2B5EF4-FFF2-40B4-BE49-F238E27FC236}">
+                <a16:creationId xmlns:a16="http://schemas.microsoft.com/office/drawing/2014/main" id="{FA926377-91C7-8C64-BE54-C30CED8EA793}"/>
+              </a:ext>
+            </a:extLst>
+          </p:cNvPr>
+          <p:cNvCxnSpPr>
+            <a:cxnSpLocks/>
+          </p:cNvCxnSpPr>
+          <p:nvPr/>
+        </p:nvCxnSpPr>
+        <p:spPr>
+          <a:xfrm flipV="1">
+            <a:off x="5299227" y="3355848"/>
+            <a:ext cx="0" cy="190655"/>
+          </a:xfrm>
+          <a:prstGeom prst="line">
+            <a:avLst/>
+          </a:prstGeom>
+          <a:ln w="38100">
+            <a:solidFill>
+              <a:srgbClr val="DDDDDE"/>
+            </a:solidFill>
+          </a:ln>
+        </p:spPr>
+        <p:style>
+          <a:lnRef idx="1">
+            <a:schemeClr val="accent1"/>
+          </a:lnRef>
+          <a:fillRef idx="0">
+            <a:schemeClr val="accent1"/>
+          </a:fillRef>
+          <a:effectRef idx="0">
+            <a:schemeClr val="accent1"/>
+          </a:effectRef>
+          <a:fontRef idx="minor">
+            <a:schemeClr val="tx1"/>
+          </a:fontRef>
+        </p:style>
+      </p:cxnSp>
+      <p:cxnSp>
+        <p:nvCxnSpPr>
+          <p:cNvPr id="44" name="Conector reto 43">
+            <a:extLst>
+              <a:ext uri="{FF2B5EF4-FFF2-40B4-BE49-F238E27FC236}">
+                <a16:creationId xmlns:a16="http://schemas.microsoft.com/office/drawing/2014/main" id="{6B571B6A-B441-666D-1670-193ACBD7DB6D}"/>
+              </a:ext>
+            </a:extLst>
+          </p:cNvPr>
+          <p:cNvCxnSpPr>
+            <a:cxnSpLocks/>
+          </p:cNvCxnSpPr>
+          <p:nvPr/>
+        </p:nvCxnSpPr>
+        <p:spPr>
+          <a:xfrm>
+            <a:off x="7196302" y="4305894"/>
+            <a:ext cx="0" cy="422565"/>
+          </a:xfrm>
+          <a:prstGeom prst="line">
+            <a:avLst/>
+          </a:prstGeom>
+          <a:ln w="38100">
+            <a:solidFill>
+              <a:srgbClr val="DDDDDE"/>
+            </a:solidFill>
+          </a:ln>
+        </p:spPr>
+        <p:style>
+          <a:lnRef idx="1">
+            <a:schemeClr val="accent1"/>
+          </a:lnRef>
+          <a:fillRef idx="0">
+            <a:schemeClr val="accent1"/>
+          </a:fillRef>
+          <a:effectRef idx="0">
+            <a:schemeClr val="accent1"/>
+          </a:effectRef>
+          <a:fontRef idx="minor">
+            <a:schemeClr val="tx1"/>
+          </a:fontRef>
+        </p:style>
+      </p:cxnSp>
+      <p:cxnSp>
+        <p:nvCxnSpPr>
+          <p:cNvPr id="47" name="Conector reto 46">
+            <a:extLst>
+              <a:ext uri="{FF2B5EF4-FFF2-40B4-BE49-F238E27FC236}">
+                <a16:creationId xmlns:a16="http://schemas.microsoft.com/office/drawing/2014/main" id="{00C6D8D4-FC1A-5CCC-1BB0-0276B10864C6}"/>
+              </a:ext>
+            </a:extLst>
+          </p:cNvPr>
+          <p:cNvCxnSpPr>
+            <a:cxnSpLocks/>
+          </p:cNvCxnSpPr>
+          <p:nvPr/>
+        </p:nvCxnSpPr>
+        <p:spPr>
+          <a:xfrm>
+            <a:off x="9093377" y="4305894"/>
+            <a:ext cx="0" cy="1285281"/>
+          </a:xfrm>
+          <a:prstGeom prst="line">
+            <a:avLst/>
+          </a:prstGeom>
+          <a:ln w="38100">
+            <a:solidFill>
+              <a:srgbClr val="DDDDDE"/>
+            </a:solidFill>
+          </a:ln>
+        </p:spPr>
+        <p:style>
+          <a:lnRef idx="1">
+            <a:schemeClr val="accent1"/>
+          </a:lnRef>
+          <a:fillRef idx="0">
+            <a:schemeClr val="accent1"/>
+          </a:fillRef>
+          <a:effectRef idx="0">
+            <a:schemeClr val="accent1"/>
+          </a:effectRef>
+          <a:fontRef idx="minor">
+            <a:schemeClr val="tx1"/>
+          </a:fontRef>
+        </p:style>
+      </p:cxnSp>
     </p:spTree>
     <p:extLst>
       <p:ext uri="{BB962C8B-B14F-4D97-AF65-F5344CB8AC3E}">
@@ -6319,7 +11042,7 @@
         </p:nvSpPr>
         <p:spPr>
           <a:xfrm>
-            <a:off x="1225124" y="1579087"/>
+            <a:off x="1225124" y="1321912"/>
             <a:ext cx="9741600" cy="365748"/>
           </a:xfrm>
           <a:prstGeom prst="rect">
@@ -6523,7 +11246,7 @@
         </p:nvCxnSpPr>
         <p:spPr>
           <a:xfrm>
-            <a:off x="1225124" y="2065867"/>
+            <a:off x="1225124" y="1808692"/>
             <a:ext cx="9741751" cy="0"/>
           </a:xfrm>
           <a:prstGeom prst="straightConnector1">
@@ -6541,452 +11264,902 @@
           </a:ln>
         </p:spPr>
       </p:cxnSp>
-      <p:sp>
-        <p:nvSpPr>
-          <p:cNvPr id="6" name="Subtítulo 5">
-            <a:extLst>
-              <a:ext uri="{FF2B5EF4-FFF2-40B4-BE49-F238E27FC236}">
-                <a16:creationId xmlns:a16="http://schemas.microsoft.com/office/drawing/2014/main" id="{003DB5E6-5C4C-DA81-3DC4-A09BA9163F76}"/>
-              </a:ext>
-            </a:extLst>
-          </p:cNvPr>
-          <p:cNvSpPr>
-            <a:spLocks noGrp="1"/>
-          </p:cNvSpPr>
-          <p:nvPr>
-            <p:ph type="subTitle" idx="1"/>
-          </p:nvPr>
-        </p:nvSpPr>
-        <p:spPr>
-          <a:xfrm>
-            <a:off x="1973942" y="2747397"/>
-            <a:ext cx="8577943" cy="495298"/>
-          </a:xfrm>
-        </p:spPr>
-        <p:txBody>
-          <a:bodyPr/>
-          <a:lstStyle/>
-          <a:p>
-            <a:pPr algn="l"/>
-            <a:r>
-              <a:rPr lang="pt-BR" dirty="0">
-                <a:solidFill>
-                  <a:schemeClr val="bg1"/>
-                </a:solidFill>
-              </a:rPr>
-              <a:t>Fones de ouvido, caixas de som, teclados e mouses sem fio;</a:t>
-            </a:r>
-          </a:p>
-        </p:txBody>
-      </p:sp>
-      <p:sp>
-        <p:nvSpPr>
-          <p:cNvPr id="11" name="Subtítulo 5">
-            <a:extLst>
-              <a:ext uri="{FF2B5EF4-FFF2-40B4-BE49-F238E27FC236}">
-                <a16:creationId xmlns:a16="http://schemas.microsoft.com/office/drawing/2014/main" id="{BAD29CCC-03B4-7016-EBBD-DD79B040F9DB}"/>
-              </a:ext>
-            </a:extLst>
-          </p:cNvPr>
-          <p:cNvSpPr txBox="1">
-            <a:spLocks/>
-          </p:cNvSpPr>
+      <p:grpSp>
+        <p:nvGrpSpPr>
+          <p:cNvPr id="38" name="Agrupar 37">
+            <a:extLst>
+              <a:ext uri="{FF2B5EF4-FFF2-40B4-BE49-F238E27FC236}">
+                <a16:creationId xmlns:a16="http://schemas.microsoft.com/office/drawing/2014/main" id="{E68DBE23-D7F3-1482-96BD-26CB7D0EB006}"/>
+              </a:ext>
+            </a:extLst>
+          </p:cNvPr>
+          <p:cNvGrpSpPr/>
           <p:nvPr/>
-        </p:nvSpPr>
-        <p:spPr>
-          <a:xfrm>
-            <a:off x="1973941" y="3616056"/>
-            <a:ext cx="8577943" cy="495298"/>
-          </a:xfrm>
-          <a:prstGeom prst="rect">
-            <a:avLst/>
-          </a:prstGeom>
-        </p:spPr>
-        <p:txBody>
-          <a:bodyPr vert="horz" lIns="91440" tIns="45720" rIns="91440" bIns="45720" rtlCol="0">
-            <a:normAutofit/>
-          </a:bodyPr>
-          <a:lstStyle>
-            <a:lvl1pPr marL="0" indent="0" algn="ctr" defTabSz="914400" rtl="0" eaLnBrk="1" latinLnBrk="0" hangingPunct="1">
-              <a:lnSpc>
-                <a:spcPct val="90000"/>
-              </a:lnSpc>
-              <a:spcBef>
-                <a:spcPts val="1000"/>
-              </a:spcBef>
-              <a:buFont typeface="Arial" panose="020B0604020202020204" pitchFamily="34" charset="0"/>
-              <a:buNone/>
-              <a:defRPr sz="2400" kern="1200">
-                <a:solidFill>
-                  <a:schemeClr val="tx1"/>
-                </a:solidFill>
-                <a:latin typeface="+mn-lt"/>
-                <a:ea typeface="+mn-ea"/>
-                <a:cs typeface="+mn-cs"/>
-              </a:defRPr>
-            </a:lvl1pPr>
-            <a:lvl2pPr marL="457200" indent="0" algn="ctr" defTabSz="914400" rtl="0" eaLnBrk="1" latinLnBrk="0" hangingPunct="1">
-              <a:lnSpc>
-                <a:spcPct val="90000"/>
-              </a:lnSpc>
-              <a:spcBef>
-                <a:spcPts val="500"/>
-              </a:spcBef>
-              <a:buFont typeface="Arial" panose="020B0604020202020204" pitchFamily="34" charset="0"/>
-              <a:buNone/>
-              <a:defRPr sz="2000" kern="1200">
-                <a:solidFill>
-                  <a:schemeClr val="tx1"/>
-                </a:solidFill>
-                <a:latin typeface="+mn-lt"/>
-                <a:ea typeface="+mn-ea"/>
-                <a:cs typeface="+mn-cs"/>
-              </a:defRPr>
-            </a:lvl2pPr>
-            <a:lvl3pPr marL="914400" indent="0" algn="ctr" defTabSz="914400" rtl="0" eaLnBrk="1" latinLnBrk="0" hangingPunct="1">
-              <a:lnSpc>
-                <a:spcPct val="90000"/>
-              </a:lnSpc>
-              <a:spcBef>
-                <a:spcPts val="500"/>
-              </a:spcBef>
-              <a:buFont typeface="Arial" panose="020B0604020202020204" pitchFamily="34" charset="0"/>
-              <a:buNone/>
-              <a:defRPr sz="1800" kern="1200">
-                <a:solidFill>
-                  <a:schemeClr val="tx1"/>
-                </a:solidFill>
-                <a:latin typeface="+mn-lt"/>
-                <a:ea typeface="+mn-ea"/>
-                <a:cs typeface="+mn-cs"/>
-              </a:defRPr>
-            </a:lvl3pPr>
-            <a:lvl4pPr marL="1371600" indent="0" algn="ctr" defTabSz="914400" rtl="0" eaLnBrk="1" latinLnBrk="0" hangingPunct="1">
-              <a:lnSpc>
-                <a:spcPct val="90000"/>
-              </a:lnSpc>
-              <a:spcBef>
-                <a:spcPts val="500"/>
-              </a:spcBef>
-              <a:buFont typeface="Arial" panose="020B0604020202020204" pitchFamily="34" charset="0"/>
-              <a:buNone/>
-              <a:defRPr sz="1600" kern="1200">
-                <a:solidFill>
-                  <a:schemeClr val="tx1"/>
-                </a:solidFill>
-                <a:latin typeface="+mn-lt"/>
-                <a:ea typeface="+mn-ea"/>
-                <a:cs typeface="+mn-cs"/>
-              </a:defRPr>
-            </a:lvl4pPr>
-            <a:lvl5pPr marL="1828800" indent="0" algn="ctr" defTabSz="914400" rtl="0" eaLnBrk="1" latinLnBrk="0" hangingPunct="1">
-              <a:lnSpc>
-                <a:spcPct val="90000"/>
-              </a:lnSpc>
-              <a:spcBef>
-                <a:spcPts val="500"/>
-              </a:spcBef>
-              <a:buFont typeface="Arial" panose="020B0604020202020204" pitchFamily="34" charset="0"/>
-              <a:buNone/>
-              <a:defRPr sz="1600" kern="1200">
-                <a:solidFill>
-                  <a:schemeClr val="tx1"/>
-                </a:solidFill>
-                <a:latin typeface="+mn-lt"/>
-                <a:ea typeface="+mn-ea"/>
-                <a:cs typeface="+mn-cs"/>
-              </a:defRPr>
-            </a:lvl5pPr>
-            <a:lvl6pPr marL="2286000" indent="0" algn="ctr" defTabSz="914400" rtl="0" eaLnBrk="1" latinLnBrk="0" hangingPunct="1">
-              <a:lnSpc>
-                <a:spcPct val="90000"/>
-              </a:lnSpc>
-              <a:spcBef>
-                <a:spcPts val="500"/>
-              </a:spcBef>
-              <a:buFont typeface="Arial" panose="020B0604020202020204" pitchFamily="34" charset="0"/>
-              <a:buNone/>
-              <a:defRPr sz="1600" kern="1200">
-                <a:solidFill>
-                  <a:schemeClr val="tx1"/>
-                </a:solidFill>
-                <a:latin typeface="+mn-lt"/>
-                <a:ea typeface="+mn-ea"/>
-                <a:cs typeface="+mn-cs"/>
-              </a:defRPr>
-            </a:lvl6pPr>
-            <a:lvl7pPr marL="2743200" indent="0" algn="ctr" defTabSz="914400" rtl="0" eaLnBrk="1" latinLnBrk="0" hangingPunct="1">
-              <a:lnSpc>
-                <a:spcPct val="90000"/>
-              </a:lnSpc>
-              <a:spcBef>
-                <a:spcPts val="500"/>
-              </a:spcBef>
-              <a:buFont typeface="Arial" panose="020B0604020202020204" pitchFamily="34" charset="0"/>
-              <a:buNone/>
-              <a:defRPr sz="1600" kern="1200">
-                <a:solidFill>
-                  <a:schemeClr val="tx1"/>
-                </a:solidFill>
-                <a:latin typeface="+mn-lt"/>
-                <a:ea typeface="+mn-ea"/>
-                <a:cs typeface="+mn-cs"/>
-              </a:defRPr>
-            </a:lvl7pPr>
-            <a:lvl8pPr marL="3200400" indent="0" algn="ctr" defTabSz="914400" rtl="0" eaLnBrk="1" latinLnBrk="0" hangingPunct="1">
-              <a:lnSpc>
-                <a:spcPct val="90000"/>
-              </a:lnSpc>
-              <a:spcBef>
-                <a:spcPts val="500"/>
-              </a:spcBef>
-              <a:buFont typeface="Arial" panose="020B0604020202020204" pitchFamily="34" charset="0"/>
-              <a:buNone/>
-              <a:defRPr sz="1600" kern="1200">
-                <a:solidFill>
-                  <a:schemeClr val="tx1"/>
-                </a:solidFill>
-                <a:latin typeface="+mn-lt"/>
-                <a:ea typeface="+mn-ea"/>
-                <a:cs typeface="+mn-cs"/>
-              </a:defRPr>
-            </a:lvl8pPr>
-            <a:lvl9pPr marL="3657600" indent="0" algn="ctr" defTabSz="914400" rtl="0" eaLnBrk="1" latinLnBrk="0" hangingPunct="1">
-              <a:lnSpc>
-                <a:spcPct val="90000"/>
-              </a:lnSpc>
-              <a:spcBef>
-                <a:spcPts val="500"/>
-              </a:spcBef>
-              <a:buFont typeface="Arial" panose="020B0604020202020204" pitchFamily="34" charset="0"/>
-              <a:buNone/>
-              <a:defRPr sz="1600" kern="1200">
-                <a:solidFill>
-                  <a:schemeClr val="tx1"/>
-                </a:solidFill>
-                <a:latin typeface="+mn-lt"/>
-                <a:ea typeface="+mn-ea"/>
-                <a:cs typeface="+mn-cs"/>
-              </a:defRPr>
-            </a:lvl9pPr>
-          </a:lstStyle>
-          <a:p>
-            <a:pPr algn="l"/>
-            <a:r>
-              <a:rPr lang="pt-BR" dirty="0">
-                <a:solidFill>
-                  <a:schemeClr val="bg1"/>
-                </a:solidFill>
-              </a:rPr>
-              <a:t>Comunicação entre dispositivos em casas inteligentes (IoT).</a:t>
-            </a:r>
-          </a:p>
-        </p:txBody>
-      </p:sp>
-      <p:sp>
-        <p:nvSpPr>
-          <p:cNvPr id="14" name="Subtítulo 5">
-            <a:extLst>
-              <a:ext uri="{FF2B5EF4-FFF2-40B4-BE49-F238E27FC236}">
-                <a16:creationId xmlns:a16="http://schemas.microsoft.com/office/drawing/2014/main" id="{CF6F9058-B8B9-A61C-D79F-D58AB7C018E9}"/>
-              </a:ext>
-            </a:extLst>
-          </p:cNvPr>
-          <p:cNvSpPr txBox="1">
-            <a:spLocks/>
-          </p:cNvSpPr>
+        </p:nvGrpSpPr>
+        <p:grpSpPr>
+          <a:xfrm>
+            <a:off x="4268849" y="3733105"/>
+            <a:ext cx="1815607" cy="1009573"/>
+            <a:chOff x="5954998" y="5226050"/>
+            <a:chExt cx="1815607" cy="1009573"/>
+          </a:xfrm>
+        </p:grpSpPr>
+        <p:pic>
+          <p:nvPicPr>
+            <p:cNvPr id="12" name="Gráfico 11">
+              <a:extLst>
+                <a:ext uri="{FF2B5EF4-FFF2-40B4-BE49-F238E27FC236}">
+                  <a16:creationId xmlns:a16="http://schemas.microsoft.com/office/drawing/2014/main" id="{37FC1AFD-50FC-333E-9486-341B9EE08BF4}"/>
+                </a:ext>
+              </a:extLst>
+            </p:cNvPr>
+            <p:cNvPicPr>
+              <a:picLocks noChangeAspect="1"/>
+            </p:cNvPicPr>
+            <p:nvPr/>
+          </p:nvPicPr>
+          <p:blipFill>
+            <a:blip r:embed="rId3">
+              <a:extLst>
+                <a:ext uri="{96DAC541-7B7A-43D3-8B79-37D633B846F1}">
+                  <asvg:svgBlip xmlns:asvg="http://schemas.microsoft.com/office/drawing/2016/SVG/main" r:embed="rId4"/>
+                </a:ext>
+              </a:extLst>
+            </a:blip>
+            <a:stretch>
+              <a:fillRect/>
+            </a:stretch>
+          </p:blipFill>
+          <p:spPr>
+            <a:xfrm>
+              <a:off x="6560401" y="5226050"/>
+              <a:ext cx="604800" cy="604800"/>
+            </a:xfrm>
+            <a:prstGeom prst="rect">
+              <a:avLst/>
+            </a:prstGeom>
+          </p:spPr>
+        </p:pic>
+        <p:sp>
+          <p:nvSpPr>
+            <p:cNvPr id="19" name="CaixaDeTexto 18">
+              <a:extLst>
+                <a:ext uri="{FF2B5EF4-FFF2-40B4-BE49-F238E27FC236}">
+                  <a16:creationId xmlns:a16="http://schemas.microsoft.com/office/drawing/2014/main" id="{9694A521-8C37-3C8B-E5EE-4779140E397C}"/>
+                </a:ext>
+              </a:extLst>
+            </p:cNvPr>
+            <p:cNvSpPr txBox="1"/>
+            <p:nvPr/>
+          </p:nvSpPr>
+          <p:spPr>
+            <a:xfrm>
+              <a:off x="5954998" y="5773958"/>
+              <a:ext cx="1815607" cy="461665"/>
+            </a:xfrm>
+            <a:prstGeom prst="rect">
+              <a:avLst/>
+            </a:prstGeom>
+            <a:noFill/>
+          </p:spPr>
+          <p:txBody>
+            <a:bodyPr wrap="square">
+              <a:spAutoFit/>
+            </a:bodyPr>
+            <a:lstStyle/>
+            <a:p>
+              <a:pPr algn="ctr"/>
+              <a:r>
+                <a:rPr lang="pt-BR" sz="2400" b="1" dirty="0">
+                  <a:solidFill>
+                    <a:schemeClr val="bg1"/>
+                  </a:solidFill>
+                </a:rPr>
+                <a:t>Teclados</a:t>
+              </a:r>
+              <a:endParaRPr lang="pt-BR" sz="2400" b="1" dirty="0"/>
+            </a:p>
+          </p:txBody>
+        </p:sp>
+      </p:grpSp>
+      <p:grpSp>
+        <p:nvGrpSpPr>
+          <p:cNvPr id="40" name="Agrupar 39">
+            <a:extLst>
+              <a:ext uri="{FF2B5EF4-FFF2-40B4-BE49-F238E27FC236}">
+                <a16:creationId xmlns:a16="http://schemas.microsoft.com/office/drawing/2014/main" id="{69EAA850-8727-ED64-83B4-D1401370E4BF}"/>
+              </a:ext>
+            </a:extLst>
+          </p:cNvPr>
+          <p:cNvGrpSpPr/>
           <p:nvPr/>
-        </p:nvSpPr>
-        <p:spPr>
-          <a:xfrm>
-            <a:off x="1973941" y="4544484"/>
-            <a:ext cx="8341634" cy="495298"/>
-          </a:xfrm>
-          <a:prstGeom prst="rect">
-            <a:avLst/>
-          </a:prstGeom>
-        </p:spPr>
-        <p:txBody>
-          <a:bodyPr vert="horz" lIns="91440" tIns="45720" rIns="91440" bIns="45720" rtlCol="0">
-            <a:normAutofit/>
-          </a:bodyPr>
-          <a:lstStyle>
-            <a:lvl1pPr marL="0" indent="0" algn="ctr" defTabSz="914400" rtl="0" eaLnBrk="1" latinLnBrk="0" hangingPunct="1">
-              <a:lnSpc>
-                <a:spcPct val="90000"/>
-              </a:lnSpc>
-              <a:spcBef>
-                <a:spcPts val="1000"/>
-              </a:spcBef>
-              <a:buFont typeface="Arial" panose="020B0604020202020204" pitchFamily="34" charset="0"/>
-              <a:buNone/>
-              <a:defRPr sz="2400" kern="1200">
-                <a:solidFill>
-                  <a:schemeClr val="tx1"/>
-                </a:solidFill>
-                <a:latin typeface="+mn-lt"/>
-                <a:ea typeface="+mn-ea"/>
-                <a:cs typeface="+mn-cs"/>
-              </a:defRPr>
-            </a:lvl1pPr>
-            <a:lvl2pPr marL="457200" indent="0" algn="ctr" defTabSz="914400" rtl="0" eaLnBrk="1" latinLnBrk="0" hangingPunct="1">
-              <a:lnSpc>
-                <a:spcPct val="90000"/>
-              </a:lnSpc>
-              <a:spcBef>
-                <a:spcPts val="500"/>
-              </a:spcBef>
-              <a:buFont typeface="Arial" panose="020B0604020202020204" pitchFamily="34" charset="0"/>
-              <a:buNone/>
-              <a:defRPr sz="2000" kern="1200">
-                <a:solidFill>
-                  <a:schemeClr val="tx1"/>
-                </a:solidFill>
-                <a:latin typeface="+mn-lt"/>
-                <a:ea typeface="+mn-ea"/>
-                <a:cs typeface="+mn-cs"/>
-              </a:defRPr>
-            </a:lvl2pPr>
-            <a:lvl3pPr marL="914400" indent="0" algn="ctr" defTabSz="914400" rtl="0" eaLnBrk="1" latinLnBrk="0" hangingPunct="1">
-              <a:lnSpc>
-                <a:spcPct val="90000"/>
-              </a:lnSpc>
-              <a:spcBef>
-                <a:spcPts val="500"/>
-              </a:spcBef>
-              <a:buFont typeface="Arial" panose="020B0604020202020204" pitchFamily="34" charset="0"/>
-              <a:buNone/>
-              <a:defRPr sz="1800" kern="1200">
-                <a:solidFill>
-                  <a:schemeClr val="tx1"/>
-                </a:solidFill>
-                <a:latin typeface="+mn-lt"/>
-                <a:ea typeface="+mn-ea"/>
-                <a:cs typeface="+mn-cs"/>
-              </a:defRPr>
-            </a:lvl3pPr>
-            <a:lvl4pPr marL="1371600" indent="0" algn="ctr" defTabSz="914400" rtl="0" eaLnBrk="1" latinLnBrk="0" hangingPunct="1">
-              <a:lnSpc>
-                <a:spcPct val="90000"/>
-              </a:lnSpc>
-              <a:spcBef>
-                <a:spcPts val="500"/>
-              </a:spcBef>
-              <a:buFont typeface="Arial" panose="020B0604020202020204" pitchFamily="34" charset="0"/>
-              <a:buNone/>
-              <a:defRPr sz="1600" kern="1200">
-                <a:solidFill>
-                  <a:schemeClr val="tx1"/>
-                </a:solidFill>
-                <a:latin typeface="+mn-lt"/>
-                <a:ea typeface="+mn-ea"/>
-                <a:cs typeface="+mn-cs"/>
-              </a:defRPr>
-            </a:lvl4pPr>
-            <a:lvl5pPr marL="1828800" indent="0" algn="ctr" defTabSz="914400" rtl="0" eaLnBrk="1" latinLnBrk="0" hangingPunct="1">
-              <a:lnSpc>
-                <a:spcPct val="90000"/>
-              </a:lnSpc>
-              <a:spcBef>
-                <a:spcPts val="500"/>
-              </a:spcBef>
-              <a:buFont typeface="Arial" panose="020B0604020202020204" pitchFamily="34" charset="0"/>
-              <a:buNone/>
-              <a:defRPr sz="1600" kern="1200">
-                <a:solidFill>
-                  <a:schemeClr val="tx1"/>
-                </a:solidFill>
-                <a:latin typeface="+mn-lt"/>
-                <a:ea typeface="+mn-ea"/>
-                <a:cs typeface="+mn-cs"/>
-              </a:defRPr>
-            </a:lvl5pPr>
-            <a:lvl6pPr marL="2286000" indent="0" algn="ctr" defTabSz="914400" rtl="0" eaLnBrk="1" latinLnBrk="0" hangingPunct="1">
-              <a:lnSpc>
-                <a:spcPct val="90000"/>
-              </a:lnSpc>
-              <a:spcBef>
-                <a:spcPts val="500"/>
-              </a:spcBef>
-              <a:buFont typeface="Arial" panose="020B0604020202020204" pitchFamily="34" charset="0"/>
-              <a:buNone/>
-              <a:defRPr sz="1600" kern="1200">
-                <a:solidFill>
-                  <a:schemeClr val="tx1"/>
-                </a:solidFill>
-                <a:latin typeface="+mn-lt"/>
-                <a:ea typeface="+mn-ea"/>
-                <a:cs typeface="+mn-cs"/>
-              </a:defRPr>
-            </a:lvl6pPr>
-            <a:lvl7pPr marL="2743200" indent="0" algn="ctr" defTabSz="914400" rtl="0" eaLnBrk="1" latinLnBrk="0" hangingPunct="1">
-              <a:lnSpc>
-                <a:spcPct val="90000"/>
-              </a:lnSpc>
-              <a:spcBef>
-                <a:spcPts val="500"/>
-              </a:spcBef>
-              <a:buFont typeface="Arial" panose="020B0604020202020204" pitchFamily="34" charset="0"/>
-              <a:buNone/>
-              <a:defRPr sz="1600" kern="1200">
-                <a:solidFill>
-                  <a:schemeClr val="tx1"/>
-                </a:solidFill>
-                <a:latin typeface="+mn-lt"/>
-                <a:ea typeface="+mn-ea"/>
-                <a:cs typeface="+mn-cs"/>
-              </a:defRPr>
-            </a:lvl7pPr>
-            <a:lvl8pPr marL="3200400" indent="0" algn="ctr" defTabSz="914400" rtl="0" eaLnBrk="1" latinLnBrk="0" hangingPunct="1">
-              <a:lnSpc>
-                <a:spcPct val="90000"/>
-              </a:lnSpc>
-              <a:spcBef>
-                <a:spcPts val="500"/>
-              </a:spcBef>
-              <a:buFont typeface="Arial" panose="020B0604020202020204" pitchFamily="34" charset="0"/>
-              <a:buNone/>
-              <a:defRPr sz="1600" kern="1200">
-                <a:solidFill>
-                  <a:schemeClr val="tx1"/>
-                </a:solidFill>
-                <a:latin typeface="+mn-lt"/>
-                <a:ea typeface="+mn-ea"/>
-                <a:cs typeface="+mn-cs"/>
-              </a:defRPr>
-            </a:lvl8pPr>
-            <a:lvl9pPr marL="3657600" indent="0" algn="ctr" defTabSz="914400" rtl="0" eaLnBrk="1" latinLnBrk="0" hangingPunct="1">
-              <a:lnSpc>
-                <a:spcPct val="90000"/>
-              </a:lnSpc>
-              <a:spcBef>
-                <a:spcPts val="500"/>
-              </a:spcBef>
-              <a:buFont typeface="Arial" panose="020B0604020202020204" pitchFamily="34" charset="0"/>
-              <a:buNone/>
-              <a:defRPr sz="1600" kern="1200">
-                <a:solidFill>
-                  <a:schemeClr val="tx1"/>
-                </a:solidFill>
-                <a:latin typeface="+mn-lt"/>
-                <a:ea typeface="+mn-ea"/>
-                <a:cs typeface="+mn-cs"/>
-              </a:defRPr>
-            </a:lvl9pPr>
-          </a:lstStyle>
-          <a:p>
-            <a:pPr algn="l"/>
-            <a:r>
-              <a:rPr lang="pt-BR" dirty="0">
-                <a:solidFill>
-                  <a:schemeClr val="bg1"/>
-                </a:solidFill>
-              </a:rPr>
-              <a:t>Dispositivos médicos e fitness (como smartbands)</a:t>
-            </a:r>
-          </a:p>
-        </p:txBody>
-      </p:sp>
+        </p:nvGrpSpPr>
+        <p:grpSpPr>
+          <a:xfrm>
+            <a:off x="872621" y="3731625"/>
+            <a:ext cx="1815607" cy="1378905"/>
+            <a:chOff x="1829991" y="5226050"/>
+            <a:chExt cx="1815607" cy="1378905"/>
+          </a:xfrm>
+        </p:grpSpPr>
+        <p:pic>
+          <p:nvPicPr>
+            <p:cNvPr id="7" name="Gráfico 6">
+              <a:extLst>
+                <a:ext uri="{FF2B5EF4-FFF2-40B4-BE49-F238E27FC236}">
+                  <a16:creationId xmlns:a16="http://schemas.microsoft.com/office/drawing/2014/main" id="{B5DA3C01-025D-D7E8-B664-2A159382B1A7}"/>
+                </a:ext>
+              </a:extLst>
+            </p:cNvPr>
+            <p:cNvPicPr>
+              <a:picLocks noChangeAspect="1"/>
+            </p:cNvPicPr>
+            <p:nvPr/>
+          </p:nvPicPr>
+          <p:blipFill>
+            <a:blip r:embed="rId5">
+              <a:extLst>
+                <a:ext uri="{96DAC541-7B7A-43D3-8B79-37D633B846F1}">
+                  <asvg:svgBlip xmlns:asvg="http://schemas.microsoft.com/office/drawing/2016/SVG/main" r:embed="rId6"/>
+                </a:ext>
+              </a:extLst>
+            </a:blip>
+            <a:stretch>
+              <a:fillRect/>
+            </a:stretch>
+          </p:blipFill>
+          <p:spPr>
+            <a:xfrm>
+              <a:off x="2435394" y="5226050"/>
+              <a:ext cx="604800" cy="604800"/>
+            </a:xfrm>
+            <a:prstGeom prst="rect">
+              <a:avLst/>
+            </a:prstGeom>
+          </p:spPr>
+        </p:pic>
+        <p:sp>
+          <p:nvSpPr>
+            <p:cNvPr id="20" name="CaixaDeTexto 19">
+              <a:extLst>
+                <a:ext uri="{FF2B5EF4-FFF2-40B4-BE49-F238E27FC236}">
+                  <a16:creationId xmlns:a16="http://schemas.microsoft.com/office/drawing/2014/main" id="{717514B9-C733-9B13-B073-8E9F93F5ACBE}"/>
+                </a:ext>
+              </a:extLst>
+            </p:cNvPr>
+            <p:cNvSpPr txBox="1"/>
+            <p:nvPr/>
+          </p:nvSpPr>
+          <p:spPr>
+            <a:xfrm>
+              <a:off x="1829991" y="5773958"/>
+              <a:ext cx="1815607" cy="830997"/>
+            </a:xfrm>
+            <a:prstGeom prst="rect">
+              <a:avLst/>
+            </a:prstGeom>
+            <a:noFill/>
+          </p:spPr>
+          <p:txBody>
+            <a:bodyPr wrap="square">
+              <a:spAutoFit/>
+            </a:bodyPr>
+            <a:lstStyle/>
+            <a:p>
+              <a:pPr algn="ctr"/>
+              <a:r>
+                <a:rPr lang="pt-BR" sz="2400" b="1" dirty="0">
+                  <a:solidFill>
+                    <a:schemeClr val="bg1"/>
+                  </a:solidFill>
+                </a:rPr>
+                <a:t>Fones de ouvido</a:t>
+              </a:r>
+              <a:endParaRPr lang="pt-BR" sz="2400" b="1" dirty="0"/>
+            </a:p>
+          </p:txBody>
+        </p:sp>
+      </p:grpSp>
+      <p:grpSp>
+        <p:nvGrpSpPr>
+          <p:cNvPr id="39" name="Agrupar 38">
+            <a:extLst>
+              <a:ext uri="{FF2B5EF4-FFF2-40B4-BE49-F238E27FC236}">
+                <a16:creationId xmlns:a16="http://schemas.microsoft.com/office/drawing/2014/main" id="{60B65907-DED6-9D9E-F699-BED48EE96E43}"/>
+              </a:ext>
+            </a:extLst>
+          </p:cNvPr>
+          <p:cNvGrpSpPr/>
+          <p:nvPr/>
+        </p:nvGrpSpPr>
+        <p:grpSpPr>
+          <a:xfrm>
+            <a:off x="2570735" y="4332285"/>
+            <a:ext cx="1815607" cy="1378905"/>
+            <a:chOff x="4271396" y="5226050"/>
+            <a:chExt cx="1815607" cy="1378905"/>
+          </a:xfrm>
+        </p:grpSpPr>
+        <p:pic>
+          <p:nvPicPr>
+            <p:cNvPr id="9" name="Gráfico 8">
+              <a:extLst>
+                <a:ext uri="{FF2B5EF4-FFF2-40B4-BE49-F238E27FC236}">
+                  <a16:creationId xmlns:a16="http://schemas.microsoft.com/office/drawing/2014/main" id="{A15EF47C-31B8-902B-8B3B-92410BCBD3EA}"/>
+                </a:ext>
+              </a:extLst>
+            </p:cNvPr>
+            <p:cNvPicPr>
+              <a:picLocks noChangeAspect="1"/>
+            </p:cNvPicPr>
+            <p:nvPr/>
+          </p:nvPicPr>
+          <p:blipFill>
+            <a:blip r:embed="rId7">
+              <a:extLst>
+                <a:ext uri="{96DAC541-7B7A-43D3-8B79-37D633B846F1}">
+                  <asvg:svgBlip xmlns:asvg="http://schemas.microsoft.com/office/drawing/2016/SVG/main" r:embed="rId8"/>
+                </a:ext>
+              </a:extLst>
+            </a:blip>
+            <a:stretch>
+              <a:fillRect/>
+            </a:stretch>
+          </p:blipFill>
+          <p:spPr>
+            <a:xfrm>
+              <a:off x="4876799" y="5226050"/>
+              <a:ext cx="604800" cy="604800"/>
+            </a:xfrm>
+            <a:prstGeom prst="rect">
+              <a:avLst/>
+            </a:prstGeom>
+          </p:spPr>
+        </p:pic>
+        <p:sp>
+          <p:nvSpPr>
+            <p:cNvPr id="21" name="CaixaDeTexto 20">
+              <a:extLst>
+                <a:ext uri="{FF2B5EF4-FFF2-40B4-BE49-F238E27FC236}">
+                  <a16:creationId xmlns:a16="http://schemas.microsoft.com/office/drawing/2014/main" id="{F382F542-82ED-8A1E-6AB4-14DB18BFA5F1}"/>
+                </a:ext>
+              </a:extLst>
+            </p:cNvPr>
+            <p:cNvSpPr txBox="1"/>
+            <p:nvPr/>
+          </p:nvSpPr>
+          <p:spPr>
+            <a:xfrm>
+              <a:off x="4271396" y="5773958"/>
+              <a:ext cx="1815607" cy="830997"/>
+            </a:xfrm>
+            <a:prstGeom prst="rect">
+              <a:avLst/>
+            </a:prstGeom>
+            <a:noFill/>
+          </p:spPr>
+          <p:txBody>
+            <a:bodyPr wrap="square">
+              <a:spAutoFit/>
+            </a:bodyPr>
+            <a:lstStyle/>
+            <a:p>
+              <a:pPr algn="ctr"/>
+              <a:r>
+                <a:rPr lang="pt-BR" sz="2400" b="1" dirty="0">
+                  <a:solidFill>
+                    <a:schemeClr val="bg1"/>
+                  </a:solidFill>
+                </a:rPr>
+                <a:t>Caixas de som</a:t>
+              </a:r>
+              <a:endParaRPr lang="pt-BR" sz="2400" b="1" dirty="0"/>
+            </a:p>
+          </p:txBody>
+        </p:sp>
+      </p:grpSp>
+      <p:grpSp>
+        <p:nvGrpSpPr>
+          <p:cNvPr id="37" name="Agrupar 36">
+            <a:extLst>
+              <a:ext uri="{FF2B5EF4-FFF2-40B4-BE49-F238E27FC236}">
+                <a16:creationId xmlns:a16="http://schemas.microsoft.com/office/drawing/2014/main" id="{D1FFDB0E-0A05-EFE9-3114-519EA87EFB82}"/>
+              </a:ext>
+            </a:extLst>
+          </p:cNvPr>
+          <p:cNvGrpSpPr/>
+          <p:nvPr/>
+        </p:nvGrpSpPr>
+        <p:grpSpPr>
+          <a:xfrm>
+            <a:off x="5966963" y="4332285"/>
+            <a:ext cx="1815607" cy="1378905"/>
+            <a:chOff x="8295786" y="5226050"/>
+            <a:chExt cx="1815607" cy="1378905"/>
+          </a:xfrm>
+        </p:grpSpPr>
+        <p:pic>
+          <p:nvPicPr>
+            <p:cNvPr id="15" name="Gráfico 14">
+              <a:extLst>
+                <a:ext uri="{FF2B5EF4-FFF2-40B4-BE49-F238E27FC236}">
+                  <a16:creationId xmlns:a16="http://schemas.microsoft.com/office/drawing/2014/main" id="{D2F399FE-0661-48EA-0489-FD0FD1F94A25}"/>
+                </a:ext>
+              </a:extLst>
+            </p:cNvPr>
+            <p:cNvPicPr>
+              <a:picLocks noChangeAspect="1"/>
+            </p:cNvPicPr>
+            <p:nvPr/>
+          </p:nvPicPr>
+          <p:blipFill>
+            <a:blip r:embed="rId9">
+              <a:extLst>
+                <a:ext uri="{96DAC541-7B7A-43D3-8B79-37D633B846F1}">
+                  <asvg:svgBlip xmlns:asvg="http://schemas.microsoft.com/office/drawing/2016/SVG/main" r:embed="rId10"/>
+                </a:ext>
+              </a:extLst>
+            </a:blip>
+            <a:stretch>
+              <a:fillRect/>
+            </a:stretch>
+          </p:blipFill>
+          <p:spPr>
+            <a:xfrm>
+              <a:off x="8901189" y="5226050"/>
+              <a:ext cx="604800" cy="604800"/>
+            </a:xfrm>
+            <a:prstGeom prst="rect">
+              <a:avLst/>
+            </a:prstGeom>
+          </p:spPr>
+        </p:pic>
+        <p:sp>
+          <p:nvSpPr>
+            <p:cNvPr id="22" name="CaixaDeTexto 21">
+              <a:extLst>
+                <a:ext uri="{FF2B5EF4-FFF2-40B4-BE49-F238E27FC236}">
+                  <a16:creationId xmlns:a16="http://schemas.microsoft.com/office/drawing/2014/main" id="{1F523A3C-04CB-308D-E249-B6172EB27D80}"/>
+                </a:ext>
+              </a:extLst>
+            </p:cNvPr>
+            <p:cNvSpPr txBox="1"/>
+            <p:nvPr/>
+          </p:nvSpPr>
+          <p:spPr>
+            <a:xfrm>
+              <a:off x="8295786" y="5773958"/>
+              <a:ext cx="1815607" cy="830997"/>
+            </a:xfrm>
+            <a:prstGeom prst="rect">
+              <a:avLst/>
+            </a:prstGeom>
+            <a:noFill/>
+          </p:spPr>
+          <p:txBody>
+            <a:bodyPr wrap="square">
+              <a:spAutoFit/>
+            </a:bodyPr>
+            <a:lstStyle/>
+            <a:p>
+              <a:pPr algn="ctr"/>
+              <a:r>
+                <a:rPr lang="pt-BR" sz="2400" b="1" dirty="0">
+                  <a:solidFill>
+                    <a:schemeClr val="bg1"/>
+                  </a:solidFill>
+                </a:rPr>
+                <a:t>mouses </a:t>
+              </a:r>
+            </a:p>
+            <a:p>
+              <a:pPr algn="ctr"/>
+              <a:r>
+                <a:rPr lang="pt-BR" sz="2400" b="1" dirty="0">
+                  <a:solidFill>
+                    <a:schemeClr val="bg1"/>
+                  </a:solidFill>
+                </a:rPr>
+                <a:t>sem fio</a:t>
+              </a:r>
+              <a:endParaRPr lang="pt-BR" sz="2400" b="1" dirty="0"/>
+            </a:p>
+          </p:txBody>
+        </p:sp>
+      </p:grpSp>
+      <p:grpSp>
+        <p:nvGrpSpPr>
+          <p:cNvPr id="42" name="Agrupar 41">
+            <a:extLst>
+              <a:ext uri="{FF2B5EF4-FFF2-40B4-BE49-F238E27FC236}">
+                <a16:creationId xmlns:a16="http://schemas.microsoft.com/office/drawing/2014/main" id="{D8FFE937-291C-2579-1D1E-A18B71333BC5}"/>
+              </a:ext>
+            </a:extLst>
+          </p:cNvPr>
+          <p:cNvGrpSpPr/>
+          <p:nvPr/>
+        </p:nvGrpSpPr>
+        <p:grpSpPr>
+          <a:xfrm>
+            <a:off x="1579436" y="2442825"/>
+            <a:ext cx="9033127" cy="604800"/>
+            <a:chOff x="1278000" y="2690950"/>
+            <a:chExt cx="8839443" cy="604800"/>
+          </a:xfrm>
+        </p:grpSpPr>
+        <p:sp>
+          <p:nvSpPr>
+            <p:cNvPr id="11" name="Subtítulo 5">
+              <a:extLst>
+                <a:ext uri="{FF2B5EF4-FFF2-40B4-BE49-F238E27FC236}">
+                  <a16:creationId xmlns:a16="http://schemas.microsoft.com/office/drawing/2014/main" id="{BAD29CCC-03B4-7016-EBBD-DD79B040F9DB}"/>
+                </a:ext>
+              </a:extLst>
+            </p:cNvPr>
+            <p:cNvSpPr txBox="1">
+              <a:spLocks/>
+            </p:cNvSpPr>
+            <p:nvPr/>
+          </p:nvSpPr>
+          <p:spPr>
+            <a:xfrm>
+              <a:off x="2585394" y="2745701"/>
+              <a:ext cx="7532049" cy="495298"/>
+            </a:xfrm>
+            <a:prstGeom prst="rect">
+              <a:avLst/>
+            </a:prstGeom>
+          </p:spPr>
+          <p:txBody>
+            <a:bodyPr vert="horz" lIns="91440" tIns="45720" rIns="91440" bIns="45720" rtlCol="0">
+              <a:noAutofit/>
+            </a:bodyPr>
+            <a:lstStyle>
+              <a:lvl1pPr marL="0" indent="0" algn="ctr" defTabSz="914400" rtl="0" eaLnBrk="1" latinLnBrk="0" hangingPunct="1">
+                <a:lnSpc>
+                  <a:spcPct val="90000"/>
+                </a:lnSpc>
+                <a:spcBef>
+                  <a:spcPts val="1000"/>
+                </a:spcBef>
+                <a:buFont typeface="Arial" panose="020B0604020202020204" pitchFamily="34" charset="0"/>
+                <a:buNone/>
+                <a:defRPr sz="2400" kern="1200">
+                  <a:solidFill>
+                    <a:schemeClr val="tx1"/>
+                  </a:solidFill>
+                  <a:latin typeface="+mn-lt"/>
+                  <a:ea typeface="+mn-ea"/>
+                  <a:cs typeface="+mn-cs"/>
+                </a:defRPr>
+              </a:lvl1pPr>
+              <a:lvl2pPr marL="457200" indent="0" algn="ctr" defTabSz="914400" rtl="0" eaLnBrk="1" latinLnBrk="0" hangingPunct="1">
+                <a:lnSpc>
+                  <a:spcPct val="90000"/>
+                </a:lnSpc>
+                <a:spcBef>
+                  <a:spcPts val="500"/>
+                </a:spcBef>
+                <a:buFont typeface="Arial" panose="020B0604020202020204" pitchFamily="34" charset="0"/>
+                <a:buNone/>
+                <a:defRPr sz="2000" kern="1200">
+                  <a:solidFill>
+                    <a:schemeClr val="tx1"/>
+                  </a:solidFill>
+                  <a:latin typeface="+mn-lt"/>
+                  <a:ea typeface="+mn-ea"/>
+                  <a:cs typeface="+mn-cs"/>
+                </a:defRPr>
+              </a:lvl2pPr>
+              <a:lvl3pPr marL="914400" indent="0" algn="ctr" defTabSz="914400" rtl="0" eaLnBrk="1" latinLnBrk="0" hangingPunct="1">
+                <a:lnSpc>
+                  <a:spcPct val="90000"/>
+                </a:lnSpc>
+                <a:spcBef>
+                  <a:spcPts val="500"/>
+                </a:spcBef>
+                <a:buFont typeface="Arial" panose="020B0604020202020204" pitchFamily="34" charset="0"/>
+                <a:buNone/>
+                <a:defRPr sz="1800" kern="1200">
+                  <a:solidFill>
+                    <a:schemeClr val="tx1"/>
+                  </a:solidFill>
+                  <a:latin typeface="+mn-lt"/>
+                  <a:ea typeface="+mn-ea"/>
+                  <a:cs typeface="+mn-cs"/>
+                </a:defRPr>
+              </a:lvl3pPr>
+              <a:lvl4pPr marL="1371600" indent="0" algn="ctr" defTabSz="914400" rtl="0" eaLnBrk="1" latinLnBrk="0" hangingPunct="1">
+                <a:lnSpc>
+                  <a:spcPct val="90000"/>
+                </a:lnSpc>
+                <a:spcBef>
+                  <a:spcPts val="500"/>
+                </a:spcBef>
+                <a:buFont typeface="Arial" panose="020B0604020202020204" pitchFamily="34" charset="0"/>
+                <a:buNone/>
+                <a:defRPr sz="1600" kern="1200">
+                  <a:solidFill>
+                    <a:schemeClr val="tx1"/>
+                  </a:solidFill>
+                  <a:latin typeface="+mn-lt"/>
+                  <a:ea typeface="+mn-ea"/>
+                  <a:cs typeface="+mn-cs"/>
+                </a:defRPr>
+              </a:lvl4pPr>
+              <a:lvl5pPr marL="1828800" indent="0" algn="ctr" defTabSz="914400" rtl="0" eaLnBrk="1" latinLnBrk="0" hangingPunct="1">
+                <a:lnSpc>
+                  <a:spcPct val="90000"/>
+                </a:lnSpc>
+                <a:spcBef>
+                  <a:spcPts val="500"/>
+                </a:spcBef>
+                <a:buFont typeface="Arial" panose="020B0604020202020204" pitchFamily="34" charset="0"/>
+                <a:buNone/>
+                <a:defRPr sz="1600" kern="1200">
+                  <a:solidFill>
+                    <a:schemeClr val="tx1"/>
+                  </a:solidFill>
+                  <a:latin typeface="+mn-lt"/>
+                  <a:ea typeface="+mn-ea"/>
+                  <a:cs typeface="+mn-cs"/>
+                </a:defRPr>
+              </a:lvl5pPr>
+              <a:lvl6pPr marL="2286000" indent="0" algn="ctr" defTabSz="914400" rtl="0" eaLnBrk="1" latinLnBrk="0" hangingPunct="1">
+                <a:lnSpc>
+                  <a:spcPct val="90000"/>
+                </a:lnSpc>
+                <a:spcBef>
+                  <a:spcPts val="500"/>
+                </a:spcBef>
+                <a:buFont typeface="Arial" panose="020B0604020202020204" pitchFamily="34" charset="0"/>
+                <a:buNone/>
+                <a:defRPr sz="1600" kern="1200">
+                  <a:solidFill>
+                    <a:schemeClr val="tx1"/>
+                  </a:solidFill>
+                  <a:latin typeface="+mn-lt"/>
+                  <a:ea typeface="+mn-ea"/>
+                  <a:cs typeface="+mn-cs"/>
+                </a:defRPr>
+              </a:lvl6pPr>
+              <a:lvl7pPr marL="2743200" indent="0" algn="ctr" defTabSz="914400" rtl="0" eaLnBrk="1" latinLnBrk="0" hangingPunct="1">
+                <a:lnSpc>
+                  <a:spcPct val="90000"/>
+                </a:lnSpc>
+                <a:spcBef>
+                  <a:spcPts val="500"/>
+                </a:spcBef>
+                <a:buFont typeface="Arial" panose="020B0604020202020204" pitchFamily="34" charset="0"/>
+                <a:buNone/>
+                <a:defRPr sz="1600" kern="1200">
+                  <a:solidFill>
+                    <a:schemeClr val="tx1"/>
+                  </a:solidFill>
+                  <a:latin typeface="+mn-lt"/>
+                  <a:ea typeface="+mn-ea"/>
+                  <a:cs typeface="+mn-cs"/>
+                </a:defRPr>
+              </a:lvl7pPr>
+              <a:lvl8pPr marL="3200400" indent="0" algn="ctr" defTabSz="914400" rtl="0" eaLnBrk="1" latinLnBrk="0" hangingPunct="1">
+                <a:lnSpc>
+                  <a:spcPct val="90000"/>
+                </a:lnSpc>
+                <a:spcBef>
+                  <a:spcPts val="500"/>
+                </a:spcBef>
+                <a:buFont typeface="Arial" panose="020B0604020202020204" pitchFamily="34" charset="0"/>
+                <a:buNone/>
+                <a:defRPr sz="1600" kern="1200">
+                  <a:solidFill>
+                    <a:schemeClr val="tx1"/>
+                  </a:solidFill>
+                  <a:latin typeface="+mn-lt"/>
+                  <a:ea typeface="+mn-ea"/>
+                  <a:cs typeface="+mn-cs"/>
+                </a:defRPr>
+              </a:lvl8pPr>
+              <a:lvl9pPr marL="3657600" indent="0" algn="ctr" defTabSz="914400" rtl="0" eaLnBrk="1" latinLnBrk="0" hangingPunct="1">
+                <a:lnSpc>
+                  <a:spcPct val="90000"/>
+                </a:lnSpc>
+                <a:spcBef>
+                  <a:spcPts val="500"/>
+                </a:spcBef>
+                <a:buFont typeface="Arial" panose="020B0604020202020204" pitchFamily="34" charset="0"/>
+                <a:buNone/>
+                <a:defRPr sz="1600" kern="1200">
+                  <a:solidFill>
+                    <a:schemeClr val="tx1"/>
+                  </a:solidFill>
+                  <a:latin typeface="+mn-lt"/>
+                  <a:ea typeface="+mn-ea"/>
+                  <a:cs typeface="+mn-cs"/>
+                </a:defRPr>
+              </a:lvl9pPr>
+            </a:lstStyle>
+            <a:p>
+              <a:pPr algn="l"/>
+              <a:r>
+                <a:rPr lang="pt-BR" b="1" dirty="0">
+                  <a:solidFill>
+                    <a:schemeClr val="bg1"/>
+                  </a:solidFill>
+                </a:rPr>
+                <a:t>Comunicação entre dispositivos em casas inteligentes (IoT).</a:t>
+              </a:r>
+            </a:p>
+          </p:txBody>
+        </p:sp>
+        <p:pic>
+          <p:nvPicPr>
+            <p:cNvPr id="28" name="Gráfico 27">
+              <a:extLst>
+                <a:ext uri="{FF2B5EF4-FFF2-40B4-BE49-F238E27FC236}">
+                  <a16:creationId xmlns:a16="http://schemas.microsoft.com/office/drawing/2014/main" id="{29D69E11-5862-D02D-5EB5-468C50999F6C}"/>
+                </a:ext>
+              </a:extLst>
+            </p:cNvPr>
+            <p:cNvPicPr>
+              <a:picLocks noChangeAspect="1"/>
+            </p:cNvPicPr>
+            <p:nvPr/>
+          </p:nvPicPr>
+          <p:blipFill>
+            <a:blip r:embed="rId11">
+              <a:extLst>
+                <a:ext uri="{96DAC541-7B7A-43D3-8B79-37D633B846F1}">
+                  <asvg:svgBlip xmlns:asvg="http://schemas.microsoft.com/office/drawing/2016/SVG/main" r:embed="rId12"/>
+                </a:ext>
+              </a:extLst>
+            </a:blip>
+            <a:stretch>
+              <a:fillRect/>
+            </a:stretch>
+          </p:blipFill>
+          <p:spPr>
+            <a:xfrm>
+              <a:off x="1278000" y="2690950"/>
+              <a:ext cx="604800" cy="604800"/>
+            </a:xfrm>
+            <a:prstGeom prst="rect">
+              <a:avLst/>
+            </a:prstGeom>
+          </p:spPr>
+        </p:pic>
+        <p:pic>
+          <p:nvPicPr>
+            <p:cNvPr id="30" name="Gráfico 29">
+              <a:extLst>
+                <a:ext uri="{FF2B5EF4-FFF2-40B4-BE49-F238E27FC236}">
+                  <a16:creationId xmlns:a16="http://schemas.microsoft.com/office/drawing/2014/main" id="{F5EE0847-D6BF-1F01-6063-80D01705E968}"/>
+                </a:ext>
+              </a:extLst>
+            </p:cNvPr>
+            <p:cNvPicPr>
+              <a:picLocks noChangeAspect="1"/>
+            </p:cNvPicPr>
+            <p:nvPr/>
+          </p:nvPicPr>
+          <p:blipFill>
+            <a:blip r:embed="rId13">
+              <a:extLst>
+                <a:ext uri="{96DAC541-7B7A-43D3-8B79-37D633B846F1}">
+                  <asvg:svgBlip xmlns:asvg="http://schemas.microsoft.com/office/drawing/2016/SVG/main" r:embed="rId14"/>
+                </a:ext>
+              </a:extLst>
+            </a:blip>
+            <a:stretch>
+              <a:fillRect/>
+            </a:stretch>
+          </p:blipFill>
+          <p:spPr>
+            <a:xfrm>
+              <a:off x="1829991" y="2690950"/>
+              <a:ext cx="604800" cy="604800"/>
+            </a:xfrm>
+            <a:prstGeom prst="rect">
+              <a:avLst/>
+            </a:prstGeom>
+          </p:spPr>
+        </p:pic>
+      </p:grpSp>
+      <p:grpSp>
+        <p:nvGrpSpPr>
+          <p:cNvPr id="36" name="Agrupar 35">
+            <a:extLst>
+              <a:ext uri="{FF2B5EF4-FFF2-40B4-BE49-F238E27FC236}">
+                <a16:creationId xmlns:a16="http://schemas.microsoft.com/office/drawing/2014/main" id="{B5F060BE-7292-F710-048F-C706BEDACDBD}"/>
+              </a:ext>
+            </a:extLst>
+          </p:cNvPr>
+          <p:cNvGrpSpPr/>
+          <p:nvPr/>
+        </p:nvGrpSpPr>
+        <p:grpSpPr>
+          <a:xfrm>
+            <a:off x="7665077" y="3733105"/>
+            <a:ext cx="1815607" cy="1303312"/>
+            <a:chOff x="9959577" y="5226050"/>
+            <a:chExt cx="1815607" cy="1303312"/>
+          </a:xfrm>
+        </p:grpSpPr>
+        <p:pic>
+          <p:nvPicPr>
+            <p:cNvPr id="17" name="Gráfico 16">
+              <a:extLst>
+                <a:ext uri="{FF2B5EF4-FFF2-40B4-BE49-F238E27FC236}">
+                  <a16:creationId xmlns:a16="http://schemas.microsoft.com/office/drawing/2014/main" id="{CB72CDBA-754C-4AD0-346F-96C6950DE706}"/>
+                </a:ext>
+              </a:extLst>
+            </p:cNvPr>
+            <p:cNvPicPr>
+              <a:picLocks noChangeAspect="1"/>
+            </p:cNvPicPr>
+            <p:nvPr/>
+          </p:nvPicPr>
+          <p:blipFill>
+            <a:blip r:embed="rId15">
+              <a:extLst>
+                <a:ext uri="{96DAC541-7B7A-43D3-8B79-37D633B846F1}">
+                  <asvg:svgBlip xmlns:asvg="http://schemas.microsoft.com/office/drawing/2016/SVG/main" r:embed="rId16"/>
+                </a:ext>
+              </a:extLst>
+            </a:blip>
+            <a:stretch>
+              <a:fillRect/>
+            </a:stretch>
+          </p:blipFill>
+          <p:spPr>
+            <a:xfrm>
+              <a:off x="10564980" y="5226050"/>
+              <a:ext cx="604800" cy="604800"/>
+            </a:xfrm>
+            <a:prstGeom prst="rect">
+              <a:avLst/>
+            </a:prstGeom>
+          </p:spPr>
+        </p:pic>
+        <p:sp>
+          <p:nvSpPr>
+            <p:cNvPr id="31" name="CaixaDeTexto 30">
+              <a:extLst>
+                <a:ext uri="{FF2B5EF4-FFF2-40B4-BE49-F238E27FC236}">
+                  <a16:creationId xmlns:a16="http://schemas.microsoft.com/office/drawing/2014/main" id="{9B6C6623-24F1-C3AB-1DDC-EE6466350482}"/>
+                </a:ext>
+              </a:extLst>
+            </p:cNvPr>
+            <p:cNvSpPr txBox="1"/>
+            <p:nvPr/>
+          </p:nvSpPr>
+          <p:spPr>
+            <a:xfrm>
+              <a:off x="9959577" y="5698365"/>
+              <a:ext cx="1815607" cy="830997"/>
+            </a:xfrm>
+            <a:prstGeom prst="rect">
+              <a:avLst/>
+            </a:prstGeom>
+            <a:noFill/>
+          </p:spPr>
+          <p:txBody>
+            <a:bodyPr wrap="square">
+              <a:spAutoFit/>
+            </a:bodyPr>
+            <a:lstStyle/>
+            <a:p>
+              <a:pPr algn="ctr"/>
+              <a:r>
+                <a:rPr lang="pt-BR" sz="2400" b="1" dirty="0">
+                  <a:solidFill>
+                    <a:schemeClr val="bg1"/>
+                  </a:solidFill>
+                </a:rPr>
+                <a:t>Dispositivos médicos</a:t>
+              </a:r>
+              <a:endParaRPr lang="pt-BR" sz="2400" b="1" dirty="0"/>
+            </a:p>
+          </p:txBody>
+        </p:sp>
+      </p:grpSp>
+      <p:grpSp>
+        <p:nvGrpSpPr>
+          <p:cNvPr id="35" name="Agrupar 34">
+            <a:extLst>
+              <a:ext uri="{FF2B5EF4-FFF2-40B4-BE49-F238E27FC236}">
+                <a16:creationId xmlns:a16="http://schemas.microsoft.com/office/drawing/2014/main" id="{7033DEC4-5363-F857-D776-DAEFBBC81925}"/>
+              </a:ext>
+            </a:extLst>
+          </p:cNvPr>
+          <p:cNvGrpSpPr/>
+          <p:nvPr/>
+        </p:nvGrpSpPr>
+        <p:grpSpPr>
+          <a:xfrm>
+            <a:off x="9363193" y="4332825"/>
+            <a:ext cx="1815607" cy="1009573"/>
+            <a:chOff x="81118" y="5226050"/>
+            <a:chExt cx="1815607" cy="1009573"/>
+          </a:xfrm>
+        </p:grpSpPr>
+        <p:pic>
+          <p:nvPicPr>
+            <p:cNvPr id="33" name="Gráfico 32">
+              <a:extLst>
+                <a:ext uri="{FF2B5EF4-FFF2-40B4-BE49-F238E27FC236}">
+                  <a16:creationId xmlns:a16="http://schemas.microsoft.com/office/drawing/2014/main" id="{B3D0449D-076E-19DF-44B2-2D7C9B59B553}"/>
+                </a:ext>
+              </a:extLst>
+            </p:cNvPr>
+            <p:cNvPicPr>
+              <a:picLocks noChangeAspect="1"/>
+            </p:cNvPicPr>
+            <p:nvPr/>
+          </p:nvPicPr>
+          <p:blipFill>
+            <a:blip r:embed="rId17">
+              <a:extLst>
+                <a:ext uri="{96DAC541-7B7A-43D3-8B79-37D633B846F1}">
+                  <asvg:svgBlip xmlns:asvg="http://schemas.microsoft.com/office/drawing/2016/SVG/main" r:embed="rId18"/>
+                </a:ext>
+              </a:extLst>
+            </a:blip>
+            <a:stretch>
+              <a:fillRect/>
+            </a:stretch>
+          </p:blipFill>
+          <p:spPr>
+            <a:xfrm>
+              <a:off x="686522" y="5226050"/>
+              <a:ext cx="604800" cy="604800"/>
+            </a:xfrm>
+            <a:prstGeom prst="rect">
+              <a:avLst/>
+            </a:prstGeom>
+          </p:spPr>
+        </p:pic>
+        <p:sp>
+          <p:nvSpPr>
+            <p:cNvPr id="34" name="CaixaDeTexto 33">
+              <a:extLst>
+                <a:ext uri="{FF2B5EF4-FFF2-40B4-BE49-F238E27FC236}">
+                  <a16:creationId xmlns:a16="http://schemas.microsoft.com/office/drawing/2014/main" id="{2A94301C-4177-49C6-1993-ECECC842C297}"/>
+                </a:ext>
+              </a:extLst>
+            </p:cNvPr>
+            <p:cNvSpPr txBox="1"/>
+            <p:nvPr/>
+          </p:nvSpPr>
+          <p:spPr>
+            <a:xfrm>
+              <a:off x="81118" y="5773958"/>
+              <a:ext cx="1815607" cy="461665"/>
+            </a:xfrm>
+            <a:prstGeom prst="rect">
+              <a:avLst/>
+            </a:prstGeom>
+            <a:noFill/>
+          </p:spPr>
+          <p:txBody>
+            <a:bodyPr wrap="square">
+              <a:spAutoFit/>
+            </a:bodyPr>
+            <a:lstStyle/>
+            <a:p>
+              <a:pPr algn="ctr"/>
+              <a:r>
+                <a:rPr lang="pt-BR" sz="2400" b="1" dirty="0">
+                  <a:solidFill>
+                    <a:schemeClr val="bg1"/>
+                  </a:solidFill>
+                </a:rPr>
+                <a:t>Smartbands</a:t>
+              </a:r>
+              <a:endParaRPr lang="pt-BR" sz="2400" b="1" dirty="0"/>
+            </a:p>
+          </p:txBody>
+        </p:sp>
+      </p:grpSp>
     </p:spTree>
     <p:extLst>
       <p:ext uri="{BB962C8B-B14F-4D97-AF65-F5344CB8AC3E}">
@@ -7011,7 +12184,7 @@
           </a:blip>
           <a:srcRect/>
           <a:stretch>
-            <a:fillRect l="-65000" t="-53000" r="-1000" b="-1000"/>
+            <a:fillRect l="-1000" t="-1000" r="-10000" b="-349000"/>
           </a:stretch>
         </a:blipFill>
         <a:effectLst/>
@@ -7022,7 +12195,7 @@
         <p:cNvPr id="1" name="">
           <a:extLst>
             <a:ext uri="{FF2B5EF4-FFF2-40B4-BE49-F238E27FC236}">
-              <a16:creationId xmlns:a16="http://schemas.microsoft.com/office/drawing/2014/main" id="{7640444F-2AD9-C866-F6C7-92A4898CA263}"/>
+              <a16:creationId xmlns:a16="http://schemas.microsoft.com/office/drawing/2014/main" id="{16CD51F8-266E-1692-55E1-511BD52D65F1}"/>
             </a:ext>
           </a:extLst>
         </p:cNvPr>
@@ -7039,195 +12212,31 @@
       </p:grpSpPr>
       <p:sp>
         <p:nvSpPr>
-          <p:cNvPr id="2" name="Subtítulo 2">
-            <a:extLst>
-              <a:ext uri="{FF2B5EF4-FFF2-40B4-BE49-F238E27FC236}">
-                <a16:creationId xmlns:a16="http://schemas.microsoft.com/office/drawing/2014/main" id="{DA2AF359-F691-D153-7DAE-16CDE08ACAC5}"/>
-              </a:ext>
-            </a:extLst>
-          </p:cNvPr>
-          <p:cNvSpPr txBox="1">
-            <a:spLocks/>
+          <p:cNvPr id="3" name="Subtítulo 2">
+            <a:extLst>
+              <a:ext uri="{FF2B5EF4-FFF2-40B4-BE49-F238E27FC236}">
+                <a16:creationId xmlns:a16="http://schemas.microsoft.com/office/drawing/2014/main" id="{459075D4-282A-CDD3-EFD1-C21F01D74E5B}"/>
+              </a:ext>
+            </a:extLst>
+          </p:cNvPr>
+          <p:cNvSpPr>
+            <a:spLocks noGrp="1"/>
           </p:cNvSpPr>
-          <p:nvPr/>
+          <p:nvPr>
+            <p:ph type="subTitle" idx="1"/>
+          </p:nvPr>
         </p:nvSpPr>
         <p:spPr>
           <a:xfrm>
-            <a:off x="1225124" y="1579087"/>
-            <a:ext cx="9741600" cy="365748"/>
-          </a:xfrm>
-          <a:prstGeom prst="rect">
-            <a:avLst/>
-          </a:prstGeom>
+            <a:off x="1225124" y="1580400"/>
+            <a:ext cx="9741751" cy="365748"/>
+          </a:xfrm>
         </p:spPr>
         <p:txBody>
-          <a:bodyPr vert="horz" lIns="91440" tIns="45720" rIns="91440" bIns="45720" rtlCol="0">
+          <a:bodyPr>
             <a:noAutofit/>
           </a:bodyPr>
-          <a:lstStyle>
-            <a:lvl1pPr marL="0" indent="0" algn="ctr" defTabSz="914400" rtl="0" eaLnBrk="1" latinLnBrk="0" hangingPunct="1">
-              <a:lnSpc>
-                <a:spcPct val="90000"/>
-              </a:lnSpc>
-              <a:spcBef>
-                <a:spcPts val="1000"/>
-              </a:spcBef>
-              <a:buFont typeface="Arial" panose="020B0604020202020204" pitchFamily="34" charset="0"/>
-              <a:buNone/>
-              <a:defRPr sz="2400" kern="1200">
-                <a:solidFill>
-                  <a:schemeClr val="tx1"/>
-                </a:solidFill>
-                <a:latin typeface="+mn-lt"/>
-                <a:ea typeface="+mn-ea"/>
-                <a:cs typeface="+mn-cs"/>
-              </a:defRPr>
-            </a:lvl1pPr>
-            <a:lvl2pPr marL="457200" indent="0" algn="ctr" defTabSz="914400" rtl="0" eaLnBrk="1" latinLnBrk="0" hangingPunct="1">
-              <a:lnSpc>
-                <a:spcPct val="90000"/>
-              </a:lnSpc>
-              <a:spcBef>
-                <a:spcPts val="500"/>
-              </a:spcBef>
-              <a:buFont typeface="Arial" panose="020B0604020202020204" pitchFamily="34" charset="0"/>
-              <a:buNone/>
-              <a:defRPr sz="2000" kern="1200">
-                <a:solidFill>
-                  <a:schemeClr val="tx1"/>
-                </a:solidFill>
-                <a:latin typeface="+mn-lt"/>
-                <a:ea typeface="+mn-ea"/>
-                <a:cs typeface="+mn-cs"/>
-              </a:defRPr>
-            </a:lvl2pPr>
-            <a:lvl3pPr marL="914400" indent="0" algn="ctr" defTabSz="914400" rtl="0" eaLnBrk="1" latinLnBrk="0" hangingPunct="1">
-              <a:lnSpc>
-                <a:spcPct val="90000"/>
-              </a:lnSpc>
-              <a:spcBef>
-                <a:spcPts val="500"/>
-              </a:spcBef>
-              <a:buFont typeface="Arial" panose="020B0604020202020204" pitchFamily="34" charset="0"/>
-              <a:buNone/>
-              <a:defRPr sz="1800" kern="1200">
-                <a:solidFill>
-                  <a:schemeClr val="tx1"/>
-                </a:solidFill>
-                <a:latin typeface="+mn-lt"/>
-                <a:ea typeface="+mn-ea"/>
-                <a:cs typeface="+mn-cs"/>
-              </a:defRPr>
-            </a:lvl3pPr>
-            <a:lvl4pPr marL="1371600" indent="0" algn="ctr" defTabSz="914400" rtl="0" eaLnBrk="1" latinLnBrk="0" hangingPunct="1">
-              <a:lnSpc>
-                <a:spcPct val="90000"/>
-              </a:lnSpc>
-              <a:spcBef>
-                <a:spcPts val="500"/>
-              </a:spcBef>
-              <a:buFont typeface="Arial" panose="020B0604020202020204" pitchFamily="34" charset="0"/>
-              <a:buNone/>
-              <a:defRPr sz="1600" kern="1200">
-                <a:solidFill>
-                  <a:schemeClr val="tx1"/>
-                </a:solidFill>
-                <a:latin typeface="+mn-lt"/>
-                <a:ea typeface="+mn-ea"/>
-                <a:cs typeface="+mn-cs"/>
-              </a:defRPr>
-            </a:lvl4pPr>
-            <a:lvl5pPr marL="1828800" indent="0" algn="ctr" defTabSz="914400" rtl="0" eaLnBrk="1" latinLnBrk="0" hangingPunct="1">
-              <a:lnSpc>
-                <a:spcPct val="90000"/>
-              </a:lnSpc>
-              <a:spcBef>
-                <a:spcPts val="500"/>
-              </a:spcBef>
-              <a:buFont typeface="Arial" panose="020B0604020202020204" pitchFamily="34" charset="0"/>
-              <a:buNone/>
-              <a:defRPr sz="1600" kern="1200">
-                <a:solidFill>
-                  <a:schemeClr val="tx1"/>
-                </a:solidFill>
-                <a:latin typeface="+mn-lt"/>
-                <a:ea typeface="+mn-ea"/>
-                <a:cs typeface="+mn-cs"/>
-              </a:defRPr>
-            </a:lvl5pPr>
-            <a:lvl6pPr marL="2286000" indent="0" algn="ctr" defTabSz="914400" rtl="0" eaLnBrk="1" latinLnBrk="0" hangingPunct="1">
-              <a:lnSpc>
-                <a:spcPct val="90000"/>
-              </a:lnSpc>
-              <a:spcBef>
-                <a:spcPts val="500"/>
-              </a:spcBef>
-              <a:buFont typeface="Arial" panose="020B0604020202020204" pitchFamily="34" charset="0"/>
-              <a:buNone/>
-              <a:defRPr sz="1600" kern="1200">
-                <a:solidFill>
-                  <a:schemeClr val="tx1"/>
-                </a:solidFill>
-                <a:latin typeface="+mn-lt"/>
-                <a:ea typeface="+mn-ea"/>
-                <a:cs typeface="+mn-cs"/>
-              </a:defRPr>
-            </a:lvl6pPr>
-            <a:lvl7pPr marL="2743200" indent="0" algn="ctr" defTabSz="914400" rtl="0" eaLnBrk="1" latinLnBrk="0" hangingPunct="1">
-              <a:lnSpc>
-                <a:spcPct val="90000"/>
-              </a:lnSpc>
-              <a:spcBef>
-                <a:spcPts val="500"/>
-              </a:spcBef>
-              <a:buFont typeface="Arial" panose="020B0604020202020204" pitchFamily="34" charset="0"/>
-              <a:buNone/>
-              <a:defRPr sz="1600" kern="1200">
-                <a:solidFill>
-                  <a:schemeClr val="tx1"/>
-                </a:solidFill>
-                <a:latin typeface="+mn-lt"/>
-                <a:ea typeface="+mn-ea"/>
-                <a:cs typeface="+mn-cs"/>
-              </a:defRPr>
-            </a:lvl7pPr>
-            <a:lvl8pPr marL="3200400" indent="0" algn="ctr" defTabSz="914400" rtl="0" eaLnBrk="1" latinLnBrk="0" hangingPunct="1">
-              <a:lnSpc>
-                <a:spcPct val="90000"/>
-              </a:lnSpc>
-              <a:spcBef>
-                <a:spcPts val="500"/>
-              </a:spcBef>
-              <a:buFont typeface="Arial" panose="020B0604020202020204" pitchFamily="34" charset="0"/>
-              <a:buNone/>
-              <a:defRPr sz="1600" kern="1200">
-                <a:solidFill>
-                  <a:schemeClr val="tx1"/>
-                </a:solidFill>
-                <a:latin typeface="+mn-lt"/>
-                <a:ea typeface="+mn-ea"/>
-                <a:cs typeface="+mn-cs"/>
-              </a:defRPr>
-            </a:lvl8pPr>
-            <a:lvl9pPr marL="3657600" indent="0" algn="ctr" defTabSz="914400" rtl="0" eaLnBrk="1" latinLnBrk="0" hangingPunct="1">
-              <a:lnSpc>
-                <a:spcPct val="90000"/>
-              </a:lnSpc>
-              <a:spcBef>
-                <a:spcPts val="500"/>
-              </a:spcBef>
-              <a:buFont typeface="Arial" panose="020B0604020202020204" pitchFamily="34" charset="0"/>
-              <a:buNone/>
-              <a:defRPr sz="1600" kern="1200">
-                <a:solidFill>
-                  <a:schemeClr val="tx1"/>
-                </a:solidFill>
-                <a:latin typeface="+mn-lt"/>
-                <a:ea typeface="+mn-ea"/>
-                <a:cs typeface="+mn-cs"/>
-              </a:defRPr>
-            </a:lvl9pPr>
-          </a:lstStyle>
+          <a:lstStyle/>
           <a:p>
             <a:pPr algn="l"/>
             <a:r>
@@ -7236,7 +12245,7 @@
                   <a:schemeClr val="bg1"/>
                 </a:solidFill>
               </a:rPr>
-              <a:t>VANTAGENS </a:t>
+              <a:t>PROTOCOLO E DINÂMICA DE COMUNICAÇÃO</a:t>
             </a:r>
           </a:p>
         </p:txBody>
@@ -7246,7 +12255,7 @@
           <p:cNvPr id="4" name="Google Shape;140;p3">
             <a:extLst>
               <a:ext uri="{FF2B5EF4-FFF2-40B4-BE49-F238E27FC236}">
-                <a16:creationId xmlns:a16="http://schemas.microsoft.com/office/drawing/2014/main" id="{46DDD45E-44AA-4482-EF4E-7353A31E8E85}"/>
+                <a16:creationId xmlns:a16="http://schemas.microsoft.com/office/drawing/2014/main" id="{57578539-0BF2-AE84-8A14-851FC4712780}"/>
               </a:ext>
             </a:extLst>
           </p:cNvPr>
@@ -7277,454 +12286,115 @@
       </p:cxnSp>
       <p:sp>
         <p:nvSpPr>
-          <p:cNvPr id="6" name="Subtítulo 5">
-            <a:extLst>
-              <a:ext uri="{FF2B5EF4-FFF2-40B4-BE49-F238E27FC236}">
-                <a16:creationId xmlns:a16="http://schemas.microsoft.com/office/drawing/2014/main" id="{F22B3579-2CB5-EA14-2616-34004DBEF1AF}"/>
-              </a:ext>
-            </a:extLst>
-          </p:cNvPr>
-          <p:cNvSpPr>
-            <a:spLocks noGrp="1"/>
-          </p:cNvSpPr>
-          <p:nvPr>
-            <p:ph type="subTitle" idx="1"/>
-          </p:nvPr>
-        </p:nvSpPr>
-        <p:spPr>
-          <a:xfrm>
-            <a:off x="1973942" y="2747397"/>
-            <a:ext cx="8577943" cy="495298"/>
-          </a:xfrm>
-        </p:spPr>
-        <p:txBody>
-          <a:bodyPr/>
-          <a:lstStyle/>
-          <a:p>
-            <a:pPr algn="l"/>
-            <a:r>
-              <a:rPr lang="pt-BR" dirty="0">
-                <a:solidFill>
-                  <a:schemeClr val="bg1"/>
-                </a:solidFill>
-              </a:rPr>
-              <a:t>Baixo consumo de energia (especialmente nas versões BLE)</a:t>
-            </a:r>
-          </a:p>
-        </p:txBody>
-      </p:sp>
-      <p:sp>
-        <p:nvSpPr>
-          <p:cNvPr id="11" name="Subtítulo 5">
-            <a:extLst>
-              <a:ext uri="{FF2B5EF4-FFF2-40B4-BE49-F238E27FC236}">
-                <a16:creationId xmlns:a16="http://schemas.microsoft.com/office/drawing/2014/main" id="{A46B27DF-209C-4F30-6BFF-B5C10E91F376}"/>
-              </a:ext>
-            </a:extLst>
-          </p:cNvPr>
-          <p:cNvSpPr txBox="1">
-            <a:spLocks/>
-          </p:cNvSpPr>
+          <p:cNvPr id="2" name="CaixaDeTexto 1">
+            <a:extLst>
+              <a:ext uri="{FF2B5EF4-FFF2-40B4-BE49-F238E27FC236}">
+                <a16:creationId xmlns:a16="http://schemas.microsoft.com/office/drawing/2014/main" id="{4D610E73-D52F-B790-AF6C-6D203B576C49}"/>
+              </a:ext>
+            </a:extLst>
+          </p:cNvPr>
+          <p:cNvSpPr txBox="1"/>
           <p:nvPr/>
         </p:nvSpPr>
         <p:spPr>
           <a:xfrm>
-            <a:off x="1973941" y="3616056"/>
-            <a:ext cx="8577943" cy="495298"/>
+            <a:off x="1829924" y="2470034"/>
+            <a:ext cx="9136951" cy="3046988"/>
+          </a:xfrm>
+          <a:prstGeom prst="rect">
+            <a:avLst/>
+          </a:prstGeom>
+          <a:noFill/>
+        </p:spPr>
+        <p:txBody>
+          <a:bodyPr wrap="square">
+            <a:spAutoFit/>
+          </a:bodyPr>
+          <a:lstStyle/>
+          <a:p>
+            <a:r>
+              <a:rPr lang="pt-BR" sz="2400" b="1" dirty="0">
+                <a:solidFill>
+                  <a:schemeClr val="bg1"/>
+                </a:solidFill>
+              </a:rPr>
+              <a:t>O Bluetooth opera na faixa de frequência de 2,4 GHz, utilizando a técnica de espalhamento espectral por salto de frequência (</a:t>
+            </a:r>
+            <a:r>
+              <a:rPr lang="pt-BR" sz="2400" b="1" dirty="0" err="1">
+                <a:solidFill>
+                  <a:schemeClr val="bg1"/>
+                </a:solidFill>
+              </a:rPr>
+              <a:t>frequency-hopping</a:t>
+            </a:r>
+            <a:r>
+              <a:rPr lang="pt-BR" sz="2400" b="1" dirty="0">
+                <a:solidFill>
+                  <a:schemeClr val="bg1"/>
+                </a:solidFill>
+              </a:rPr>
+              <a:t> spread </a:t>
+            </a:r>
+            <a:r>
+              <a:rPr lang="pt-BR" sz="2400" b="1" dirty="0" err="1">
+                <a:solidFill>
+                  <a:schemeClr val="bg1"/>
+                </a:solidFill>
+              </a:rPr>
+              <a:t>spectrum</a:t>
+            </a:r>
+            <a:r>
+              <a:rPr lang="pt-BR" sz="2400" b="1" dirty="0">
+                <a:solidFill>
+                  <a:schemeClr val="bg1"/>
+                </a:solidFill>
+              </a:rPr>
+              <a:t>). Essa técnica divide a faixa de 2,4 GHz em 79 canais de 1 MHz cada e alterna rapidamente entre eles durante a transmissão, reduzindo a interferência e melhorando a confiabilidade da comunicação. Além disso, o Bluetooth suporta diferentes taxas de transmissão de dados, dependendo da versão e do modo de operação, como a taxa de dados melhorada (EDR) introduzida no Bluetooth 2.0.</a:t>
+            </a:r>
+          </a:p>
+        </p:txBody>
+      </p:sp>
+      <p:pic>
+        <p:nvPicPr>
+          <p:cNvPr id="6" name="Gráfico 5">
+            <a:extLst>
+              <a:ext uri="{FF2B5EF4-FFF2-40B4-BE49-F238E27FC236}">
+                <a16:creationId xmlns:a16="http://schemas.microsoft.com/office/drawing/2014/main" id="{A29BCABD-EE6C-D232-E4D0-59A4EC837995}"/>
+              </a:ext>
+            </a:extLst>
+          </p:cNvPr>
+          <p:cNvPicPr>
+            <a:picLocks noChangeAspect="1"/>
+          </p:cNvPicPr>
+          <p:nvPr/>
+        </p:nvPicPr>
+        <p:blipFill>
+          <a:blip r:embed="rId3">
+            <a:extLst>
+              <a:ext uri="{96DAC541-7B7A-43D3-8B79-37D633B846F1}">
+                <asvg:svgBlip xmlns:asvg="http://schemas.microsoft.com/office/drawing/2016/SVG/main" r:embed="rId4"/>
+              </a:ext>
+            </a:extLst>
+          </a:blip>
+          <a:stretch>
+            <a:fillRect/>
+          </a:stretch>
+        </p:blipFill>
+        <p:spPr>
+          <a:xfrm>
+            <a:off x="1225124" y="2599925"/>
+            <a:ext cx="604800" cy="604800"/>
           </a:xfrm>
           <a:prstGeom prst="rect">
             <a:avLst/>
           </a:prstGeom>
         </p:spPr>
-        <p:txBody>
-          <a:bodyPr vert="horz" lIns="91440" tIns="45720" rIns="91440" bIns="45720" rtlCol="0">
-            <a:normAutofit/>
-          </a:bodyPr>
-          <a:lstStyle>
-            <a:lvl1pPr marL="0" indent="0" algn="ctr" defTabSz="914400" rtl="0" eaLnBrk="1" latinLnBrk="0" hangingPunct="1">
-              <a:lnSpc>
-                <a:spcPct val="90000"/>
-              </a:lnSpc>
-              <a:spcBef>
-                <a:spcPts val="1000"/>
-              </a:spcBef>
-              <a:buFont typeface="Arial" panose="020B0604020202020204" pitchFamily="34" charset="0"/>
-              <a:buNone/>
-              <a:defRPr sz="2400" kern="1200">
-                <a:solidFill>
-                  <a:schemeClr val="tx1"/>
-                </a:solidFill>
-                <a:latin typeface="+mn-lt"/>
-                <a:ea typeface="+mn-ea"/>
-                <a:cs typeface="+mn-cs"/>
-              </a:defRPr>
-            </a:lvl1pPr>
-            <a:lvl2pPr marL="457200" indent="0" algn="ctr" defTabSz="914400" rtl="0" eaLnBrk="1" latinLnBrk="0" hangingPunct="1">
-              <a:lnSpc>
-                <a:spcPct val="90000"/>
-              </a:lnSpc>
-              <a:spcBef>
-                <a:spcPts val="500"/>
-              </a:spcBef>
-              <a:buFont typeface="Arial" panose="020B0604020202020204" pitchFamily="34" charset="0"/>
-              <a:buNone/>
-              <a:defRPr sz="2000" kern="1200">
-                <a:solidFill>
-                  <a:schemeClr val="tx1"/>
-                </a:solidFill>
-                <a:latin typeface="+mn-lt"/>
-                <a:ea typeface="+mn-ea"/>
-                <a:cs typeface="+mn-cs"/>
-              </a:defRPr>
-            </a:lvl2pPr>
-            <a:lvl3pPr marL="914400" indent="0" algn="ctr" defTabSz="914400" rtl="0" eaLnBrk="1" latinLnBrk="0" hangingPunct="1">
-              <a:lnSpc>
-                <a:spcPct val="90000"/>
-              </a:lnSpc>
-              <a:spcBef>
-                <a:spcPts val="500"/>
-              </a:spcBef>
-              <a:buFont typeface="Arial" panose="020B0604020202020204" pitchFamily="34" charset="0"/>
-              <a:buNone/>
-              <a:defRPr sz="1800" kern="1200">
-                <a:solidFill>
-                  <a:schemeClr val="tx1"/>
-                </a:solidFill>
-                <a:latin typeface="+mn-lt"/>
-                <a:ea typeface="+mn-ea"/>
-                <a:cs typeface="+mn-cs"/>
-              </a:defRPr>
-            </a:lvl3pPr>
-            <a:lvl4pPr marL="1371600" indent="0" algn="ctr" defTabSz="914400" rtl="0" eaLnBrk="1" latinLnBrk="0" hangingPunct="1">
-              <a:lnSpc>
-                <a:spcPct val="90000"/>
-              </a:lnSpc>
-              <a:spcBef>
-                <a:spcPts val="500"/>
-              </a:spcBef>
-              <a:buFont typeface="Arial" panose="020B0604020202020204" pitchFamily="34" charset="0"/>
-              <a:buNone/>
-              <a:defRPr sz="1600" kern="1200">
-                <a:solidFill>
-                  <a:schemeClr val="tx1"/>
-                </a:solidFill>
-                <a:latin typeface="+mn-lt"/>
-                <a:ea typeface="+mn-ea"/>
-                <a:cs typeface="+mn-cs"/>
-              </a:defRPr>
-            </a:lvl4pPr>
-            <a:lvl5pPr marL="1828800" indent="0" algn="ctr" defTabSz="914400" rtl="0" eaLnBrk="1" latinLnBrk="0" hangingPunct="1">
-              <a:lnSpc>
-                <a:spcPct val="90000"/>
-              </a:lnSpc>
-              <a:spcBef>
-                <a:spcPts val="500"/>
-              </a:spcBef>
-              <a:buFont typeface="Arial" panose="020B0604020202020204" pitchFamily="34" charset="0"/>
-              <a:buNone/>
-              <a:defRPr sz="1600" kern="1200">
-                <a:solidFill>
-                  <a:schemeClr val="tx1"/>
-                </a:solidFill>
-                <a:latin typeface="+mn-lt"/>
-                <a:ea typeface="+mn-ea"/>
-                <a:cs typeface="+mn-cs"/>
-              </a:defRPr>
-            </a:lvl5pPr>
-            <a:lvl6pPr marL="2286000" indent="0" algn="ctr" defTabSz="914400" rtl="0" eaLnBrk="1" latinLnBrk="0" hangingPunct="1">
-              <a:lnSpc>
-                <a:spcPct val="90000"/>
-              </a:lnSpc>
-              <a:spcBef>
-                <a:spcPts val="500"/>
-              </a:spcBef>
-              <a:buFont typeface="Arial" panose="020B0604020202020204" pitchFamily="34" charset="0"/>
-              <a:buNone/>
-              <a:defRPr sz="1600" kern="1200">
-                <a:solidFill>
-                  <a:schemeClr val="tx1"/>
-                </a:solidFill>
-                <a:latin typeface="+mn-lt"/>
-                <a:ea typeface="+mn-ea"/>
-                <a:cs typeface="+mn-cs"/>
-              </a:defRPr>
-            </a:lvl6pPr>
-            <a:lvl7pPr marL="2743200" indent="0" algn="ctr" defTabSz="914400" rtl="0" eaLnBrk="1" latinLnBrk="0" hangingPunct="1">
-              <a:lnSpc>
-                <a:spcPct val="90000"/>
-              </a:lnSpc>
-              <a:spcBef>
-                <a:spcPts val="500"/>
-              </a:spcBef>
-              <a:buFont typeface="Arial" panose="020B0604020202020204" pitchFamily="34" charset="0"/>
-              <a:buNone/>
-              <a:defRPr sz="1600" kern="1200">
-                <a:solidFill>
-                  <a:schemeClr val="tx1"/>
-                </a:solidFill>
-                <a:latin typeface="+mn-lt"/>
-                <a:ea typeface="+mn-ea"/>
-                <a:cs typeface="+mn-cs"/>
-              </a:defRPr>
-            </a:lvl7pPr>
-            <a:lvl8pPr marL="3200400" indent="0" algn="ctr" defTabSz="914400" rtl="0" eaLnBrk="1" latinLnBrk="0" hangingPunct="1">
-              <a:lnSpc>
-                <a:spcPct val="90000"/>
-              </a:lnSpc>
-              <a:spcBef>
-                <a:spcPts val="500"/>
-              </a:spcBef>
-              <a:buFont typeface="Arial" panose="020B0604020202020204" pitchFamily="34" charset="0"/>
-              <a:buNone/>
-              <a:defRPr sz="1600" kern="1200">
-                <a:solidFill>
-                  <a:schemeClr val="tx1"/>
-                </a:solidFill>
-                <a:latin typeface="+mn-lt"/>
-                <a:ea typeface="+mn-ea"/>
-                <a:cs typeface="+mn-cs"/>
-              </a:defRPr>
-            </a:lvl8pPr>
-            <a:lvl9pPr marL="3657600" indent="0" algn="ctr" defTabSz="914400" rtl="0" eaLnBrk="1" latinLnBrk="0" hangingPunct="1">
-              <a:lnSpc>
-                <a:spcPct val="90000"/>
-              </a:lnSpc>
-              <a:spcBef>
-                <a:spcPts val="500"/>
-              </a:spcBef>
-              <a:buFont typeface="Arial" panose="020B0604020202020204" pitchFamily="34" charset="0"/>
-              <a:buNone/>
-              <a:defRPr sz="1600" kern="1200">
-                <a:solidFill>
-                  <a:schemeClr val="tx1"/>
-                </a:solidFill>
-                <a:latin typeface="+mn-lt"/>
-                <a:ea typeface="+mn-ea"/>
-                <a:cs typeface="+mn-cs"/>
-              </a:defRPr>
-            </a:lvl9pPr>
-          </a:lstStyle>
-          <a:p>
-            <a:pPr algn="l"/>
-            <a:r>
-              <a:rPr lang="pt-BR" dirty="0">
-                <a:solidFill>
-                  <a:schemeClr val="bg1"/>
-                </a:solidFill>
-              </a:rPr>
-              <a:t>Comunicação segura com autenticação e criptografia;</a:t>
-            </a:r>
-          </a:p>
-        </p:txBody>
-      </p:sp>
-      <p:sp>
-        <p:nvSpPr>
-          <p:cNvPr id="14" name="Subtítulo 5">
-            <a:extLst>
-              <a:ext uri="{FF2B5EF4-FFF2-40B4-BE49-F238E27FC236}">
-                <a16:creationId xmlns:a16="http://schemas.microsoft.com/office/drawing/2014/main" id="{D3D1B74F-5E25-66B0-1D04-BE89E44D3F80}"/>
-              </a:ext>
-            </a:extLst>
-          </p:cNvPr>
-          <p:cNvSpPr txBox="1">
-            <a:spLocks/>
-          </p:cNvSpPr>
-          <p:nvPr/>
-        </p:nvSpPr>
-        <p:spPr>
-          <a:xfrm>
-            <a:off x="1973941" y="4544484"/>
-            <a:ext cx="8341634" cy="495298"/>
-          </a:xfrm>
-          <a:prstGeom prst="rect">
-            <a:avLst/>
-          </a:prstGeom>
-        </p:spPr>
-        <p:txBody>
-          <a:bodyPr vert="horz" lIns="91440" tIns="45720" rIns="91440" bIns="45720" rtlCol="0">
-            <a:normAutofit/>
-          </a:bodyPr>
-          <a:lstStyle>
-            <a:lvl1pPr marL="0" indent="0" algn="ctr" defTabSz="914400" rtl="0" eaLnBrk="1" latinLnBrk="0" hangingPunct="1">
-              <a:lnSpc>
-                <a:spcPct val="90000"/>
-              </a:lnSpc>
-              <a:spcBef>
-                <a:spcPts val="1000"/>
-              </a:spcBef>
-              <a:buFont typeface="Arial" panose="020B0604020202020204" pitchFamily="34" charset="0"/>
-              <a:buNone/>
-              <a:defRPr sz="2400" kern="1200">
-                <a:solidFill>
-                  <a:schemeClr val="tx1"/>
-                </a:solidFill>
-                <a:latin typeface="+mn-lt"/>
-                <a:ea typeface="+mn-ea"/>
-                <a:cs typeface="+mn-cs"/>
-              </a:defRPr>
-            </a:lvl1pPr>
-            <a:lvl2pPr marL="457200" indent="0" algn="ctr" defTabSz="914400" rtl="0" eaLnBrk="1" latinLnBrk="0" hangingPunct="1">
-              <a:lnSpc>
-                <a:spcPct val="90000"/>
-              </a:lnSpc>
-              <a:spcBef>
-                <a:spcPts val="500"/>
-              </a:spcBef>
-              <a:buFont typeface="Arial" panose="020B0604020202020204" pitchFamily="34" charset="0"/>
-              <a:buNone/>
-              <a:defRPr sz="2000" kern="1200">
-                <a:solidFill>
-                  <a:schemeClr val="tx1"/>
-                </a:solidFill>
-                <a:latin typeface="+mn-lt"/>
-                <a:ea typeface="+mn-ea"/>
-                <a:cs typeface="+mn-cs"/>
-              </a:defRPr>
-            </a:lvl2pPr>
-            <a:lvl3pPr marL="914400" indent="0" algn="ctr" defTabSz="914400" rtl="0" eaLnBrk="1" latinLnBrk="0" hangingPunct="1">
-              <a:lnSpc>
-                <a:spcPct val="90000"/>
-              </a:lnSpc>
-              <a:spcBef>
-                <a:spcPts val="500"/>
-              </a:spcBef>
-              <a:buFont typeface="Arial" panose="020B0604020202020204" pitchFamily="34" charset="0"/>
-              <a:buNone/>
-              <a:defRPr sz="1800" kern="1200">
-                <a:solidFill>
-                  <a:schemeClr val="tx1"/>
-                </a:solidFill>
-                <a:latin typeface="+mn-lt"/>
-                <a:ea typeface="+mn-ea"/>
-                <a:cs typeface="+mn-cs"/>
-              </a:defRPr>
-            </a:lvl3pPr>
-            <a:lvl4pPr marL="1371600" indent="0" algn="ctr" defTabSz="914400" rtl="0" eaLnBrk="1" latinLnBrk="0" hangingPunct="1">
-              <a:lnSpc>
-                <a:spcPct val="90000"/>
-              </a:lnSpc>
-              <a:spcBef>
-                <a:spcPts val="500"/>
-              </a:spcBef>
-              <a:buFont typeface="Arial" panose="020B0604020202020204" pitchFamily="34" charset="0"/>
-              <a:buNone/>
-              <a:defRPr sz="1600" kern="1200">
-                <a:solidFill>
-                  <a:schemeClr val="tx1"/>
-                </a:solidFill>
-                <a:latin typeface="+mn-lt"/>
-                <a:ea typeface="+mn-ea"/>
-                <a:cs typeface="+mn-cs"/>
-              </a:defRPr>
-            </a:lvl4pPr>
-            <a:lvl5pPr marL="1828800" indent="0" algn="ctr" defTabSz="914400" rtl="0" eaLnBrk="1" latinLnBrk="0" hangingPunct="1">
-              <a:lnSpc>
-                <a:spcPct val="90000"/>
-              </a:lnSpc>
-              <a:spcBef>
-                <a:spcPts val="500"/>
-              </a:spcBef>
-              <a:buFont typeface="Arial" panose="020B0604020202020204" pitchFamily="34" charset="0"/>
-              <a:buNone/>
-              <a:defRPr sz="1600" kern="1200">
-                <a:solidFill>
-                  <a:schemeClr val="tx1"/>
-                </a:solidFill>
-                <a:latin typeface="+mn-lt"/>
-                <a:ea typeface="+mn-ea"/>
-                <a:cs typeface="+mn-cs"/>
-              </a:defRPr>
-            </a:lvl5pPr>
-            <a:lvl6pPr marL="2286000" indent="0" algn="ctr" defTabSz="914400" rtl="0" eaLnBrk="1" latinLnBrk="0" hangingPunct="1">
-              <a:lnSpc>
-                <a:spcPct val="90000"/>
-              </a:lnSpc>
-              <a:spcBef>
-                <a:spcPts val="500"/>
-              </a:spcBef>
-              <a:buFont typeface="Arial" panose="020B0604020202020204" pitchFamily="34" charset="0"/>
-              <a:buNone/>
-              <a:defRPr sz="1600" kern="1200">
-                <a:solidFill>
-                  <a:schemeClr val="tx1"/>
-                </a:solidFill>
-                <a:latin typeface="+mn-lt"/>
-                <a:ea typeface="+mn-ea"/>
-                <a:cs typeface="+mn-cs"/>
-              </a:defRPr>
-            </a:lvl6pPr>
-            <a:lvl7pPr marL="2743200" indent="0" algn="ctr" defTabSz="914400" rtl="0" eaLnBrk="1" latinLnBrk="0" hangingPunct="1">
-              <a:lnSpc>
-                <a:spcPct val="90000"/>
-              </a:lnSpc>
-              <a:spcBef>
-                <a:spcPts val="500"/>
-              </a:spcBef>
-              <a:buFont typeface="Arial" panose="020B0604020202020204" pitchFamily="34" charset="0"/>
-              <a:buNone/>
-              <a:defRPr sz="1600" kern="1200">
-                <a:solidFill>
-                  <a:schemeClr val="tx1"/>
-                </a:solidFill>
-                <a:latin typeface="+mn-lt"/>
-                <a:ea typeface="+mn-ea"/>
-                <a:cs typeface="+mn-cs"/>
-              </a:defRPr>
-            </a:lvl7pPr>
-            <a:lvl8pPr marL="3200400" indent="0" algn="ctr" defTabSz="914400" rtl="0" eaLnBrk="1" latinLnBrk="0" hangingPunct="1">
-              <a:lnSpc>
-                <a:spcPct val="90000"/>
-              </a:lnSpc>
-              <a:spcBef>
-                <a:spcPts val="500"/>
-              </a:spcBef>
-              <a:buFont typeface="Arial" panose="020B0604020202020204" pitchFamily="34" charset="0"/>
-              <a:buNone/>
-              <a:defRPr sz="1600" kern="1200">
-                <a:solidFill>
-                  <a:schemeClr val="tx1"/>
-                </a:solidFill>
-                <a:latin typeface="+mn-lt"/>
-                <a:ea typeface="+mn-ea"/>
-                <a:cs typeface="+mn-cs"/>
-              </a:defRPr>
-            </a:lvl8pPr>
-            <a:lvl9pPr marL="3657600" indent="0" algn="ctr" defTabSz="914400" rtl="0" eaLnBrk="1" latinLnBrk="0" hangingPunct="1">
-              <a:lnSpc>
-                <a:spcPct val="90000"/>
-              </a:lnSpc>
-              <a:spcBef>
-                <a:spcPts val="500"/>
-              </a:spcBef>
-              <a:buFont typeface="Arial" panose="020B0604020202020204" pitchFamily="34" charset="0"/>
-              <a:buNone/>
-              <a:defRPr sz="1600" kern="1200">
-                <a:solidFill>
-                  <a:schemeClr val="tx1"/>
-                </a:solidFill>
-                <a:latin typeface="+mn-lt"/>
-                <a:ea typeface="+mn-ea"/>
-                <a:cs typeface="+mn-cs"/>
-              </a:defRPr>
-            </a:lvl9pPr>
-          </a:lstStyle>
-          <a:p>
-            <a:pPr algn="l"/>
-            <a:r>
-              <a:rPr lang="pt-BR" dirty="0">
-                <a:solidFill>
-                  <a:schemeClr val="bg1"/>
-                </a:solidFill>
-              </a:rPr>
-              <a:t>Conexão automática e pareamento simples.</a:t>
-            </a:r>
-          </a:p>
-        </p:txBody>
-      </p:sp>
+      </p:pic>
     </p:spTree>
     <p:extLst>
       <p:ext uri="{BB962C8B-B14F-4D97-AF65-F5344CB8AC3E}">
-        <p14:creationId xmlns:p14="http://schemas.microsoft.com/office/powerpoint/2010/main" val="2824103943"/>
+        <p14:creationId xmlns:p14="http://schemas.microsoft.com/office/powerpoint/2010/main" val="378959159"/>
       </p:ext>
     </p:extLst>
   </p:cSld>
@@ -7745,7 +12415,7 @@
           </a:blip>
           <a:srcRect/>
           <a:stretch>
-            <a:fillRect t="-58000" r="-47000" b="-2000"/>
+            <a:fillRect l="-1000" t="-1000" r="-10000" b="-349000"/>
           </a:stretch>
         </a:blipFill>
         <a:effectLst/>
@@ -7756,7 +12426,7 @@
         <p:cNvPr id="1" name="">
           <a:extLst>
             <a:ext uri="{FF2B5EF4-FFF2-40B4-BE49-F238E27FC236}">
-              <a16:creationId xmlns:a16="http://schemas.microsoft.com/office/drawing/2014/main" id="{B12C8E9F-ABAC-1621-9816-15247BBD9CDA}"/>
+              <a16:creationId xmlns:a16="http://schemas.microsoft.com/office/drawing/2014/main" id="{93A877ED-896F-5C5D-2F69-7F7E1B985570}"/>
             </a:ext>
           </a:extLst>
         </p:cNvPr>
@@ -7773,195 +12443,31 @@
       </p:grpSpPr>
       <p:sp>
         <p:nvSpPr>
-          <p:cNvPr id="2" name="Subtítulo 2">
-            <a:extLst>
-              <a:ext uri="{FF2B5EF4-FFF2-40B4-BE49-F238E27FC236}">
-                <a16:creationId xmlns:a16="http://schemas.microsoft.com/office/drawing/2014/main" id="{121861EF-E2F4-539A-803B-424644788B1C}"/>
-              </a:ext>
-            </a:extLst>
-          </p:cNvPr>
-          <p:cNvSpPr txBox="1">
-            <a:spLocks/>
+          <p:cNvPr id="3" name="Subtítulo 2">
+            <a:extLst>
+              <a:ext uri="{FF2B5EF4-FFF2-40B4-BE49-F238E27FC236}">
+                <a16:creationId xmlns:a16="http://schemas.microsoft.com/office/drawing/2014/main" id="{FF1A732F-D891-1388-E28A-C351D867B1AB}"/>
+              </a:ext>
+            </a:extLst>
+          </p:cNvPr>
+          <p:cNvSpPr>
+            <a:spLocks noGrp="1"/>
           </p:cNvSpPr>
-          <p:nvPr/>
+          <p:nvPr>
+            <p:ph type="subTitle" idx="1"/>
+          </p:nvPr>
         </p:nvSpPr>
         <p:spPr>
           <a:xfrm>
-            <a:off x="1225124" y="1579087"/>
+            <a:off x="1225124" y="1580400"/>
             <a:ext cx="9741751" cy="365748"/>
           </a:xfrm>
-          <a:prstGeom prst="rect">
-            <a:avLst/>
-          </a:prstGeom>
         </p:spPr>
         <p:txBody>
-          <a:bodyPr vert="horz" lIns="91440" tIns="45720" rIns="91440" bIns="45720" rtlCol="0">
+          <a:bodyPr>
             <a:noAutofit/>
           </a:bodyPr>
-          <a:lstStyle>
-            <a:lvl1pPr marL="0" indent="0" algn="ctr" defTabSz="914400" rtl="0" eaLnBrk="1" latinLnBrk="0" hangingPunct="1">
-              <a:lnSpc>
-                <a:spcPct val="90000"/>
-              </a:lnSpc>
-              <a:spcBef>
-                <a:spcPts val="1000"/>
-              </a:spcBef>
-              <a:buFont typeface="Arial" panose="020B0604020202020204" pitchFamily="34" charset="0"/>
-              <a:buNone/>
-              <a:defRPr sz="2400" kern="1200">
-                <a:solidFill>
-                  <a:schemeClr val="tx1"/>
-                </a:solidFill>
-                <a:latin typeface="+mn-lt"/>
-                <a:ea typeface="+mn-ea"/>
-                <a:cs typeface="+mn-cs"/>
-              </a:defRPr>
-            </a:lvl1pPr>
-            <a:lvl2pPr marL="457200" indent="0" algn="ctr" defTabSz="914400" rtl="0" eaLnBrk="1" latinLnBrk="0" hangingPunct="1">
-              <a:lnSpc>
-                <a:spcPct val="90000"/>
-              </a:lnSpc>
-              <a:spcBef>
-                <a:spcPts val="500"/>
-              </a:spcBef>
-              <a:buFont typeface="Arial" panose="020B0604020202020204" pitchFamily="34" charset="0"/>
-              <a:buNone/>
-              <a:defRPr sz="2000" kern="1200">
-                <a:solidFill>
-                  <a:schemeClr val="tx1"/>
-                </a:solidFill>
-                <a:latin typeface="+mn-lt"/>
-                <a:ea typeface="+mn-ea"/>
-                <a:cs typeface="+mn-cs"/>
-              </a:defRPr>
-            </a:lvl2pPr>
-            <a:lvl3pPr marL="914400" indent="0" algn="ctr" defTabSz="914400" rtl="0" eaLnBrk="1" latinLnBrk="0" hangingPunct="1">
-              <a:lnSpc>
-                <a:spcPct val="90000"/>
-              </a:lnSpc>
-              <a:spcBef>
-                <a:spcPts val="500"/>
-              </a:spcBef>
-              <a:buFont typeface="Arial" panose="020B0604020202020204" pitchFamily="34" charset="0"/>
-              <a:buNone/>
-              <a:defRPr sz="1800" kern="1200">
-                <a:solidFill>
-                  <a:schemeClr val="tx1"/>
-                </a:solidFill>
-                <a:latin typeface="+mn-lt"/>
-                <a:ea typeface="+mn-ea"/>
-                <a:cs typeface="+mn-cs"/>
-              </a:defRPr>
-            </a:lvl3pPr>
-            <a:lvl4pPr marL="1371600" indent="0" algn="ctr" defTabSz="914400" rtl="0" eaLnBrk="1" latinLnBrk="0" hangingPunct="1">
-              <a:lnSpc>
-                <a:spcPct val="90000"/>
-              </a:lnSpc>
-              <a:spcBef>
-                <a:spcPts val="500"/>
-              </a:spcBef>
-              <a:buFont typeface="Arial" panose="020B0604020202020204" pitchFamily="34" charset="0"/>
-              <a:buNone/>
-              <a:defRPr sz="1600" kern="1200">
-                <a:solidFill>
-                  <a:schemeClr val="tx1"/>
-                </a:solidFill>
-                <a:latin typeface="+mn-lt"/>
-                <a:ea typeface="+mn-ea"/>
-                <a:cs typeface="+mn-cs"/>
-              </a:defRPr>
-            </a:lvl4pPr>
-            <a:lvl5pPr marL="1828800" indent="0" algn="ctr" defTabSz="914400" rtl="0" eaLnBrk="1" latinLnBrk="0" hangingPunct="1">
-              <a:lnSpc>
-                <a:spcPct val="90000"/>
-              </a:lnSpc>
-              <a:spcBef>
-                <a:spcPts val="500"/>
-              </a:spcBef>
-              <a:buFont typeface="Arial" panose="020B0604020202020204" pitchFamily="34" charset="0"/>
-              <a:buNone/>
-              <a:defRPr sz="1600" kern="1200">
-                <a:solidFill>
-                  <a:schemeClr val="tx1"/>
-                </a:solidFill>
-                <a:latin typeface="+mn-lt"/>
-                <a:ea typeface="+mn-ea"/>
-                <a:cs typeface="+mn-cs"/>
-              </a:defRPr>
-            </a:lvl5pPr>
-            <a:lvl6pPr marL="2286000" indent="0" algn="ctr" defTabSz="914400" rtl="0" eaLnBrk="1" latinLnBrk="0" hangingPunct="1">
-              <a:lnSpc>
-                <a:spcPct val="90000"/>
-              </a:lnSpc>
-              <a:spcBef>
-                <a:spcPts val="500"/>
-              </a:spcBef>
-              <a:buFont typeface="Arial" panose="020B0604020202020204" pitchFamily="34" charset="0"/>
-              <a:buNone/>
-              <a:defRPr sz="1600" kern="1200">
-                <a:solidFill>
-                  <a:schemeClr val="tx1"/>
-                </a:solidFill>
-                <a:latin typeface="+mn-lt"/>
-                <a:ea typeface="+mn-ea"/>
-                <a:cs typeface="+mn-cs"/>
-              </a:defRPr>
-            </a:lvl6pPr>
-            <a:lvl7pPr marL="2743200" indent="0" algn="ctr" defTabSz="914400" rtl="0" eaLnBrk="1" latinLnBrk="0" hangingPunct="1">
-              <a:lnSpc>
-                <a:spcPct val="90000"/>
-              </a:lnSpc>
-              <a:spcBef>
-                <a:spcPts val="500"/>
-              </a:spcBef>
-              <a:buFont typeface="Arial" panose="020B0604020202020204" pitchFamily="34" charset="0"/>
-              <a:buNone/>
-              <a:defRPr sz="1600" kern="1200">
-                <a:solidFill>
-                  <a:schemeClr val="tx1"/>
-                </a:solidFill>
-                <a:latin typeface="+mn-lt"/>
-                <a:ea typeface="+mn-ea"/>
-                <a:cs typeface="+mn-cs"/>
-              </a:defRPr>
-            </a:lvl7pPr>
-            <a:lvl8pPr marL="3200400" indent="0" algn="ctr" defTabSz="914400" rtl="0" eaLnBrk="1" latinLnBrk="0" hangingPunct="1">
-              <a:lnSpc>
-                <a:spcPct val="90000"/>
-              </a:lnSpc>
-              <a:spcBef>
-                <a:spcPts val="500"/>
-              </a:spcBef>
-              <a:buFont typeface="Arial" panose="020B0604020202020204" pitchFamily="34" charset="0"/>
-              <a:buNone/>
-              <a:defRPr sz="1600" kern="1200">
-                <a:solidFill>
-                  <a:schemeClr val="tx1"/>
-                </a:solidFill>
-                <a:latin typeface="+mn-lt"/>
-                <a:ea typeface="+mn-ea"/>
-                <a:cs typeface="+mn-cs"/>
-              </a:defRPr>
-            </a:lvl8pPr>
-            <a:lvl9pPr marL="3657600" indent="0" algn="ctr" defTabSz="914400" rtl="0" eaLnBrk="1" latinLnBrk="0" hangingPunct="1">
-              <a:lnSpc>
-                <a:spcPct val="90000"/>
-              </a:lnSpc>
-              <a:spcBef>
-                <a:spcPts val="500"/>
-              </a:spcBef>
-              <a:buFont typeface="Arial" panose="020B0604020202020204" pitchFamily="34" charset="0"/>
-              <a:buNone/>
-              <a:defRPr sz="1600" kern="1200">
-                <a:solidFill>
-                  <a:schemeClr val="tx1"/>
-                </a:solidFill>
-                <a:latin typeface="+mn-lt"/>
-                <a:ea typeface="+mn-ea"/>
-                <a:cs typeface="+mn-cs"/>
-              </a:defRPr>
-            </a:lvl9pPr>
-          </a:lstStyle>
+          <a:lstStyle/>
           <a:p>
             <a:pPr algn="l"/>
             <a:r>
@@ -7970,7 +12476,7 @@
                   <a:schemeClr val="bg1"/>
                 </a:solidFill>
               </a:rPr>
-              <a:t>FUNCIONAMENTO</a:t>
+              <a:t>PROTOCOLO E DINÂMICA DE COMUNICAÇÃO</a:t>
             </a:r>
           </a:p>
         </p:txBody>
@@ -7980,7 +12486,7 @@
           <p:cNvPr id="4" name="Google Shape;140;p3">
             <a:extLst>
               <a:ext uri="{FF2B5EF4-FFF2-40B4-BE49-F238E27FC236}">
-                <a16:creationId xmlns:a16="http://schemas.microsoft.com/office/drawing/2014/main" id="{0EA194E3-55EC-F09F-A0FA-0548A5E8B801}"/>
+                <a16:creationId xmlns:a16="http://schemas.microsoft.com/office/drawing/2014/main" id="{E5D0F422-1872-C746-418F-F2F204CFBC60}"/>
               </a:ext>
             </a:extLst>
           </p:cNvPr>
@@ -8011,33 +12517,83 @@
       </p:cxnSp>
       <p:sp>
         <p:nvSpPr>
-          <p:cNvPr id="6" name="Subtítulo 5">
-            <a:extLst>
-              <a:ext uri="{FF2B5EF4-FFF2-40B4-BE49-F238E27FC236}">
-                <a16:creationId xmlns:a16="http://schemas.microsoft.com/office/drawing/2014/main" id="{B4D8EAB5-23D4-23BE-B927-23E4E9D2D48B}"/>
-              </a:ext>
-            </a:extLst>
-          </p:cNvPr>
-          <p:cNvSpPr>
-            <a:spLocks noGrp="1"/>
-          </p:cNvSpPr>
-          <p:nvPr>
-            <p:ph type="subTitle" idx="1"/>
-          </p:nvPr>
+          <p:cNvPr id="2" name="CaixaDeTexto 1">
+            <a:extLst>
+              <a:ext uri="{FF2B5EF4-FFF2-40B4-BE49-F238E27FC236}">
+                <a16:creationId xmlns:a16="http://schemas.microsoft.com/office/drawing/2014/main" id="{95934CDD-DE20-3246-1C23-7B9D24DE0FCD}"/>
+              </a:ext>
+            </a:extLst>
+          </p:cNvPr>
+          <p:cNvSpPr txBox="1"/>
+          <p:nvPr/>
         </p:nvSpPr>
-        <p:spPr/>
+        <p:spPr>
+          <a:xfrm>
+            <a:off x="1829924" y="2470034"/>
+            <a:ext cx="9136951" cy="3416320"/>
+          </a:xfrm>
+          <a:prstGeom prst="rect">
+            <a:avLst/>
+          </a:prstGeom>
+          <a:noFill/>
+        </p:spPr>
         <p:txBody>
-          <a:bodyPr/>
+          <a:bodyPr wrap="square">
+            <a:spAutoFit/>
+          </a:bodyPr>
           <a:lstStyle/>
           <a:p>
-            <a:endParaRPr lang="pt-BR" dirty="0"/>
+            <a:r>
+              <a:rPr lang="pt-BR" sz="2400" b="1" dirty="0">
+                <a:solidFill>
+                  <a:schemeClr val="bg1"/>
+                </a:solidFill>
+              </a:rPr>
+              <a:t>A comunicação Bluetooth é iniciada por meio de um processo de emparelhamento entre dispositivos. Um dispositivo emite uma solicitação de descoberta, e os dispositivos disponíveis respondem com informações sobre seus serviços. Uma vez que os dispositivos se identificam e concordam em estabelecer uma conexão, eles trocam chaves de segurança e configuram os parâmetros de comunicação. A comunicação é finalizada quando os dispositivos encerram a sessão de forma voluntária ou quando a conexão é perdida devido a fatores como perda de sinal ou desligamento de um dos dispositivos.</a:t>
+            </a:r>
           </a:p>
         </p:txBody>
       </p:sp>
+      <p:pic>
+        <p:nvPicPr>
+          <p:cNvPr id="7" name="Gráfico 6">
+            <a:extLst>
+              <a:ext uri="{FF2B5EF4-FFF2-40B4-BE49-F238E27FC236}">
+                <a16:creationId xmlns:a16="http://schemas.microsoft.com/office/drawing/2014/main" id="{4EA9A76E-43C4-772F-29C7-B0DD8CC82CD4}"/>
+              </a:ext>
+            </a:extLst>
+          </p:cNvPr>
+          <p:cNvPicPr>
+            <a:picLocks noChangeAspect="1"/>
+          </p:cNvPicPr>
+          <p:nvPr/>
+        </p:nvPicPr>
+        <p:blipFill>
+          <a:blip r:embed="rId3">
+            <a:extLst>
+              <a:ext uri="{96DAC541-7B7A-43D3-8B79-37D633B846F1}">
+                <asvg:svgBlip xmlns:asvg="http://schemas.microsoft.com/office/drawing/2016/SVG/main" r:embed="rId4"/>
+              </a:ext>
+            </a:extLst>
+          </a:blip>
+          <a:stretch>
+            <a:fillRect/>
+          </a:stretch>
+        </p:blipFill>
+        <p:spPr>
+          <a:xfrm>
+            <a:off x="1225124" y="2447525"/>
+            <a:ext cx="604800" cy="604800"/>
+          </a:xfrm>
+          <a:prstGeom prst="rect">
+            <a:avLst/>
+          </a:prstGeom>
+        </p:spPr>
+      </p:pic>
     </p:spTree>
     <p:extLst>
       <p:ext uri="{BB962C8B-B14F-4D97-AF65-F5344CB8AC3E}">
-        <p14:creationId xmlns:p14="http://schemas.microsoft.com/office/powerpoint/2010/main" val="3332660130"/>
+        <p14:creationId xmlns:p14="http://schemas.microsoft.com/office/powerpoint/2010/main" val="1048234487"/>
       </p:ext>
     </p:extLst>
   </p:cSld>
@@ -8058,7 +12614,7 @@
           </a:blip>
           <a:srcRect/>
           <a:stretch>
-            <a:fillRect t="-58000" r="-47000" b="-2000"/>
+            <a:fillRect l="-1000" t="-1000" r="-10000" b="-349000"/>
           </a:stretch>
         </a:blipFill>
         <a:effectLst/>
@@ -8069,7 +12625,7 @@
         <p:cNvPr id="1" name="">
           <a:extLst>
             <a:ext uri="{FF2B5EF4-FFF2-40B4-BE49-F238E27FC236}">
-              <a16:creationId xmlns:a16="http://schemas.microsoft.com/office/drawing/2014/main" id="{1F3B7D5C-D29F-F452-9715-7A0344F234D5}"/>
+              <a16:creationId xmlns:a16="http://schemas.microsoft.com/office/drawing/2014/main" id="{4B824055-1773-E500-8A2D-4FC89DF05AA3}"/>
             </a:ext>
           </a:extLst>
         </p:cNvPr>
@@ -8086,195 +12642,70 @@
       </p:grpSpPr>
       <p:sp>
         <p:nvSpPr>
-          <p:cNvPr id="2" name="Subtítulo 2">
-            <a:extLst>
-              <a:ext uri="{FF2B5EF4-FFF2-40B4-BE49-F238E27FC236}">
-                <a16:creationId xmlns:a16="http://schemas.microsoft.com/office/drawing/2014/main" id="{ED4BA66D-8F04-F67B-21B3-3B76B01202B9}"/>
-              </a:ext>
-            </a:extLst>
-          </p:cNvPr>
-          <p:cNvSpPr txBox="1">
-            <a:spLocks/>
-          </p:cNvSpPr>
+          <p:cNvPr id="10" name="CaixaDeTexto 9">
+            <a:extLst>
+              <a:ext uri="{FF2B5EF4-FFF2-40B4-BE49-F238E27FC236}">
+                <a16:creationId xmlns:a16="http://schemas.microsoft.com/office/drawing/2014/main" id="{EB7D93FF-7815-C1E6-37B6-2A918F46D981}"/>
+              </a:ext>
+            </a:extLst>
+          </p:cNvPr>
+          <p:cNvSpPr txBox="1"/>
           <p:nvPr/>
         </p:nvSpPr>
         <p:spPr>
           <a:xfrm>
-            <a:off x="1225124" y="1579087"/>
-            <a:ext cx="9741751" cy="365748"/>
+            <a:off x="1829924" y="3480767"/>
+            <a:ext cx="9136951" cy="830997"/>
           </a:xfrm>
           <a:prstGeom prst="rect">
             <a:avLst/>
           </a:prstGeom>
+          <a:noFill/>
         </p:spPr>
         <p:txBody>
-          <a:bodyPr vert="horz" lIns="91440" tIns="45720" rIns="91440" bIns="45720" rtlCol="0">
+          <a:bodyPr wrap="square">
+            <a:spAutoFit/>
+          </a:bodyPr>
+          <a:lstStyle/>
+          <a:p>
+            <a:r>
+              <a:rPr lang="pt-BR" sz="2400" b="1" dirty="0">
+                <a:solidFill>
+                  <a:schemeClr val="bg1"/>
+                </a:solidFill>
+              </a:rPr>
+              <a:t>Taxa de transmissão de dados: Embora tenha evoluído, a taxa de transmissão do Bluetooth é inferior à de outras tecnologias sem fio.</a:t>
+            </a:r>
+          </a:p>
+        </p:txBody>
+      </p:sp>
+      <p:sp>
+        <p:nvSpPr>
+          <p:cNvPr id="3" name="Subtítulo 2">
+            <a:extLst>
+              <a:ext uri="{FF2B5EF4-FFF2-40B4-BE49-F238E27FC236}">
+                <a16:creationId xmlns:a16="http://schemas.microsoft.com/office/drawing/2014/main" id="{BF5DF865-B419-83C0-432E-A390B12D2E89}"/>
+              </a:ext>
+            </a:extLst>
+          </p:cNvPr>
+          <p:cNvSpPr>
+            <a:spLocks noGrp="1"/>
+          </p:cNvSpPr>
+          <p:nvPr>
+            <p:ph type="subTitle" idx="1"/>
+          </p:nvPr>
+        </p:nvSpPr>
+        <p:spPr>
+          <a:xfrm>
+            <a:off x="1225124" y="1580400"/>
+            <a:ext cx="9741751" cy="365748"/>
+          </a:xfrm>
+        </p:spPr>
+        <p:txBody>
+          <a:bodyPr>
             <a:noAutofit/>
           </a:bodyPr>
-          <a:lstStyle>
-            <a:lvl1pPr marL="0" indent="0" algn="ctr" defTabSz="914400" rtl="0" eaLnBrk="1" latinLnBrk="0" hangingPunct="1">
-              <a:lnSpc>
-                <a:spcPct val="90000"/>
-              </a:lnSpc>
-              <a:spcBef>
-                <a:spcPts val="1000"/>
-              </a:spcBef>
-              <a:buFont typeface="Arial" panose="020B0604020202020204" pitchFamily="34" charset="0"/>
-              <a:buNone/>
-              <a:defRPr sz="2400" kern="1200">
-                <a:solidFill>
-                  <a:schemeClr val="tx1"/>
-                </a:solidFill>
-                <a:latin typeface="+mn-lt"/>
-                <a:ea typeface="+mn-ea"/>
-                <a:cs typeface="+mn-cs"/>
-              </a:defRPr>
-            </a:lvl1pPr>
-            <a:lvl2pPr marL="457200" indent="0" algn="ctr" defTabSz="914400" rtl="0" eaLnBrk="1" latinLnBrk="0" hangingPunct="1">
-              <a:lnSpc>
-                <a:spcPct val="90000"/>
-              </a:lnSpc>
-              <a:spcBef>
-                <a:spcPts val="500"/>
-              </a:spcBef>
-              <a:buFont typeface="Arial" panose="020B0604020202020204" pitchFamily="34" charset="0"/>
-              <a:buNone/>
-              <a:defRPr sz="2000" kern="1200">
-                <a:solidFill>
-                  <a:schemeClr val="tx1"/>
-                </a:solidFill>
-                <a:latin typeface="+mn-lt"/>
-                <a:ea typeface="+mn-ea"/>
-                <a:cs typeface="+mn-cs"/>
-              </a:defRPr>
-            </a:lvl2pPr>
-            <a:lvl3pPr marL="914400" indent="0" algn="ctr" defTabSz="914400" rtl="0" eaLnBrk="1" latinLnBrk="0" hangingPunct="1">
-              <a:lnSpc>
-                <a:spcPct val="90000"/>
-              </a:lnSpc>
-              <a:spcBef>
-                <a:spcPts val="500"/>
-              </a:spcBef>
-              <a:buFont typeface="Arial" panose="020B0604020202020204" pitchFamily="34" charset="0"/>
-              <a:buNone/>
-              <a:defRPr sz="1800" kern="1200">
-                <a:solidFill>
-                  <a:schemeClr val="tx1"/>
-                </a:solidFill>
-                <a:latin typeface="+mn-lt"/>
-                <a:ea typeface="+mn-ea"/>
-                <a:cs typeface="+mn-cs"/>
-              </a:defRPr>
-            </a:lvl3pPr>
-            <a:lvl4pPr marL="1371600" indent="0" algn="ctr" defTabSz="914400" rtl="0" eaLnBrk="1" latinLnBrk="0" hangingPunct="1">
-              <a:lnSpc>
-                <a:spcPct val="90000"/>
-              </a:lnSpc>
-              <a:spcBef>
-                <a:spcPts val="500"/>
-              </a:spcBef>
-              <a:buFont typeface="Arial" panose="020B0604020202020204" pitchFamily="34" charset="0"/>
-              <a:buNone/>
-              <a:defRPr sz="1600" kern="1200">
-                <a:solidFill>
-                  <a:schemeClr val="tx1"/>
-                </a:solidFill>
-                <a:latin typeface="+mn-lt"/>
-                <a:ea typeface="+mn-ea"/>
-                <a:cs typeface="+mn-cs"/>
-              </a:defRPr>
-            </a:lvl4pPr>
-            <a:lvl5pPr marL="1828800" indent="0" algn="ctr" defTabSz="914400" rtl="0" eaLnBrk="1" latinLnBrk="0" hangingPunct="1">
-              <a:lnSpc>
-                <a:spcPct val="90000"/>
-              </a:lnSpc>
-              <a:spcBef>
-                <a:spcPts val="500"/>
-              </a:spcBef>
-              <a:buFont typeface="Arial" panose="020B0604020202020204" pitchFamily="34" charset="0"/>
-              <a:buNone/>
-              <a:defRPr sz="1600" kern="1200">
-                <a:solidFill>
-                  <a:schemeClr val="tx1"/>
-                </a:solidFill>
-                <a:latin typeface="+mn-lt"/>
-                <a:ea typeface="+mn-ea"/>
-                <a:cs typeface="+mn-cs"/>
-              </a:defRPr>
-            </a:lvl5pPr>
-            <a:lvl6pPr marL="2286000" indent="0" algn="ctr" defTabSz="914400" rtl="0" eaLnBrk="1" latinLnBrk="0" hangingPunct="1">
-              <a:lnSpc>
-                <a:spcPct val="90000"/>
-              </a:lnSpc>
-              <a:spcBef>
-                <a:spcPts val="500"/>
-              </a:spcBef>
-              <a:buFont typeface="Arial" panose="020B0604020202020204" pitchFamily="34" charset="0"/>
-              <a:buNone/>
-              <a:defRPr sz="1600" kern="1200">
-                <a:solidFill>
-                  <a:schemeClr val="tx1"/>
-                </a:solidFill>
-                <a:latin typeface="+mn-lt"/>
-                <a:ea typeface="+mn-ea"/>
-                <a:cs typeface="+mn-cs"/>
-              </a:defRPr>
-            </a:lvl6pPr>
-            <a:lvl7pPr marL="2743200" indent="0" algn="ctr" defTabSz="914400" rtl="0" eaLnBrk="1" latinLnBrk="0" hangingPunct="1">
-              <a:lnSpc>
-                <a:spcPct val="90000"/>
-              </a:lnSpc>
-              <a:spcBef>
-                <a:spcPts val="500"/>
-              </a:spcBef>
-              <a:buFont typeface="Arial" panose="020B0604020202020204" pitchFamily="34" charset="0"/>
-              <a:buNone/>
-              <a:defRPr sz="1600" kern="1200">
-                <a:solidFill>
-                  <a:schemeClr val="tx1"/>
-                </a:solidFill>
-                <a:latin typeface="+mn-lt"/>
-                <a:ea typeface="+mn-ea"/>
-                <a:cs typeface="+mn-cs"/>
-              </a:defRPr>
-            </a:lvl7pPr>
-            <a:lvl8pPr marL="3200400" indent="0" algn="ctr" defTabSz="914400" rtl="0" eaLnBrk="1" latinLnBrk="0" hangingPunct="1">
-              <a:lnSpc>
-                <a:spcPct val="90000"/>
-              </a:lnSpc>
-              <a:spcBef>
-                <a:spcPts val="500"/>
-              </a:spcBef>
-              <a:buFont typeface="Arial" panose="020B0604020202020204" pitchFamily="34" charset="0"/>
-              <a:buNone/>
-              <a:defRPr sz="1600" kern="1200">
-                <a:solidFill>
-                  <a:schemeClr val="tx1"/>
-                </a:solidFill>
-                <a:latin typeface="+mn-lt"/>
-                <a:ea typeface="+mn-ea"/>
-                <a:cs typeface="+mn-cs"/>
-              </a:defRPr>
-            </a:lvl8pPr>
-            <a:lvl9pPr marL="3657600" indent="0" algn="ctr" defTabSz="914400" rtl="0" eaLnBrk="1" latinLnBrk="0" hangingPunct="1">
-              <a:lnSpc>
-                <a:spcPct val="90000"/>
-              </a:lnSpc>
-              <a:spcBef>
-                <a:spcPts val="500"/>
-              </a:spcBef>
-              <a:buFont typeface="Arial" panose="020B0604020202020204" pitchFamily="34" charset="0"/>
-              <a:buNone/>
-              <a:defRPr sz="1600" kern="1200">
-                <a:solidFill>
-                  <a:schemeClr val="tx1"/>
-                </a:solidFill>
-                <a:latin typeface="+mn-lt"/>
-                <a:ea typeface="+mn-ea"/>
-                <a:cs typeface="+mn-cs"/>
-              </a:defRPr>
-            </a:lvl9pPr>
-          </a:lstStyle>
+          <a:lstStyle/>
           <a:p>
             <a:pPr algn="l"/>
             <a:r>
@@ -8283,7 +12714,7 @@
                   <a:schemeClr val="bg1"/>
                 </a:solidFill>
               </a:rPr>
-              <a:t>ARQUITETURA</a:t>
+              <a:t>LIMITAÇÕES</a:t>
             </a:r>
           </a:p>
         </p:txBody>
@@ -8293,7 +12724,7 @@
           <p:cNvPr id="4" name="Google Shape;140;p3">
             <a:extLst>
               <a:ext uri="{FF2B5EF4-FFF2-40B4-BE49-F238E27FC236}">
-                <a16:creationId xmlns:a16="http://schemas.microsoft.com/office/drawing/2014/main" id="{2E076CA8-3E6A-96D2-B546-ADD67E44545F}"/>
+                <a16:creationId xmlns:a16="http://schemas.microsoft.com/office/drawing/2014/main" id="{6C84B8AA-863F-89C5-ACF4-8F419590C6DC}"/>
               </a:ext>
             </a:extLst>
           </p:cNvPr>
@@ -8324,33 +12755,194 @@
       </p:cxnSp>
       <p:sp>
         <p:nvSpPr>
-          <p:cNvPr id="6" name="Subtítulo 5">
-            <a:extLst>
-              <a:ext uri="{FF2B5EF4-FFF2-40B4-BE49-F238E27FC236}">
-                <a16:creationId xmlns:a16="http://schemas.microsoft.com/office/drawing/2014/main" id="{31D7C184-17C1-4DDC-25E5-0FFBD5D63400}"/>
-              </a:ext>
-            </a:extLst>
-          </p:cNvPr>
-          <p:cNvSpPr>
-            <a:spLocks noGrp="1"/>
-          </p:cNvSpPr>
-          <p:nvPr>
-            <p:ph type="subTitle" idx="1"/>
-          </p:nvPr>
+          <p:cNvPr id="2" name="CaixaDeTexto 1">
+            <a:extLst>
+              <a:ext uri="{FF2B5EF4-FFF2-40B4-BE49-F238E27FC236}">
+                <a16:creationId xmlns:a16="http://schemas.microsoft.com/office/drawing/2014/main" id="{889FAABA-5C84-D0A0-A92D-0C5583433F35}"/>
+              </a:ext>
+            </a:extLst>
+          </p:cNvPr>
+          <p:cNvSpPr txBox="1"/>
+          <p:nvPr/>
         </p:nvSpPr>
-        <p:spPr/>
+        <p:spPr>
+          <a:xfrm>
+            <a:off x="1829924" y="2470034"/>
+            <a:ext cx="9136951" cy="830997"/>
+          </a:xfrm>
+          <a:prstGeom prst="rect">
+            <a:avLst/>
+          </a:prstGeom>
+          <a:noFill/>
+        </p:spPr>
         <p:txBody>
-          <a:bodyPr/>
+          <a:bodyPr wrap="square">
+            <a:spAutoFit/>
+          </a:bodyPr>
           <a:lstStyle/>
           <a:p>
-            <a:endParaRPr lang="pt-BR"/>
+            <a:r>
+              <a:rPr lang="pt-BR" sz="2400" b="1" dirty="0">
+                <a:solidFill>
+                  <a:schemeClr val="bg1"/>
+                </a:solidFill>
+              </a:rPr>
+              <a:t>Alcance limitado: Os dispositivos Bluetooth tem um alcance operacional de até 100 metros.</a:t>
+            </a:r>
+          </a:p>
+        </p:txBody>
+      </p:sp>
+      <p:pic>
+        <p:nvPicPr>
+          <p:cNvPr id="6" name="Gráfico 5">
+            <a:extLst>
+              <a:ext uri="{FF2B5EF4-FFF2-40B4-BE49-F238E27FC236}">
+                <a16:creationId xmlns:a16="http://schemas.microsoft.com/office/drawing/2014/main" id="{9A275F9E-3D59-2C73-B3F8-16C64629BD9E}"/>
+              </a:ext>
+            </a:extLst>
+          </p:cNvPr>
+          <p:cNvPicPr>
+            <a:picLocks noChangeAspect="1"/>
+          </p:cNvPicPr>
+          <p:nvPr/>
+        </p:nvPicPr>
+        <p:blipFill>
+          <a:blip r:embed="rId3">
+            <a:extLst>
+              <a:ext uri="{96DAC541-7B7A-43D3-8B79-37D633B846F1}">
+                <asvg:svgBlip xmlns:asvg="http://schemas.microsoft.com/office/drawing/2016/SVG/main" r:embed="rId4"/>
+              </a:ext>
+            </a:extLst>
+          </a:blip>
+          <a:stretch>
+            <a:fillRect/>
+          </a:stretch>
+        </p:blipFill>
+        <p:spPr>
+          <a:xfrm>
+            <a:off x="1225124" y="2470034"/>
+            <a:ext cx="604800" cy="604800"/>
+          </a:xfrm>
+          <a:prstGeom prst="rect">
+            <a:avLst/>
+          </a:prstGeom>
+        </p:spPr>
+      </p:pic>
+      <p:pic>
+        <p:nvPicPr>
+          <p:cNvPr id="9" name="Gráfico 8">
+            <a:extLst>
+              <a:ext uri="{FF2B5EF4-FFF2-40B4-BE49-F238E27FC236}">
+                <a16:creationId xmlns:a16="http://schemas.microsoft.com/office/drawing/2014/main" id="{B261ED72-4026-9252-EA3A-F54A934F1322}"/>
+              </a:ext>
+            </a:extLst>
+          </p:cNvPr>
+          <p:cNvPicPr>
+            <a:picLocks noChangeAspect="1"/>
+          </p:cNvPicPr>
+          <p:nvPr/>
+        </p:nvPicPr>
+        <p:blipFill>
+          <a:blip r:embed="rId5">
+            <a:extLst>
+              <a:ext uri="{96DAC541-7B7A-43D3-8B79-37D633B846F1}">
+                <asvg:svgBlip xmlns:asvg="http://schemas.microsoft.com/office/drawing/2016/SVG/main" r:embed="rId6"/>
+              </a:ext>
+            </a:extLst>
+          </a:blip>
+          <a:stretch>
+            <a:fillRect/>
+          </a:stretch>
+        </p:blipFill>
+        <p:spPr>
+          <a:xfrm>
+            <a:off x="1225124" y="3480767"/>
+            <a:ext cx="604800" cy="604800"/>
+          </a:xfrm>
+          <a:prstGeom prst="rect">
+            <a:avLst/>
+          </a:prstGeom>
+        </p:spPr>
+      </p:pic>
+      <p:pic>
+        <p:nvPicPr>
+          <p:cNvPr id="12" name="Gráfico 11">
+            <a:extLst>
+              <a:ext uri="{FF2B5EF4-FFF2-40B4-BE49-F238E27FC236}">
+                <a16:creationId xmlns:a16="http://schemas.microsoft.com/office/drawing/2014/main" id="{0287D34D-8E9A-371E-14CD-893F691A70CA}"/>
+              </a:ext>
+            </a:extLst>
+          </p:cNvPr>
+          <p:cNvPicPr>
+            <a:picLocks noChangeAspect="1"/>
+          </p:cNvPicPr>
+          <p:nvPr/>
+        </p:nvPicPr>
+        <p:blipFill>
+          <a:blip r:embed="rId7">
+            <a:extLst>
+              <a:ext uri="{96DAC541-7B7A-43D3-8B79-37D633B846F1}">
+                <asvg:svgBlip xmlns:asvg="http://schemas.microsoft.com/office/drawing/2016/SVG/main" r:embed="rId8"/>
+              </a:ext>
+            </a:extLst>
+          </a:blip>
+          <a:stretch>
+            <a:fillRect/>
+          </a:stretch>
+        </p:blipFill>
+        <p:spPr>
+          <a:xfrm>
+            <a:off x="1325137" y="4491500"/>
+            <a:ext cx="504000" cy="504000"/>
+          </a:xfrm>
+          <a:prstGeom prst="rect">
+            <a:avLst/>
+          </a:prstGeom>
+        </p:spPr>
+      </p:pic>
+      <p:sp>
+        <p:nvSpPr>
+          <p:cNvPr id="13" name="CaixaDeTexto 12">
+            <a:extLst>
+              <a:ext uri="{FF2B5EF4-FFF2-40B4-BE49-F238E27FC236}">
+                <a16:creationId xmlns:a16="http://schemas.microsoft.com/office/drawing/2014/main" id="{B20EC894-49DE-6E00-3298-8E01089312DB}"/>
+              </a:ext>
+            </a:extLst>
+          </p:cNvPr>
+          <p:cNvSpPr txBox="1"/>
+          <p:nvPr/>
+        </p:nvSpPr>
+        <p:spPr>
+          <a:xfrm>
+            <a:off x="1829924" y="4376634"/>
+            <a:ext cx="9136951" cy="1200329"/>
+          </a:xfrm>
+          <a:prstGeom prst="rect">
+            <a:avLst/>
+          </a:prstGeom>
+          <a:noFill/>
+        </p:spPr>
+        <p:txBody>
+          <a:bodyPr wrap="square">
+            <a:spAutoFit/>
+          </a:bodyPr>
+          <a:lstStyle/>
+          <a:p>
+            <a:r>
+              <a:rPr lang="pt-BR" sz="2400" b="1" dirty="0">
+                <a:solidFill>
+                  <a:schemeClr val="bg1"/>
+                </a:solidFill>
+              </a:rPr>
+              <a:t>Interferência: Devido ao compartilhamento da faixa de 2,4 GHz com outras tecnologias, pode sofrer interferências que afetam a qualidade da comunicação.</a:t>
+            </a:r>
           </a:p>
         </p:txBody>
       </p:sp>
     </p:spTree>
     <p:extLst>
       <p:ext uri="{BB962C8B-B14F-4D97-AF65-F5344CB8AC3E}">
-        <p14:creationId xmlns:p14="http://schemas.microsoft.com/office/powerpoint/2010/main" val="4157541944"/>
+        <p14:creationId xmlns:p14="http://schemas.microsoft.com/office/powerpoint/2010/main" val="2570610664"/>
       </p:ext>
     </p:extLst>
   </p:cSld>
